--- a/dashboard_mockup.pptx
+++ b/dashboard_mockup.pptx
@@ -13,9 +13,10 @@
     <p:sldId id="261" r:id="rId7"/>
     <p:sldId id="262" r:id="rId8"/>
     <p:sldId id="263" r:id="rId9"/>
+    <p:sldId id="264" r:id="rId10"/>
   </p:sldIdLst>
   <p:notesMasterIdLst>
-    <p:notesMasterId r:id="rId10"/>
+    <p:notesMasterId r:id="rId11"/>
   </p:notesMasterIdLst>
   <p:sldSz cx="12188952" cy="6858000"/>
   <p:notesSz cx="6858000" cy="12188952"/>
@@ -1149,6 +1150,94 @@
             <a:fld id="{F7021451-1387-4CA6-816F-3879F97B5CBC}" type="slidenum">
               <a:rPr lang="en-US"/>
               <a:t>8</a:t>
+            </a:fld>
+            <a:endParaRPr lang="en-US"/>
+          </a:p>
+        </p:txBody>
+      </p:sp>
+    </p:spTree>
+    <p:extLst>
+      <p:ext uri="{BB962C8B-B14F-4D97-AF65-F5344CB8AC3E}">
+        <p14:creationId xmlns:p14="http://schemas.microsoft.com/office/powerpoint/2010/main" val="1024086991"/>
+      </p:ext>
+    </p:extLst>
+  </p:cSld>
+  <p:clrMapOvr>
+    <a:masterClrMapping/>
+  </p:clrMapOvr>
+</p:notes>
+</file>
+
+<file path=ppt/notesSlides/notesSlide9.xml><?xml version="1.0" encoding="utf-8"?>
+<p:notes xmlns:a="http://schemas.openxmlformats.org/drawingml/2006/main" xmlns:r="http://schemas.openxmlformats.org/officeDocument/2006/relationships" xmlns:p="http://schemas.openxmlformats.org/presentationml/2006/main">
+  <p:cSld>
+    <p:spTree>
+      <p:nvGrpSpPr>
+        <p:cNvPr id="1" name=""/>
+        <p:cNvGrpSpPr/>
+        <p:nvPr/>
+      </p:nvGrpSpPr>
+      <p:grpSpPr>
+        <a:xfrm>
+          <a:off x="0" y="0"/>
+          <a:ext cx="0" cy="0"/>
+          <a:chOff x="0" y="0"/>
+          <a:chExt cx="0" cy="0"/>
+        </a:xfrm>
+      </p:grpSpPr>
+      <p:sp>
+        <p:nvSpPr>
+          <p:cNvPr id="2" name="Slide Image Placeholder 1"/>
+          <p:cNvSpPr>
+            <a:spLocks noGrp="1" noRot="1" noChangeAspect="1"/>
+          </p:cNvSpPr>
+          <p:nvPr>
+            <p:ph type="sldImg"/>
+          </p:nvPr>
+        </p:nvSpPr>
+        <p:spPr/>
+      </p:sp>
+      <p:sp>
+        <p:nvSpPr>
+          <p:cNvPr id="3" name="Notes Placeholder 2"/>
+          <p:cNvSpPr>
+            <a:spLocks noGrp="1"/>
+          </p:cNvSpPr>
+          <p:nvPr>
+            <p:ph type="body" idx="1"/>
+          </p:nvPr>
+        </p:nvSpPr>
+        <p:spPr/>
+        <p:txBody>
+          <a:bodyPr/>
+          <a:lstStyle/>
+          <a:p>
+            <a:r>
+              <a:rPr lang="en-US" dirty="0"/>
+              <a:t/>
+            </a:r>
+            <a:endParaRPr lang="en-US" dirty="0"/>
+          </a:p>
+        </p:txBody>
+      </p:sp>
+      <p:sp>
+        <p:nvSpPr>
+          <p:cNvPr id="4" name="Slide Number Placeholder 3"/>
+          <p:cNvSpPr>
+            <a:spLocks noGrp="1"/>
+          </p:cNvSpPr>
+          <p:nvPr>
+            <p:ph type="sldNum" sz="quarter" idx="10"/>
+          </p:nvPr>
+        </p:nvSpPr>
+        <p:spPr/>
+        <p:txBody>
+          <a:bodyPr/>
+          <a:lstStyle/>
+          <a:p>
+            <a:fld id="{F7021451-1387-4CA6-816F-3879F97B5CBC}" type="slidenum">
+              <a:rPr lang="en-US"/>
+              <a:t>9</a:t>
             </a:fld>
             <a:endParaRPr lang="en-US"/>
           </a:p>
@@ -1624,7 +1713,7 @@
         <p:spPr>
           <a:xfrm>
             <a:off x="822960" y="3794760"/>
-            <a:ext cx="3383280" cy="777240"/>
+            <a:ext cx="2560320" cy="777240"/>
           </a:xfrm>
           <a:prstGeom prst="roundRect">
             <a:avLst>
@@ -1650,8 +1739,8 @@
         </p:nvSpPr>
         <p:spPr>
           <a:xfrm>
-            <a:off x="960120" y="3858768"/>
-            <a:ext cx="3108960" cy="658368"/>
+            <a:off x="941832" y="3858768"/>
+            <a:ext cx="2331720" cy="658368"/>
           </a:xfrm>
           <a:prstGeom prst="rect">
             <a:avLst/>
@@ -1688,7 +1777,7 @@
               <a:buNone/>
             </a:pPr>
             <a:r>
-              <a:rPr lang="en-US" sz="1100" dirty="0">
+              <a:rPr lang="en-US" sz="950" dirty="0">
                 <a:solidFill>
                   <a:srgbClr val="FFFFFF"/>
                 </a:solidFill>
@@ -1710,8 +1799,8 @@
         </p:nvSpPr>
         <p:spPr>
           <a:xfrm>
-            <a:off x="4434840" y="3794760"/>
-            <a:ext cx="3383280" cy="777240"/>
+            <a:off x="3547872" y="3794760"/>
+            <a:ext cx="2560320" cy="777240"/>
           </a:xfrm>
           <a:prstGeom prst="roundRect">
             <a:avLst>
@@ -1737,8 +1826,8 @@
         </p:nvSpPr>
         <p:spPr>
           <a:xfrm>
-            <a:off x="4572000" y="3858768"/>
-            <a:ext cx="3108960" cy="658368"/>
+            <a:off x="3666744" y="3858768"/>
+            <a:ext cx="2331720" cy="658368"/>
           </a:xfrm>
           <a:prstGeom prst="rect">
             <a:avLst/>
@@ -1775,7 +1864,7 @@
               <a:buNone/>
             </a:pPr>
             <a:r>
-              <a:rPr lang="en-US" sz="1100" dirty="0">
+              <a:rPr lang="en-US" sz="950" dirty="0">
                 <a:solidFill>
                   <a:srgbClr val="FFFFFF"/>
                 </a:solidFill>
@@ -1783,7 +1872,7 @@
                 <a:ea typeface="Meiryo" pitchFamily="34" charset="-122"/>
                 <a:cs typeface="Meiryo" pitchFamily="34" charset="-120"/>
               </a:rPr>
-              <a:t>面内傾向 Waferマップ（Canon）</a:t>
+              <a:t>平均ベクトル場 俯瞰（Canon）</a:t>
             </a:r>
             <a:endParaRPr lang="en-US" sz="1200" dirty="0"/>
           </a:p>
@@ -1797,8 +1886,8 @@
         </p:nvSpPr>
         <p:spPr>
           <a:xfrm>
-            <a:off x="8046720" y="3794760"/>
-            <a:ext cx="3383280" cy="777240"/>
+            <a:off x="6272784" y="3794760"/>
+            <a:ext cx="2560320" cy="777240"/>
           </a:xfrm>
           <a:prstGeom prst="roundRect">
             <a:avLst>
@@ -1824,8 +1913,8 @@
         </p:nvSpPr>
         <p:spPr>
           <a:xfrm>
-            <a:off x="8183880" y="3858768"/>
-            <a:ext cx="3108960" cy="658368"/>
+            <a:off x="6391656" y="3858768"/>
+            <a:ext cx="2331720" cy="658368"/>
           </a:xfrm>
           <a:prstGeom prst="rect">
             <a:avLst/>
@@ -1862,7 +1951,7 @@
               <a:buNone/>
             </a:pPr>
             <a:r>
-              <a:rPr lang="en-US" sz="1100" dirty="0">
+              <a:rPr lang="en-US" sz="950" dirty="0">
                 <a:solidFill>
                   <a:srgbClr val="FFFFFF"/>
                 </a:solidFill>
@@ -1870,7 +1959,7 @@
                 <a:ea typeface="Meiryo" pitchFamily="34" charset="-122"/>
                 <a:cs typeface="Meiryo" pitchFamily="34" charset="-120"/>
               </a:rPr>
-              <a:t>Shot補正詳細・補正前想定（Canon）</a:t>
+              <a:t>詳細分析（Canon）</a:t>
             </a:r>
             <a:endParaRPr lang="en-US" sz="1200" dirty="0"/>
           </a:p>
@@ -1884,8 +1973,8 @@
         </p:nvSpPr>
         <p:spPr>
           <a:xfrm>
-            <a:off x="822960" y="4754880"/>
-            <a:ext cx="3383280" cy="777240"/>
+            <a:off x="8997696" y="3794760"/>
+            <a:ext cx="2560320" cy="777240"/>
           </a:xfrm>
           <a:prstGeom prst="roundRect">
             <a:avLst>
@@ -1911,8 +2000,8 @@
         </p:nvSpPr>
         <p:spPr>
           <a:xfrm>
-            <a:off x="960120" y="4818888"/>
-            <a:ext cx="3108960" cy="658368"/>
+            <a:off x="9116568" y="3858768"/>
+            <a:ext cx="2331720" cy="658368"/>
           </a:xfrm>
           <a:prstGeom prst="rect">
             <a:avLst/>
@@ -1949,7 +2038,7 @@
               <a:buNone/>
             </a:pPr>
             <a:r>
-              <a:rPr lang="en-US" sz="1100" dirty="0">
+              <a:rPr lang="en-US" sz="950" dirty="0">
                 <a:solidFill>
                   <a:srgbClr val="FFFFFF"/>
                 </a:solidFill>
@@ -1971,8 +2060,8 @@
         </p:nvSpPr>
         <p:spPr>
           <a:xfrm>
-            <a:off x="4434840" y="4754880"/>
-            <a:ext cx="3383280" cy="777240"/>
+            <a:off x="822960" y="4754880"/>
+            <a:ext cx="2560320" cy="777240"/>
           </a:xfrm>
           <a:prstGeom prst="roundRect">
             <a:avLst>
@@ -1998,8 +2087,8 @@
         </p:nvSpPr>
         <p:spPr>
           <a:xfrm>
-            <a:off x="4572000" y="4818888"/>
-            <a:ext cx="3108960" cy="658368"/>
+            <a:off x="941832" y="4818888"/>
+            <a:ext cx="2331720" cy="658368"/>
           </a:xfrm>
           <a:prstGeom prst="rect">
             <a:avLst/>
@@ -2036,7 +2125,7 @@
               <a:buNone/>
             </a:pPr>
             <a:r>
-              <a:rPr lang="en-US" sz="1100" dirty="0">
+              <a:rPr lang="en-US" sz="950" dirty="0">
                 <a:solidFill>
                   <a:srgbClr val="FFFFFF"/>
                 </a:solidFill>
@@ -2044,7 +2133,7 @@
                 <a:ea typeface="Meiryo" pitchFamily="34" charset="-122"/>
                 <a:cs typeface="Meiryo" pitchFamily="34" charset="-120"/>
               </a:rPr>
-              <a:t>補正マップ / 高次係数（Nikon）</a:t>
+              <a:t>平均ベクトル場 俯瞰（Nikon）</a:t>
             </a:r>
             <a:endParaRPr lang="en-US" sz="1200" dirty="0"/>
           </a:p>
@@ -2058,8 +2147,8 @@
         </p:nvSpPr>
         <p:spPr>
           <a:xfrm>
-            <a:off x="8046720" y="4754880"/>
-            <a:ext cx="3383280" cy="777240"/>
+            <a:off x="3547872" y="4754880"/>
+            <a:ext cx="2560320" cy="777240"/>
           </a:xfrm>
           <a:prstGeom prst="roundRect">
             <a:avLst>
@@ -2085,8 +2174,8 @@
         </p:nvSpPr>
         <p:spPr>
           <a:xfrm>
-            <a:off x="8183880" y="4818888"/>
-            <a:ext cx="3108960" cy="658368"/>
+            <a:off x="3666744" y="4818888"/>
+            <a:ext cx="2331720" cy="658368"/>
           </a:xfrm>
           <a:prstGeom prst="rect">
             <a:avLst/>
@@ -2123,7 +2212,7 @@
               <a:buNone/>
             </a:pPr>
             <a:r>
-              <a:rPr lang="en-US" sz="1100" dirty="0">
+              <a:rPr lang="en-US" sz="950" dirty="0">
                 <a:solidFill>
                   <a:srgbClr val="FFFFFF"/>
                 </a:solidFill>
@@ -2131,6 +2220,93 @@
                 <a:ea typeface="Meiryo" pitchFamily="34" charset="-122"/>
                 <a:cs typeface="Meiryo" pitchFamily="34" charset="-120"/>
               </a:rPr>
+              <a:t>詳細分析（Nikon）</a:t>
+            </a:r>
+            <a:endParaRPr lang="en-US" sz="1200" dirty="0"/>
+          </a:p>
+        </p:txBody>
+      </p:sp>
+      <p:sp>
+        <p:nvSpPr>
+          <p:cNvPr id="17" name="Shape 15"/>
+          <p:cNvSpPr/>
+          <p:nvPr/>
+        </p:nvSpPr>
+        <p:spPr>
+          <a:xfrm>
+            <a:off x="6272784" y="4754880"/>
+            <a:ext cx="2560320" cy="777240"/>
+          </a:xfrm>
+          <a:prstGeom prst="roundRect">
+            <a:avLst>
+              <a:gd name="adj" fmla="val 7059"/>
+            </a:avLst>
+          </a:prstGeom>
+          <a:solidFill>
+            <a:srgbClr val="27346F"/>
+          </a:solidFill>
+          <a:ln w="12700">
+            <a:solidFill>
+              <a:srgbClr val="3D4C8F"/>
+            </a:solidFill>
+            <a:prstDash val="solid"/>
+          </a:ln>
+        </p:spPr>
+      </p:sp>
+      <p:sp>
+        <p:nvSpPr>
+          <p:cNvPr id="18" name="Text 16"/>
+          <p:cNvSpPr/>
+          <p:nvPr/>
+        </p:nvSpPr>
+        <p:spPr>
+          <a:xfrm>
+            <a:off x="6391656" y="4818888"/>
+            <a:ext cx="2331720" cy="658368"/>
+          </a:xfrm>
+          <a:prstGeom prst="rect">
+            <a:avLst/>
+          </a:prstGeom>
+          <a:noFill/>
+          <a:ln/>
+        </p:spPr>
+        <p:txBody>
+          <a:bodyPr wrap="square" lIns="0" tIns="0" rIns="0" bIns="0" rtlCol="0" anchor="ctr"/>
+          <a:lstStyle/>
+          <a:p>
+            <a:pPr indent="0" marL="0">
+              <a:lnSpc>
+                <a:spcPct val="100000"/>
+              </a:lnSpc>
+              <a:buNone/>
+            </a:pPr>
+            <a:r>
+              <a:rPr lang="en-US" sz="1200" b="1" dirty="0">
+                <a:solidFill>
+                  <a:srgbClr val="CADCFC"/>
+                </a:solidFill>
+                <a:latin typeface="Meiryo" pitchFamily="34" charset="0"/>
+                <a:ea typeface="Meiryo" pitchFamily="34" charset="-122"/>
+                <a:cs typeface="Meiryo" pitchFamily="34" charset="-120"/>
+              </a:rPr>
+              <a:t>P7
+</a:t>
+            </a:r>
+            <a:pPr indent="0" marL="0">
+              <a:lnSpc>
+                <a:spcPct val="100000"/>
+              </a:lnSpc>
+              <a:buNone/>
+            </a:pPr>
+            <a:r>
+              <a:rPr lang="en-US" sz="950" dirty="0">
+                <a:solidFill>
+                  <a:srgbClr val="FFFFFF"/>
+                </a:solidFill>
+                <a:latin typeface="Meiryo" pitchFamily="34" charset="0"/>
+                <a:ea typeface="Meiryo" pitchFamily="34" charset="-122"/>
+                <a:cs typeface="Meiryo" pitchFamily="34" charset="-120"/>
+              </a:rPr>
               <a:t>Shotスタック分析</a:t>
             </a:r>
             <a:endParaRPr lang="en-US" sz="1200" dirty="0"/>
@@ -2139,7 +2315,7 @@
       </p:sp>
       <p:sp>
         <p:nvSpPr>
-          <p:cNvPr id="17" name="Text 15"/>
+          <p:cNvPr id="19" name="Text 17"/>
           <p:cNvSpPr/>
           <p:nvPr/>
         </p:nvSpPr>
@@ -2663,15 +2839,15 @@
               <a:buNone/>
             </a:pPr>
             <a:r>
-              <a:rPr lang="en-US" sz="750" b="1" dirty="0">
-                <a:solidFill>
-                  <a:srgbClr val="E24A50"/>
-                </a:solidFill>
-                <a:latin typeface="Meiryo" pitchFamily="34" charset="0"/>
-                <a:ea typeface="Meiryo" pitchFamily="34" charset="-122"/>
-                <a:cs typeface="Meiryo" pitchFamily="34" charset="-120"/>
-              </a:rPr>
-              <a:t>  必須</a:t>
+              <a:rPr lang="en-US" sz="750" dirty="0">
+                <a:solidFill>
+                  <a:srgbClr val="9AA3B5"/>
+                </a:solidFill>
+                <a:latin typeface="Meiryo" pitchFamily="34" charset="0"/>
+                <a:ea typeface="Meiryo" pitchFamily="34" charset="-122"/>
+                <a:cs typeface="Meiryo" pitchFamily="34" charset="-120"/>
+              </a:rPr>
+              <a:t>  任意</a:t>
             </a:r>
             <a:endParaRPr lang="en-US" sz="800" dirty="0"/>
           </a:p>
@@ -2710,7 +2886,7 @@
                 <a:ea typeface="Meiryo" pitchFamily="34" charset="-122"/>
                 <a:cs typeface="Meiryo" pitchFamily="34" charset="-120"/>
               </a:rPr>
-              <a:t>ML01MF +2  ▾</a:t>
+              <a:t>すべて  ▾</a:t>
             </a:r>
             <a:endParaRPr lang="en-US" sz="900" dirty="0"/>
           </a:p>
@@ -3975,7 +4151,7 @@
                 <a:ea typeface="Meiryo" pitchFamily="34" charset="-122"/>
                 <a:cs typeface="Meiryo" pitchFamily="34" charset="-120"/>
               </a:rPr>
-              <a:t>面内傾向 Waferマップ（Canon）</a:t>
+              <a:t>平均ベクトル場 俯瞰（Canon）</a:t>
             </a:r>
             <a:endParaRPr lang="en-US" sz="2200" dirty="0"/>
           </a:p>
@@ -4014,7 +4190,7 @@
                 <a:ea typeface="Meiryo" pitchFamily="34" charset="-122"/>
                 <a:cs typeface="Meiryo" pitchFamily="34" charset="-120"/>
               </a:rPr>
-              <a:t>残差ベクトル・RMS・共分散楕円で面内を把握（V-11/12/13/15/22）</a:t>
+              <a:t>取得データ全体の平均残差を装置×OPERATIONで比較（V-12）</a:t>
             </a:r>
             <a:endParaRPr lang="en-US" sz="950" dirty="0"/>
           </a:p>
@@ -4390,15 +4566,15 @@
               <a:buNone/>
             </a:pPr>
             <a:r>
-              <a:rPr lang="en-US" sz="750" b="1" dirty="0">
-                <a:solidFill>
-                  <a:srgbClr val="E24A50"/>
-                </a:solidFill>
-                <a:latin typeface="Meiryo" pitchFamily="34" charset="0"/>
-                <a:ea typeface="Meiryo" pitchFamily="34" charset="-122"/>
-                <a:cs typeface="Meiryo" pitchFamily="34" charset="-120"/>
-              </a:rPr>
-              <a:t>  必須</a:t>
+              <a:rPr lang="en-US" sz="750" dirty="0">
+                <a:solidFill>
+                  <a:srgbClr val="9AA3B5"/>
+                </a:solidFill>
+                <a:latin typeface="Meiryo" pitchFamily="34" charset="0"/>
+                <a:ea typeface="Meiryo" pitchFamily="34" charset="-122"/>
+                <a:cs typeface="Meiryo" pitchFamily="34" charset="-120"/>
+              </a:rPr>
+              <a:t>  任意</a:t>
             </a:r>
             <a:endParaRPr lang="en-US" sz="800" dirty="0"/>
           </a:p>
@@ -4437,7 +4613,7 @@
                 <a:ea typeface="Meiryo" pitchFamily="34" charset="-122"/>
                 <a:cs typeface="Meiryo" pitchFamily="34" charset="-120"/>
               </a:rPr>
-              <a:t>ML01MF +2  ▾</a:t>
+              <a:t>すべて  ▾</a:t>
             </a:r>
             <a:endParaRPr lang="en-US" sz="900" dirty="0"/>
           </a:p>
@@ -4808,127 +4984,8 @@
         </p:nvSpPr>
         <p:spPr>
           <a:xfrm>
-            <a:off x="429768" y="5705856"/>
-            <a:ext cx="1261872" cy="658368"/>
-          </a:xfrm>
-          <a:prstGeom prst="roundRect">
-            <a:avLst>
-              <a:gd name="adj" fmla="val 5556"/>
-            </a:avLst>
-          </a:prstGeom>
-          <a:solidFill>
-            <a:srgbClr val="FFFFFF"/>
-          </a:solidFill>
-          <a:ln w="9525">
-            <a:solidFill>
-              <a:srgbClr val="D5DAE5"/>
-            </a:solidFill>
-            <a:prstDash val="solid"/>
-          </a:ln>
-        </p:spPr>
-      </p:sp>
-      <p:sp>
-        <p:nvSpPr>
-          <p:cNvPr id="25" name="Text 23"/>
-          <p:cNvSpPr/>
-          <p:nvPr/>
-        </p:nvSpPr>
-        <p:spPr>
-          <a:xfrm>
-            <a:off x="484632" y="5751576"/>
-            <a:ext cx="1170432" cy="219456"/>
-          </a:xfrm>
-          <a:prstGeom prst="rect">
-            <a:avLst/>
-          </a:prstGeom>
-          <a:noFill/>
-          <a:ln/>
-        </p:spPr>
-        <p:txBody>
-          <a:bodyPr wrap="square" lIns="0" tIns="0" rIns="0" bIns="0" rtlCol="0" anchor="ctr"/>
-          <a:lstStyle/>
-          <a:p>
-            <a:pPr indent="0" marL="0">
-              <a:buNone/>
-            </a:pPr>
-            <a:r>
-              <a:rPr lang="en-US" sz="800" dirty="0">
-                <a:solidFill>
-                  <a:srgbClr val="777777"/>
-                </a:solidFill>
-                <a:latin typeface="Meiryo" pitchFamily="34" charset="0"/>
-                <a:ea typeface="Meiryo" pitchFamily="34" charset="-122"/>
-                <a:cs typeface="Meiryo" pitchFamily="34" charset="-120"/>
-              </a:rPr>
-              <a:t>WAFER選択</a:t>
-            </a:r>
-            <a:pPr indent="0" marL="0">
-              <a:buNone/>
-            </a:pPr>
-            <a:r>
-              <a:rPr lang="en-US" sz="750" b="1" dirty="0">
-                <a:solidFill>
-                  <a:srgbClr val="E24A50"/>
-                </a:solidFill>
-                <a:latin typeface="Meiryo" pitchFamily="34" charset="0"/>
-                <a:ea typeface="Meiryo" pitchFamily="34" charset="-122"/>
-                <a:cs typeface="Meiryo" pitchFamily="34" charset="-120"/>
-              </a:rPr>
-              <a:t>  必須</a:t>
-            </a:r>
-            <a:endParaRPr lang="en-US" sz="800" dirty="0"/>
-          </a:p>
-        </p:txBody>
-      </p:sp>
-      <p:sp>
-        <p:nvSpPr>
-          <p:cNvPr id="26" name="Text 24"/>
-          <p:cNvSpPr/>
-          <p:nvPr/>
-        </p:nvSpPr>
-        <p:spPr>
-          <a:xfrm>
-            <a:off x="484632" y="5998464"/>
-            <a:ext cx="1170432" cy="274320"/>
-          </a:xfrm>
-          <a:prstGeom prst="rect">
-            <a:avLst/>
-          </a:prstGeom>
-          <a:noFill/>
-          <a:ln/>
-        </p:spPr>
-        <p:txBody>
-          <a:bodyPr wrap="square" lIns="0" tIns="0" rIns="0" bIns="0" rtlCol="0" anchor="ctr"/>
-          <a:lstStyle/>
-          <a:p>
-            <a:pPr indent="0" marL="0">
-              <a:buNone/>
-            </a:pPr>
-            <a:r>
-              <a:rPr lang="en-US" sz="900" dirty="0">
-                <a:solidFill>
-                  <a:srgbClr val="2B2B2B"/>
-                </a:solidFill>
-                <a:latin typeface="Meiryo" pitchFamily="34" charset="0"/>
-                <a:ea typeface="Meiryo" pitchFamily="34" charset="-122"/>
-                <a:cs typeface="Meiryo" pitchFamily="34" charset="-120"/>
-              </a:rPr>
-              <a:t>5BW975B22-01  ▾</a:t>
-            </a:r>
-            <a:endParaRPr lang="en-US" sz="900" dirty="0"/>
-          </a:p>
-        </p:txBody>
-      </p:sp>
-      <p:sp>
-        <p:nvSpPr>
-          <p:cNvPr id="27" name="Shape 25"/>
-          <p:cNvSpPr/>
-          <p:nvPr/>
-        </p:nvSpPr>
-        <p:spPr>
-          <a:xfrm>
             <a:off x="1920240" y="914400"/>
-            <a:ext cx="3246120" cy="3657600"/>
+            <a:ext cx="6949440" cy="5532120"/>
           </a:xfrm>
           <a:prstGeom prst="rect">
             <a:avLst/>
@@ -4946,14 +5003,14 @@
       </p:sp>
       <p:sp>
         <p:nvSpPr>
-          <p:cNvPr id="28" name="Text 26"/>
+          <p:cNvPr id="25" name="Text 23"/>
           <p:cNvSpPr/>
           <p:nvPr/>
         </p:nvSpPr>
         <p:spPr>
           <a:xfrm>
             <a:off x="1993392" y="950976"/>
-            <a:ext cx="3099816" cy="237744"/>
+            <a:ext cx="6803136" cy="237744"/>
           </a:xfrm>
           <a:prstGeom prst="rect">
             <a:avLst/>
@@ -4977,7 +5034,7 @@
                 <a:ea typeface="Meiryo" pitchFamily="34" charset="-122"/>
                 <a:cs typeface="Meiryo" pitchFamily="34" charset="-120"/>
               </a:rPr>
-              <a:t>V-11｜残差ベクトルマップ（1Wafer）</a:t>
+              <a:t>V-12｜平均ベクトル場（装置別 × OPERATION別の小マルチ、Shot枠つき）</a:t>
             </a:r>
             <a:endParaRPr lang="en-US" sz="900" dirty="0"/>
           </a:p>
@@ -4985,7 +5042,7 @@
       </p:sp>
       <p:pic>
         <p:nvPicPr>
-          <p:cNvPr id="29" name="Image 0" descr="/private/tmp/claude-501/-Users-sakamoto-04---------ClaudeCode-GitHub-PowerBI-LithoBooster-DashBoard/1d2ed9c0-fbf9-4130-80df-0e37d1e3ada0/scratchpad/charts/p2_quiver.png">    </p:cNvPr>
+          <p:cNvPr id="26" name="Image 0" descr="/private/tmp/claude-501/-Users-sakamoto-04---------ClaudeCode-GitHub-PowerBI-LithoBooster-DashBoard/1d2ed9c0-fbf9-4130-80df-0e37d1e3ada0/scratchpad/charts/p2_meanfield.png">    </p:cNvPr>
           <p:cNvPicPr>
             <a:picLocks noChangeAspect="1"/>
           </p:cNvPicPr>
@@ -4999,7 +5056,7 @@
         <p:spPr>
           <a:xfrm>
             <a:off x="1993392" y="1207008"/>
-            <a:ext cx="3099816" cy="3273552"/>
+            <a:ext cx="6803136" cy="5148072"/>
           </a:xfrm>
           <a:prstGeom prst="rect">
             <a:avLst/>
@@ -5008,188 +5065,14 @@
       </p:pic>
       <p:sp>
         <p:nvSpPr>
-          <p:cNvPr id="30" name="Shape 27"/>
-          <p:cNvSpPr/>
-          <p:nvPr/>
-        </p:nvSpPr>
-        <p:spPr>
-          <a:xfrm>
-            <a:off x="5257800" y="914400"/>
-            <a:ext cx="3246120" cy="3657600"/>
-          </a:xfrm>
-          <a:prstGeom prst="rect">
-            <a:avLst/>
-          </a:prstGeom>
-          <a:solidFill>
-            <a:srgbClr val="FFFFFF"/>
-          </a:solidFill>
-          <a:ln w="12700">
-            <a:solidFill>
-              <a:srgbClr val="D5DAE5"/>
-            </a:solidFill>
-            <a:prstDash val="solid"/>
-          </a:ln>
-        </p:spPr>
-      </p:sp>
-      <p:sp>
-        <p:nvSpPr>
-          <p:cNvPr id="31" name="Text 28"/>
-          <p:cNvSpPr/>
-          <p:nvPr/>
-        </p:nvSpPr>
-        <p:spPr>
-          <a:xfrm>
-            <a:off x="5330952" y="950976"/>
-            <a:ext cx="3099816" cy="237744"/>
-          </a:xfrm>
-          <a:prstGeom prst="rect">
-            <a:avLst/>
-          </a:prstGeom>
-          <a:noFill/>
-          <a:ln/>
-        </p:spPr>
-        <p:txBody>
-          <a:bodyPr wrap="square" lIns="0" tIns="0" rIns="0" bIns="0" rtlCol="0" anchor="ctr"/>
-          <a:lstStyle/>
-          <a:p>
-            <a:pPr indent="0" marL="0">
-              <a:buNone/>
-            </a:pPr>
-            <a:r>
-              <a:rPr lang="en-US" sz="900" b="1" dirty="0">
-                <a:solidFill>
-                  <a:srgbClr val="1E2761"/>
-                </a:solidFill>
-                <a:latin typeface="Meiryo" pitchFamily="34" charset="0"/>
-                <a:ea typeface="Meiryo" pitchFamily="34" charset="-122"/>
-                <a:cs typeface="Meiryo" pitchFamily="34" charset="-120"/>
-              </a:rPr>
-              <a:t>V-13｜Shot単位 残差RMSヒートマップ</a:t>
-            </a:r>
-            <a:endParaRPr lang="en-US" sz="900" dirty="0"/>
-          </a:p>
-        </p:txBody>
-      </p:sp>
-      <p:pic>
-        <p:nvPicPr>
-          <p:cNvPr id="32" name="Image 1" descr="/private/tmp/claude-501/-Users-sakamoto-04---------ClaudeCode-GitHub-PowerBI-LithoBooster-DashBoard/1d2ed9c0-fbf9-4130-80df-0e37d1e3ada0/scratchpad/charts/p2_rms.png">    </p:cNvPr>
-          <p:cNvPicPr>
-            <a:picLocks noChangeAspect="1"/>
-          </p:cNvPicPr>
-          <p:nvPr/>
-        </p:nvPicPr>
-        <p:blipFill>
-          <a:blip r:embed="rId2"/>
-          <a:srcRect l="0" r="0" t="0" b="0"/>
-          <a:stretch/>
-        </p:blipFill>
-        <p:spPr>
-          <a:xfrm>
-            <a:off x="5330952" y="1207008"/>
-            <a:ext cx="3099816" cy="3273552"/>
-          </a:xfrm>
-          <a:prstGeom prst="rect">
-            <a:avLst/>
-          </a:prstGeom>
-        </p:spPr>
-      </p:pic>
-      <p:sp>
-        <p:nvSpPr>
-          <p:cNvPr id="33" name="Shape 29"/>
-          <p:cNvSpPr/>
-          <p:nvPr/>
-        </p:nvSpPr>
-        <p:spPr>
-          <a:xfrm>
-            <a:off x="8595360" y="914400"/>
-            <a:ext cx="3246120" cy="3657600"/>
-          </a:xfrm>
-          <a:prstGeom prst="rect">
-            <a:avLst/>
-          </a:prstGeom>
-          <a:solidFill>
-            <a:srgbClr val="FFFFFF"/>
-          </a:solidFill>
-          <a:ln w="12700">
-            <a:solidFill>
-              <a:srgbClr val="D5DAE5"/>
-            </a:solidFill>
-            <a:prstDash val="solid"/>
-          </a:ln>
-        </p:spPr>
-      </p:sp>
-      <p:sp>
-        <p:nvSpPr>
-          <p:cNvPr id="34" name="Text 30"/>
-          <p:cNvSpPr/>
-          <p:nvPr/>
-        </p:nvSpPr>
-        <p:spPr>
-          <a:xfrm>
-            <a:off x="8668512" y="950976"/>
-            <a:ext cx="3099816" cy="237744"/>
-          </a:xfrm>
-          <a:prstGeom prst="rect">
-            <a:avLst/>
-          </a:prstGeom>
-          <a:noFill/>
-          <a:ln/>
-        </p:spPr>
-        <p:txBody>
-          <a:bodyPr wrap="square" lIns="0" tIns="0" rIns="0" bIns="0" rtlCol="0" anchor="ctr"/>
-          <a:lstStyle/>
-          <a:p>
-            <a:pPr indent="0" marL="0">
-              <a:buNone/>
-            </a:pPr>
-            <a:r>
-              <a:rPr lang="en-US" sz="900" b="1" dirty="0">
-                <a:solidFill>
-                  <a:srgbClr val="1E2761"/>
-                </a:solidFill>
-                <a:latin typeface="Meiryo" pitchFamily="34" charset="0"/>
-                <a:ea typeface="Meiryo" pitchFamily="34" charset="-122"/>
-                <a:cs typeface="Meiryo" pitchFamily="34" charset="-120"/>
-              </a:rPr>
-              <a:t>V-22｜面内共分散楕円マップ（Wafer間ばらつき）</a:t>
-            </a:r>
-            <a:endParaRPr lang="en-US" sz="900" dirty="0"/>
-          </a:p>
-        </p:txBody>
-      </p:sp>
-      <p:pic>
-        <p:nvPicPr>
-          <p:cNvPr id="35" name="Image 2" descr="/private/tmp/claude-501/-Users-sakamoto-04---------ClaudeCode-GitHub-PowerBI-LithoBooster-DashBoard/1d2ed9c0-fbf9-4130-80df-0e37d1e3ada0/scratchpad/charts/p2_ellipse.png">    </p:cNvPr>
-          <p:cNvPicPr>
-            <a:picLocks noChangeAspect="1"/>
-          </p:cNvPicPr>
-          <p:nvPr/>
-        </p:nvPicPr>
-        <p:blipFill>
-          <a:blip r:embed="rId3"/>
-          <a:srcRect l="0" r="0" t="0" b="0"/>
-          <a:stretch/>
-        </p:blipFill>
-        <p:spPr>
-          <a:xfrm>
-            <a:off x="8668512" y="1207008"/>
-            <a:ext cx="3099816" cy="3273552"/>
-          </a:xfrm>
-          <a:prstGeom prst="rect">
-            <a:avLst/>
-          </a:prstGeom>
-        </p:spPr>
-      </p:pic>
-      <p:sp>
-        <p:nvSpPr>
-          <p:cNvPr id="36" name="Shape 31"/>
-          <p:cNvSpPr/>
-          <p:nvPr/>
-        </p:nvSpPr>
-        <p:spPr>
-          <a:xfrm>
-            <a:off x="1920240" y="4709160"/>
-            <a:ext cx="5852160" cy="1737360"/>
+          <p:cNvPr id="27" name="Shape 24"/>
+          <p:cNvSpPr/>
+          <p:nvPr/>
+        </p:nvSpPr>
+        <p:spPr>
+          <a:xfrm>
+            <a:off x="9006840" y="914400"/>
+            <a:ext cx="2834640" cy="2743200"/>
           </a:xfrm>
           <a:prstGeom prst="rect">
             <a:avLst/>
@@ -5207,14 +5090,14 @@
       </p:sp>
       <p:sp>
         <p:nvSpPr>
-          <p:cNvPr id="37" name="Text 32"/>
-          <p:cNvSpPr/>
-          <p:nvPr/>
-        </p:nvSpPr>
-        <p:spPr>
-          <a:xfrm>
-            <a:off x="2011680" y="4754880"/>
-            <a:ext cx="5669280" cy="237744"/>
+          <p:cNvPr id="28" name="Text 25"/>
+          <p:cNvSpPr/>
+          <p:nvPr/>
+        </p:nvSpPr>
+        <p:spPr>
+          <a:xfrm>
+            <a:off x="9098280" y="960120"/>
+            <a:ext cx="2651760" cy="237744"/>
           </a:xfrm>
           <a:prstGeom prst="rect">
             <a:avLst/>
@@ -5238,7 +5121,7 @@
                 <a:ea typeface="Meiryo" pitchFamily="34" charset="-122"/>
                 <a:cs typeface="Meiryo" pitchFamily="34" charset="-120"/>
               </a:rPr>
-              <a:t>V-22 共分散楕円の見方</a:t>
+              <a:t>使い方</a:t>
             </a:r>
             <a:endParaRPr lang="en-US" sz="950" dirty="0"/>
           </a:p>
@@ -5246,14 +5129,14 @@
       </p:sp>
       <p:sp>
         <p:nvSpPr>
-          <p:cNvPr id="38" name="Text 33"/>
-          <p:cNvSpPr/>
-          <p:nvPr/>
-        </p:nvSpPr>
-        <p:spPr>
-          <a:xfrm>
-            <a:off x="2057400" y="5020056"/>
-            <a:ext cx="5577840" cy="1353312"/>
+          <p:cNvPr id="29" name="Text 26"/>
+          <p:cNvSpPr/>
+          <p:nvPr/>
+        </p:nvSpPr>
+        <p:spPr>
+          <a:xfrm>
+            <a:off x="9144000" y="1225296"/>
+            <a:ext cx="2560320" cy="2359152"/>
           </a:xfrm>
           <a:prstGeom prst="rect">
             <a:avLst/>
@@ -5281,7 +5164,7 @@
                 <a:ea typeface="Meiryo" pitchFamily="34" charset="-122"/>
                 <a:cs typeface="Meiryo" pitchFamily="34" charset="-120"/>
               </a:rPr>
-              <a:t>サイズ: Wafer間の分散が大きい位置ほど楕円が大きい（固有値の平方根×k、初期k=2）</a:t>
+              <a:t>必須フィルター（期間・DEVICE_TYPE・OPERATION）の範囲全体を平均</a:t>
             </a:r>
             <a:endParaRPr lang="en-US" sz="950" dirty="0"/>
           </a:p>
@@ -5302,7 +5185,7 @@
                 <a:ea typeface="Meiryo" pitchFamily="34" charset="-122"/>
                 <a:cs typeface="Meiryo" pitchFamily="34" charset="-120"/>
               </a:rPr>
-              <a:t>傾き: θ = 0.5 × atan2(2·Cxy, Vx − Vy)。X/Y相関の向きに傾く</a:t>
+              <a:t>装置×OPERATIONごとの傾向差を俯瞰で比較</a:t>
             </a:r>
             <a:endParaRPr lang="en-US" sz="950" dirty="0"/>
           </a:p>
@@ -5323,43 +5206,22 @@
                 <a:ea typeface="Meiryo" pitchFamily="34" charset="-122"/>
                 <a:cs typeface="Meiryo" pitchFamily="34" charset="-120"/>
               </a:rPr>
-              <a:t>色: |相関係数 r| のカラースケール。濃い=X/Yが連動して変動</a:t>
+              <a:t>気になるマスを右クリック → P3 詳細分析へドリルスルー</a:t>
             </a:r>
             <a:endParaRPr lang="en-US" sz="950" dirty="0"/>
           </a:p>
-          <a:p>
-            <a:pPr marL="101600" indent="-101600">
-              <a:lnSpc>
-                <a:spcPct val="145000"/>
-              </a:lnSpc>
-              <a:buSzPct val="100000"/>
-              <a:buChar char="•"/>
-            </a:pPr>
-            <a:r>
-              <a:rPr lang="en-US" sz="950" dirty="0">
-                <a:solidFill>
-                  <a:srgbClr val="2B2B2B"/>
-                </a:solidFill>
-                <a:latin typeface="Meiryo" pitchFamily="34" charset="0"/>
-                <a:ea typeface="Meiryo" pitchFamily="34" charset="-122"/>
-                <a:cs typeface="Meiryo" pitchFamily="34" charset="-120"/>
-              </a:rPr>
-              <a:t>Wafer数3枚未満の位置は非表示</a:t>
-            </a:r>
-            <a:endParaRPr lang="en-US" sz="950" dirty="0"/>
-          </a:p>
-        </p:txBody>
-      </p:sp>
-      <p:sp>
-        <p:nvSpPr>
-          <p:cNvPr id="39" name="Shape 34"/>
-          <p:cNvSpPr/>
-          <p:nvPr/>
-        </p:nvSpPr>
-        <p:spPr>
-          <a:xfrm>
-            <a:off x="7882128" y="4709160"/>
-            <a:ext cx="3959352" cy="1737360"/>
+        </p:txBody>
+      </p:sp>
+      <p:sp>
+        <p:nvSpPr>
+          <p:cNvPr id="30" name="Shape 27"/>
+          <p:cNvSpPr/>
+          <p:nvPr/>
+        </p:nvSpPr>
+        <p:spPr>
+          <a:xfrm>
+            <a:off x="9006840" y="3794760"/>
+            <a:ext cx="2834640" cy="2651760"/>
           </a:xfrm>
           <a:prstGeom prst="rect">
             <a:avLst/>
@@ -5377,14 +5239,14 @@
       </p:sp>
       <p:sp>
         <p:nvSpPr>
-          <p:cNvPr id="40" name="Text 35"/>
-          <p:cNvSpPr/>
-          <p:nvPr/>
-        </p:nvSpPr>
-        <p:spPr>
-          <a:xfrm>
-            <a:off x="7973568" y="4754880"/>
-            <a:ext cx="3776472" cy="237744"/>
+          <p:cNvPr id="31" name="Text 28"/>
+          <p:cNvSpPr/>
+          <p:nvPr/>
+        </p:nvSpPr>
+        <p:spPr>
+          <a:xfrm>
+            <a:off x="9098280" y="3840480"/>
+            <a:ext cx="2651760" cy="237744"/>
           </a:xfrm>
           <a:prstGeom prst="rect">
             <a:avLst/>
@@ -5408,7 +5270,7 @@
                 <a:ea typeface="Meiryo" pitchFamily="34" charset="-122"/>
                 <a:cs typeface="Meiryo" pitchFamily="34" charset="-120"/>
               </a:rPr>
-              <a:t>操作</a:t>
+              <a:t>表示仕様</a:t>
             </a:r>
             <a:endParaRPr lang="en-US" sz="950" dirty="0"/>
           </a:p>
@@ -5416,14 +5278,14 @@
       </p:sp>
       <p:sp>
         <p:nvSpPr>
-          <p:cNvPr id="41" name="Text 36"/>
-          <p:cNvSpPr/>
-          <p:nvPr/>
-        </p:nvSpPr>
-        <p:spPr>
-          <a:xfrm>
-            <a:off x="8019288" y="5020056"/>
-            <a:ext cx="3685032" cy="1353312"/>
+          <p:cNvPr id="32" name="Text 29"/>
+          <p:cNvSpPr/>
+          <p:nvPr/>
+        </p:nvSpPr>
+        <p:spPr>
+          <a:xfrm>
+            <a:off x="9144000" y="4105656"/>
+            <a:ext cx="2560320" cy="2267712"/>
           </a:xfrm>
           <a:prstGeom prst="rect">
             <a:avLst/>
@@ -5451,7 +5313,7 @@
                 <a:ea typeface="Meiryo" pitchFamily="34" charset="-122"/>
                 <a:cs typeface="Meiryo" pitchFamily="34" charset="-120"/>
               </a:rPr>
-              <a:t>V-11はWAFER選択スライサーで1枚に絞って描画</a:t>
+              <a:t>Shot枠とWafer外周円（150mm）を描画</a:t>
             </a:r>
             <a:endParaRPr lang="en-US" sz="950" dirty="0"/>
           </a:p>
@@ -5472,7 +5334,7 @@
                 <a:ea typeface="Meiryo" pitchFamily="34" charset="-122"/>
                 <a:cs typeface="Meiryo" pitchFamily="34" charset="-120"/>
               </a:rPr>
-              <a:t>V-12（複数Wafer平均マップ）はブックマークで切替</a:t>
+              <a:t>矢印の倍率スケールは調整可能</a:t>
             </a:r>
             <a:endParaRPr lang="en-US" sz="950" dirty="0"/>
           </a:p>
@@ -5493,7 +5355,7 @@
                 <a:ea typeface="Meiryo" pitchFamily="34" charset="-122"/>
                 <a:cs typeface="Meiryo" pitchFamily="34" charset="-120"/>
               </a:rPr>
-              <a:t>Shotをクリック→P3へドリルスルー</a:t>
+              <a:t>装置は任意フィルター（絞れば単独表示）</a:t>
             </a:r>
             <a:endParaRPr lang="en-US" sz="950" dirty="0"/>
           </a:p>
@@ -5501,7 +5363,7 @@
       </p:sp>
       <p:sp>
         <p:nvSpPr>
-          <p:cNvPr id="42" name="Text 37"/>
+          <p:cNvPr id="33" name="Text 30"/>
           <p:cNvSpPr/>
           <p:nvPr/>
         </p:nvSpPr>
@@ -5610,7 +5472,7 @@
                 <a:ea typeface="Meiryo" pitchFamily="34" charset="-122"/>
                 <a:cs typeface="Meiryo" pitchFamily="34" charset="-120"/>
               </a:rPr>
-              <a:t>Shot補正詳細・補正前想定（Canon）</a:t>
+              <a:t>詳細分析（Canon）</a:t>
             </a:r>
             <a:endParaRPr lang="en-US" sz="2200" dirty="0"/>
           </a:p>
@@ -5649,7 +5511,7 @@
                 <a:ea typeface="Meiryo" pitchFamily="34" charset="-122"/>
                 <a:cs typeface="Meiryo" pitchFamily="34" charset="-120"/>
               </a:rPr>
-              <a:t>補正の効き方と補正前の想定状態（V-03/16/17）</a:t>
+              <a:t>特定Lot・Waferに絞って詳細確認（V-11/13/22/16/03/17）</a:t>
             </a:r>
             <a:endParaRPr lang="en-US" sz="950" dirty="0"/>
           </a:p>
@@ -6025,15 +5887,15 @@
               <a:buNone/>
             </a:pPr>
             <a:r>
-              <a:rPr lang="en-US" sz="750" b="1" dirty="0">
-                <a:solidFill>
-                  <a:srgbClr val="E24A50"/>
-                </a:solidFill>
-                <a:latin typeface="Meiryo" pitchFamily="34" charset="0"/>
-                <a:ea typeface="Meiryo" pitchFamily="34" charset="-122"/>
-                <a:cs typeface="Meiryo" pitchFamily="34" charset="-120"/>
-              </a:rPr>
-              <a:t>  必須</a:t>
+              <a:rPr lang="en-US" sz="750" dirty="0">
+                <a:solidFill>
+                  <a:srgbClr val="9AA3B5"/>
+                </a:solidFill>
+                <a:latin typeface="Meiryo" pitchFamily="34" charset="0"/>
+                <a:ea typeface="Meiryo" pitchFamily="34" charset="-122"/>
+                <a:cs typeface="Meiryo" pitchFamily="34" charset="-120"/>
+              </a:rPr>
+              <a:t>  任意</a:t>
             </a:r>
             <a:endParaRPr lang="en-US" sz="800" dirty="0"/>
           </a:p>
@@ -6072,7 +5934,7 @@
                 <a:ea typeface="Meiryo" pitchFamily="34" charset="-122"/>
                 <a:cs typeface="Meiryo" pitchFamily="34" charset="-120"/>
               </a:rPr>
-              <a:t>ML01MF +2  ▾</a:t>
+              <a:t>すべて  ▾</a:t>
             </a:r>
             <a:endParaRPr lang="en-US" sz="900" dirty="0"/>
           </a:p>
@@ -6563,7 +6425,7 @@
         <p:spPr>
           <a:xfrm>
             <a:off x="1920240" y="914400"/>
-            <a:ext cx="5943600" cy="3291840"/>
+            <a:ext cx="3246120" cy="2834640"/>
           </a:xfrm>
           <a:prstGeom prst="rect">
             <a:avLst/>
@@ -6588,7 +6450,7 @@
         <p:spPr>
           <a:xfrm>
             <a:off x="1993392" y="950976"/>
-            <a:ext cx="5797296" cy="237744"/>
+            <a:ext cx="3099816" cy="237744"/>
           </a:xfrm>
           <a:prstGeom prst="rect">
             <a:avLst/>
@@ -6612,7 +6474,7 @@
                 <a:ea typeface="Meiryo" pitchFamily="34" charset="-122"/>
                 <a:cs typeface="Meiryo" pitchFamily="34" charset="-120"/>
               </a:rPr>
-              <a:t>V-16｜補正前（想定）/ 補正後（実測）の切替表示</a:t>
+              <a:t>V-11｜残差ベクトルマップ（1Wafer）</a:t>
             </a:r>
             <a:endParaRPr lang="en-US" sz="900" dirty="0"/>
           </a:p>
@@ -6620,7 +6482,7 @@
       </p:sp>
       <p:pic>
         <p:nvPicPr>
-          <p:cNvPr id="29" name="Image 0" descr="/private/tmp/claude-501/-Users-sakamoto-04---------ClaudeCode-GitHub-PowerBI-LithoBooster-DashBoard/1d2ed9c0-fbf9-4130-80df-0e37d1e3ada0/scratchpad/charts/p3_prepost.png">    </p:cNvPr>
+          <p:cNvPr id="29" name="Image 0" descr="/private/tmp/claude-501/-Users-sakamoto-04---------ClaudeCode-GitHub-PowerBI-LithoBooster-DashBoard/1d2ed9c0-fbf9-4130-80df-0e37d1e3ada0/scratchpad/charts/p2_quiver.png">    </p:cNvPr>
           <p:cNvPicPr>
             <a:picLocks noChangeAspect="1"/>
           </p:cNvPicPr>
@@ -6634,7 +6496,7 @@
         <p:spPr>
           <a:xfrm>
             <a:off x="1993392" y="1207008"/>
-            <a:ext cx="5797296" cy="2907792"/>
+            <a:ext cx="3099816" cy="2450592"/>
           </a:xfrm>
           <a:prstGeom prst="rect">
             <a:avLst/>
@@ -6649,8 +6511,8 @@
         </p:nvSpPr>
         <p:spPr>
           <a:xfrm>
-            <a:off x="7973568" y="914400"/>
-            <a:ext cx="3867912" cy="2194560"/>
+            <a:off x="5257800" y="914400"/>
+            <a:ext cx="3246120" cy="2834640"/>
           </a:xfrm>
           <a:prstGeom prst="rect">
             <a:avLst/>
@@ -6674,8 +6536,8 @@
         </p:nvSpPr>
         <p:spPr>
           <a:xfrm>
-            <a:off x="8046720" y="950976"/>
-            <a:ext cx="3721608" cy="237744"/>
+            <a:off x="5330952" y="950976"/>
+            <a:ext cx="3099816" cy="237744"/>
           </a:xfrm>
           <a:prstGeom prst="rect">
             <a:avLst/>
@@ -6699,7 +6561,7 @@
                 <a:ea typeface="Meiryo" pitchFamily="34" charset="-122"/>
                 <a:cs typeface="Meiryo" pitchFamily="34" charset="-120"/>
               </a:rPr>
-              <a:t>V-03｜Shot補正量のLot別比較（SEPA / SAME）</a:t>
+              <a:t>V-13｜Shot単位 残差RMSヒートマップ</a:t>
             </a:r>
             <a:endParaRPr lang="en-US" sz="900" dirty="0"/>
           </a:p>
@@ -6707,7 +6569,7 @@
       </p:sp>
       <p:pic>
         <p:nvPicPr>
-          <p:cNvPr id="32" name="Image 1" descr="/private/tmp/claude-501/-Users-sakamoto-04---------ClaudeCode-GitHub-PowerBI-LithoBooster-DashBoard/1d2ed9c0-fbf9-4130-80df-0e37d1e3ada0/scratchpad/charts/p3_bar.png">    </p:cNvPr>
+          <p:cNvPr id="32" name="Image 1" descr="/private/tmp/claude-501/-Users-sakamoto-04---------ClaudeCode-GitHub-PowerBI-LithoBooster-DashBoard/1d2ed9c0-fbf9-4130-80df-0e37d1e3ada0/scratchpad/charts/p2_rms.png">    </p:cNvPr>
           <p:cNvPicPr>
             <a:picLocks noChangeAspect="1"/>
           </p:cNvPicPr>
@@ -6720,8 +6582,8 @@
         </p:blipFill>
         <p:spPr>
           <a:xfrm>
-            <a:off x="8046720" y="1207008"/>
-            <a:ext cx="3721608" cy="1810512"/>
+            <a:off x="5330952" y="1207008"/>
+            <a:ext cx="3099816" cy="2450592"/>
           </a:xfrm>
           <a:prstGeom prst="rect">
             <a:avLst/>
@@ -6736,8 +6598,8 @@
         </p:nvSpPr>
         <p:spPr>
           <a:xfrm>
-            <a:off x="7973568" y="3200400"/>
-            <a:ext cx="3867912" cy="2011680"/>
+            <a:off x="8595360" y="914400"/>
+            <a:ext cx="3246120" cy="2834640"/>
           </a:xfrm>
           <a:prstGeom prst="rect">
             <a:avLst/>
@@ -6761,8 +6623,8 @@
         </p:nvSpPr>
         <p:spPr>
           <a:xfrm>
-            <a:off x="8046720" y="3236976"/>
-            <a:ext cx="3721608" cy="237744"/>
+            <a:off x="8668512" y="950976"/>
+            <a:ext cx="3099816" cy="237744"/>
           </a:xfrm>
           <a:prstGeom prst="rect">
             <a:avLst/>
@@ -6786,7 +6648,7 @@
                 <a:ea typeface="Meiryo" pitchFamily="34" charset="-122"/>
                 <a:cs typeface="Meiryo" pitchFamily="34" charset="-120"/>
               </a:rPr>
-              <a:t>V-17｜補正効果の定量比較（補正前後RMS）</a:t>
+              <a:t>V-22｜面内共分散楕円マップ（Wafer間ばらつき）</a:t>
             </a:r>
             <a:endParaRPr lang="en-US" sz="900" dirty="0"/>
           </a:p>
@@ -6794,7 +6656,7 @@
       </p:sp>
       <p:pic>
         <p:nvPicPr>
-          <p:cNvPr id="35" name="Image 2" descr="/private/tmp/claude-501/-Users-sakamoto-04---------ClaudeCode-GitHub-PowerBI-LithoBooster-DashBoard/1d2ed9c0-fbf9-4130-80df-0e37d1e3ada0/scratchpad/charts/p3_effect.png">    </p:cNvPr>
+          <p:cNvPr id="35" name="Image 2" descr="/private/tmp/claude-501/-Users-sakamoto-04---------ClaudeCode-GitHub-PowerBI-LithoBooster-DashBoard/1d2ed9c0-fbf9-4130-80df-0e37d1e3ada0/scratchpad/charts/p2_ellipse.png">    </p:cNvPr>
           <p:cNvPicPr>
             <a:picLocks noChangeAspect="1"/>
           </p:cNvPicPr>
@@ -6807,8 +6669,8 @@
         </p:blipFill>
         <p:spPr>
           <a:xfrm>
-            <a:off x="8046720" y="3493008"/>
-            <a:ext cx="3721608" cy="1627632"/>
+            <a:off x="8668512" y="1207008"/>
+            <a:ext cx="3099816" cy="2450592"/>
           </a:xfrm>
           <a:prstGeom prst="rect">
             <a:avLst/>
@@ -6823,14 +6685,14 @@
         </p:nvSpPr>
         <p:spPr>
           <a:xfrm>
-            <a:off x="1920240" y="4315968"/>
-            <a:ext cx="5943600" cy="1417320"/>
+            <a:off x="1920240" y="3840480"/>
+            <a:ext cx="4297680" cy="2606040"/>
           </a:xfrm>
           <a:prstGeom prst="rect">
             <a:avLst/>
           </a:prstGeom>
           <a:solidFill>
-            <a:srgbClr val="F7F9FC"/>
+            <a:srgbClr val="FFFFFF"/>
           </a:solidFill>
           <a:ln w="12700">
             <a:solidFill>
@@ -6848,24 +6710,24 @@
         </p:nvSpPr>
         <p:spPr>
           <a:xfrm>
-            <a:off x="2011680" y="4361688"/>
-            <a:ext cx="5760720" cy="237744"/>
-          </a:xfrm>
-          <a:prstGeom prst="rect">
-            <a:avLst/>
-          </a:prstGeom>
-          <a:noFill/>
-          <a:ln/>
-        </p:spPr>
-        <p:txBody>
-          <a:bodyPr wrap="square" lIns="0" tIns="0" rIns="0" bIns="0" rtlCol="0" anchor="ctr"/>
-          <a:lstStyle/>
-          <a:p>
-            <a:pPr indent="0" marL="0">
-              <a:buNone/>
-            </a:pPr>
-            <a:r>
-              <a:rPr lang="en-US" sz="950" b="1" dirty="0">
+            <a:off x="1993392" y="3877056"/>
+            <a:ext cx="4151376" cy="237744"/>
+          </a:xfrm>
+          <a:prstGeom prst="rect">
+            <a:avLst/>
+          </a:prstGeom>
+          <a:noFill/>
+          <a:ln/>
+        </p:spPr>
+        <p:txBody>
+          <a:bodyPr wrap="square" lIns="0" tIns="0" rIns="0" bIns="0" rtlCol="0" anchor="ctr"/>
+          <a:lstStyle/>
+          <a:p>
+            <a:pPr indent="0" marL="0">
+              <a:buNone/>
+            </a:pPr>
+            <a:r>
+              <a:rPr lang="en-US" sz="900" b="1" dirty="0">
                 <a:solidFill>
                   <a:srgbClr val="1E2761"/>
                 </a:solidFill>
@@ -6873,79 +6735,212 @@
                 <a:ea typeface="Meiryo" pitchFamily="34" charset="-122"/>
                 <a:cs typeface="Meiryo" pitchFamily="34" charset="-120"/>
               </a:rPr>
-              <a:t>注意（実装前に確認）</a:t>
-            </a:r>
-            <a:endParaRPr lang="en-US" sz="950" dirty="0"/>
-          </a:p>
-        </p:txBody>
-      </p:sp>
-      <p:sp>
-        <p:nvSpPr>
-          <p:cNvPr id="38" name="Text 33"/>
-          <p:cNvSpPr/>
-          <p:nvPr/>
-        </p:nvSpPr>
-        <p:spPr>
-          <a:xfrm>
-            <a:off x="2057400" y="4626864"/>
-            <a:ext cx="5669280" cy="1033272"/>
-          </a:xfrm>
-          <a:prstGeom prst="rect">
-            <a:avLst/>
-          </a:prstGeom>
-          <a:noFill/>
-          <a:ln/>
-        </p:spPr>
-        <p:txBody>
-          <a:bodyPr wrap="square" lIns="0" tIns="0" rIns="0" bIns="0" rtlCol="0" anchor="t"/>
-          <a:lstStyle/>
-          <a:p>
-            <a:pPr marL="101600" indent="-101600">
-              <a:lnSpc>
-                <a:spcPct val="145000"/>
-              </a:lnSpc>
-              <a:buSzPct val="100000"/>
-              <a:buChar char="•"/>
-            </a:pPr>
-            <a:r>
-              <a:rPr lang="en-US" sz="950" dirty="0">
-                <a:solidFill>
-                  <a:srgbClr val="2B2B2B"/>
-                </a:solidFill>
-                <a:latin typeface="Meiryo" pitchFamily="34" charset="0"/>
-                <a:ea typeface="Meiryo" pitchFamily="34" charset="-122"/>
-                <a:cs typeface="Meiryo" pitchFamily="34" charset="-120"/>
-              </a:rPr>
-              <a:t>補正前の再構成式（足し戻しの符号規約・Mark位置での寄与計算）は装置エンジニアに確認 → issues.md I-009</a:t>
-            </a:r>
-            <a:endParaRPr lang="en-US" sz="950" dirty="0"/>
-          </a:p>
-          <a:p>
-            <a:pPr marL="101600" indent="-101600">
-              <a:lnSpc>
-                <a:spcPct val="145000"/>
-              </a:lnSpc>
-              <a:buSzPct val="100000"/>
-              <a:buChar char="•"/>
-            </a:pPr>
-            <a:r>
-              <a:rPr lang="en-US" sz="950" dirty="0">
-                <a:solidFill>
-                  <a:srgbClr val="2B2B2B"/>
-                </a:solidFill>
-                <a:latin typeface="Meiryo" pitchFamily="34" charset="0"/>
-                <a:ea typeface="Meiryo" pitchFamily="34" charset="-122"/>
-                <a:cs typeface="Meiryo" pitchFamily="34" charset="-120"/>
-              </a:rPr>
-              <a:t>トグル（補正あり/なし）はブックマークで実装</a:t>
-            </a:r>
-            <a:endParaRPr lang="en-US" sz="950" dirty="0"/>
-          </a:p>
-        </p:txBody>
-      </p:sp>
-      <p:sp>
-        <p:nvSpPr>
-          <p:cNvPr id="39" name="Text 34"/>
+              <a:t>V-16｜補正前（想定）/ 補正後（実測）の切替</a:t>
+            </a:r>
+            <a:endParaRPr lang="en-US" sz="900" dirty="0"/>
+          </a:p>
+        </p:txBody>
+      </p:sp>
+      <p:pic>
+        <p:nvPicPr>
+          <p:cNvPr id="38" name="Image 3" descr="/private/tmp/claude-501/-Users-sakamoto-04---------ClaudeCode-GitHub-PowerBI-LithoBooster-DashBoard/1d2ed9c0-fbf9-4130-80df-0e37d1e3ada0/scratchpad/charts/p3_prepost.png">    </p:cNvPr>
+          <p:cNvPicPr>
+            <a:picLocks noChangeAspect="1"/>
+          </p:cNvPicPr>
+          <p:nvPr/>
+        </p:nvPicPr>
+        <p:blipFill>
+          <a:blip r:embed="rId4"/>
+          <a:srcRect l="0" r="0" t="0" b="0"/>
+          <a:stretch/>
+        </p:blipFill>
+        <p:spPr>
+          <a:xfrm>
+            <a:off x="1993392" y="4133088"/>
+            <a:ext cx="4151376" cy="2221992"/>
+          </a:xfrm>
+          <a:prstGeom prst="rect">
+            <a:avLst/>
+          </a:prstGeom>
+        </p:spPr>
+      </p:pic>
+      <p:sp>
+        <p:nvSpPr>
+          <p:cNvPr id="39" name="Shape 33"/>
+          <p:cNvSpPr/>
+          <p:nvPr/>
+        </p:nvSpPr>
+        <p:spPr>
+          <a:xfrm>
+            <a:off x="6309360" y="3840480"/>
+            <a:ext cx="2926080" cy="2606040"/>
+          </a:xfrm>
+          <a:prstGeom prst="rect">
+            <a:avLst/>
+          </a:prstGeom>
+          <a:solidFill>
+            <a:srgbClr val="FFFFFF"/>
+          </a:solidFill>
+          <a:ln w="12700">
+            <a:solidFill>
+              <a:srgbClr val="D5DAE5"/>
+            </a:solidFill>
+            <a:prstDash val="solid"/>
+          </a:ln>
+        </p:spPr>
+      </p:sp>
+      <p:sp>
+        <p:nvSpPr>
+          <p:cNvPr id="40" name="Text 34"/>
+          <p:cNvSpPr/>
+          <p:nvPr/>
+        </p:nvSpPr>
+        <p:spPr>
+          <a:xfrm>
+            <a:off x="6382512" y="3877056"/>
+            <a:ext cx="2779776" cy="237744"/>
+          </a:xfrm>
+          <a:prstGeom prst="rect">
+            <a:avLst/>
+          </a:prstGeom>
+          <a:noFill/>
+          <a:ln/>
+        </p:spPr>
+        <p:txBody>
+          <a:bodyPr wrap="square" lIns="0" tIns="0" rIns="0" bIns="0" rtlCol="0" anchor="ctr"/>
+          <a:lstStyle/>
+          <a:p>
+            <a:pPr indent="0" marL="0">
+              <a:buNone/>
+            </a:pPr>
+            <a:r>
+              <a:rPr lang="en-US" sz="900" b="1" dirty="0">
+                <a:solidFill>
+                  <a:srgbClr val="1E2761"/>
+                </a:solidFill>
+                <a:latin typeface="Meiryo" pitchFamily="34" charset="0"/>
+                <a:ea typeface="Meiryo" pitchFamily="34" charset="-122"/>
+                <a:cs typeface="Meiryo" pitchFamily="34" charset="-120"/>
+              </a:rPr>
+              <a:t>V-03｜Shot補正量（SEPA / SAME）</a:t>
+            </a:r>
+            <a:endParaRPr lang="en-US" sz="900" dirty="0"/>
+          </a:p>
+        </p:txBody>
+      </p:sp>
+      <p:pic>
+        <p:nvPicPr>
+          <p:cNvPr id="41" name="Image 4" descr="/private/tmp/claude-501/-Users-sakamoto-04---------ClaudeCode-GitHub-PowerBI-LithoBooster-DashBoard/1d2ed9c0-fbf9-4130-80df-0e37d1e3ada0/scratchpad/charts/p3_bar.png">    </p:cNvPr>
+          <p:cNvPicPr>
+            <a:picLocks noChangeAspect="1"/>
+          </p:cNvPicPr>
+          <p:nvPr/>
+        </p:nvPicPr>
+        <p:blipFill>
+          <a:blip r:embed="rId5"/>
+          <a:srcRect l="0" r="0" t="0" b="0"/>
+          <a:stretch/>
+        </p:blipFill>
+        <p:spPr>
+          <a:xfrm>
+            <a:off x="6382512" y="4133088"/>
+            <a:ext cx="2779776" cy="2221992"/>
+          </a:xfrm>
+          <a:prstGeom prst="rect">
+            <a:avLst/>
+          </a:prstGeom>
+        </p:spPr>
+      </p:pic>
+      <p:sp>
+        <p:nvSpPr>
+          <p:cNvPr id="42" name="Shape 35"/>
+          <p:cNvSpPr/>
+          <p:nvPr/>
+        </p:nvSpPr>
+        <p:spPr>
+          <a:xfrm>
+            <a:off x="9326880" y="3840480"/>
+            <a:ext cx="2514600" cy="2606040"/>
+          </a:xfrm>
+          <a:prstGeom prst="rect">
+            <a:avLst/>
+          </a:prstGeom>
+          <a:solidFill>
+            <a:srgbClr val="FFFFFF"/>
+          </a:solidFill>
+          <a:ln w="12700">
+            <a:solidFill>
+              <a:srgbClr val="D5DAE5"/>
+            </a:solidFill>
+            <a:prstDash val="solid"/>
+          </a:ln>
+        </p:spPr>
+      </p:sp>
+      <p:sp>
+        <p:nvSpPr>
+          <p:cNvPr id="43" name="Text 36"/>
+          <p:cNvSpPr/>
+          <p:nvPr/>
+        </p:nvSpPr>
+        <p:spPr>
+          <a:xfrm>
+            <a:off x="9400032" y="3877056"/>
+            <a:ext cx="2368296" cy="237744"/>
+          </a:xfrm>
+          <a:prstGeom prst="rect">
+            <a:avLst/>
+          </a:prstGeom>
+          <a:noFill/>
+          <a:ln/>
+        </p:spPr>
+        <p:txBody>
+          <a:bodyPr wrap="square" lIns="0" tIns="0" rIns="0" bIns="0" rtlCol="0" anchor="ctr"/>
+          <a:lstStyle/>
+          <a:p>
+            <a:pPr indent="0" marL="0">
+              <a:buNone/>
+            </a:pPr>
+            <a:r>
+              <a:rPr lang="en-US" sz="900" b="1" dirty="0">
+                <a:solidFill>
+                  <a:srgbClr val="1E2761"/>
+                </a:solidFill>
+                <a:latin typeface="Meiryo" pitchFamily="34" charset="0"/>
+                <a:ea typeface="Meiryo" pitchFamily="34" charset="-122"/>
+                <a:cs typeface="Meiryo" pitchFamily="34" charset="-120"/>
+              </a:rPr>
+              <a:t>V-17｜補正効果（前後RMS）</a:t>
+            </a:r>
+            <a:endParaRPr lang="en-US" sz="900" dirty="0"/>
+          </a:p>
+        </p:txBody>
+      </p:sp>
+      <p:pic>
+        <p:nvPicPr>
+          <p:cNvPr id="44" name="Image 5" descr="/private/tmp/claude-501/-Users-sakamoto-04---------ClaudeCode-GitHub-PowerBI-LithoBooster-DashBoard/1d2ed9c0-fbf9-4130-80df-0e37d1e3ada0/scratchpad/charts/p3_effect.png">    </p:cNvPr>
+          <p:cNvPicPr>
+            <a:picLocks noChangeAspect="1"/>
+          </p:cNvPicPr>
+          <p:nvPr/>
+        </p:nvPicPr>
+        <p:blipFill>
+          <a:blip r:embed="rId6"/>
+          <a:srcRect l="0" r="0" t="0" b="0"/>
+          <a:stretch/>
+        </p:blipFill>
+        <p:spPr>
+          <a:xfrm>
+            <a:off x="9400032" y="4133088"/>
+            <a:ext cx="2368296" cy="2221992"/>
+          </a:xfrm>
+          <a:prstGeom prst="rect">
+            <a:avLst/>
+          </a:prstGeom>
+        </p:spPr>
+      </p:pic>
+      <p:sp>
+        <p:nvSpPr>
+          <p:cNvPr id="45" name="Text 37"/>
           <p:cNvSpPr/>
           <p:nvPr/>
         </p:nvSpPr>
@@ -7093,7 +7088,7 @@
                 <a:ea typeface="Meiryo" pitchFamily="34" charset="-122"/>
                 <a:cs typeface="Meiryo" pitchFamily="34" charset="-120"/>
               </a:rPr>
-              <a:t>Wafer / Shot線形成分の傾向と早期検知（V-02/03/05/06/08/09/10）</a:t>
+              <a:t>Wafer / Shot線形成分の傾向と早期検知（V-02/05/06/08/09/10）</a:t>
             </a:r>
             <a:endParaRPr lang="en-US" sz="950" dirty="0"/>
           </a:p>
@@ -7469,15 +7464,15 @@
               <a:buNone/>
             </a:pPr>
             <a:r>
-              <a:rPr lang="en-US" sz="750" b="1" dirty="0">
-                <a:solidFill>
-                  <a:srgbClr val="E24A50"/>
-                </a:solidFill>
-                <a:latin typeface="Meiryo" pitchFamily="34" charset="0"/>
-                <a:ea typeface="Meiryo" pitchFamily="34" charset="-122"/>
-                <a:cs typeface="Meiryo" pitchFamily="34" charset="-120"/>
-              </a:rPr>
-              <a:t>  必須</a:t>
+              <a:rPr lang="en-US" sz="750" dirty="0">
+                <a:solidFill>
+                  <a:srgbClr val="9AA3B5"/>
+                </a:solidFill>
+                <a:latin typeface="Meiryo" pitchFamily="34" charset="0"/>
+                <a:ea typeface="Meiryo" pitchFamily="34" charset="-122"/>
+                <a:cs typeface="Meiryo" pitchFamily="34" charset="-120"/>
+              </a:rPr>
+              <a:t>  任意</a:t>
             </a:r>
             <a:endParaRPr lang="en-US" sz="800" dirty="0"/>
           </a:p>
@@ -7516,7 +7511,7 @@
                 <a:ea typeface="Meiryo" pitchFamily="34" charset="-122"/>
                 <a:cs typeface="Meiryo" pitchFamily="34" charset="-120"/>
               </a:rPr>
-              <a:t>ML01MF +2  ▾</a:t>
+              <a:t>すべて  ▾</a:t>
             </a:r>
             <a:endParaRPr lang="en-US" sz="900" dirty="0"/>
           </a:p>
@@ -7888,7 +7883,7 @@
         <p:spPr>
           <a:xfrm>
             <a:off x="1920240" y="914400"/>
-            <a:ext cx="2395728" cy="841248"/>
+            <a:ext cx="1600200" cy="841248"/>
           </a:xfrm>
           <a:prstGeom prst="roundRect">
             <a:avLst>
@@ -7915,23 +7910,23 @@
         <p:spPr>
           <a:xfrm>
             <a:off x="1993392" y="969264"/>
-            <a:ext cx="2249424" cy="402336"/>
-          </a:xfrm>
-          <a:prstGeom prst="rect">
-            <a:avLst/>
-          </a:prstGeom>
-          <a:noFill/>
-          <a:ln/>
-        </p:spPr>
-        <p:txBody>
-          <a:bodyPr wrap="square" lIns="0" tIns="0" rIns="0" bIns="0" rtlCol="0" anchor="ctr"/>
-          <a:lstStyle/>
-          <a:p>
-            <a:pPr indent="0" marL="0">
-              <a:buNone/>
-            </a:pPr>
-            <a:r>
-              <a:rPr lang="en-US" sz="2100" b="1" dirty="0">
+            <a:ext cx="1472184" cy="402336"/>
+          </a:xfrm>
+          <a:prstGeom prst="rect">
+            <a:avLst/>
+          </a:prstGeom>
+          <a:noFill/>
+          <a:ln/>
+        </p:spPr>
+        <p:txBody>
+          <a:bodyPr wrap="square" lIns="0" tIns="0" rIns="0" bIns="0" rtlCol="0" anchor="ctr"/>
+          <a:lstStyle/>
+          <a:p>
+            <a:pPr indent="0" marL="0">
+              <a:buNone/>
+            </a:pPr>
+            <a:r>
+              <a:rPr lang="en-US" sz="1600" b="1" dirty="0">
                 <a:solidFill>
                   <a:srgbClr val="1E2761"/>
                 </a:solidFill>
@@ -7941,7 +7936,7 @@
               </a:rPr>
               <a:t>14.9 nm</a:t>
             </a:r>
-            <a:endParaRPr lang="en-US" sz="2100" dirty="0"/>
+            <a:endParaRPr lang="en-US" sz="1600" dirty="0"/>
           </a:p>
         </p:txBody>
       </p:sp>
@@ -7954,23 +7949,23 @@
         <p:spPr>
           <a:xfrm>
             <a:off x="1993392" y="1417320"/>
-            <a:ext cx="2249424" cy="274320"/>
-          </a:xfrm>
-          <a:prstGeom prst="rect">
-            <a:avLst/>
-          </a:prstGeom>
-          <a:noFill/>
-          <a:ln/>
-        </p:spPr>
-        <p:txBody>
-          <a:bodyPr wrap="square" lIns="0" tIns="0" rIns="0" bIns="0" rtlCol="0" anchor="ctr"/>
-          <a:lstStyle/>
-          <a:p>
-            <a:pPr indent="0" marL="0">
-              <a:buNone/>
-            </a:pPr>
-            <a:r>
-              <a:rPr lang="en-US" sz="850" dirty="0">
+            <a:ext cx="1472184" cy="274320"/>
+          </a:xfrm>
+          <a:prstGeom prst="rect">
+            <a:avLst/>
+          </a:prstGeom>
+          <a:noFill/>
+          <a:ln/>
+        </p:spPr>
+        <p:txBody>
+          <a:bodyPr wrap="square" lIns="0" tIns="0" rIns="0" bIns="0" rtlCol="0" anchor="ctr"/>
+          <a:lstStyle/>
+          <a:p>
+            <a:pPr indent="0" marL="0">
+              <a:buNone/>
+            </a:pPr>
+            <a:r>
+              <a:rPr lang="en-US" sz="800" dirty="0">
                 <a:solidFill>
                   <a:srgbClr val="777777"/>
                 </a:solidFill>
@@ -7978,12 +7973,9 @@
                 <a:ea typeface="Meiryo" pitchFamily="34" charset="-122"/>
                 <a:cs typeface="Meiryo" pitchFamily="34" charset="-120"/>
               </a:rPr>
-              <a:t>WAFER_OFSET RMS</a:t>
-            </a:r>
-            <a:pPr indent="0" marL="0">
-              <a:buNone/>
-            </a:pPr>
-            <a:endParaRPr lang="en-US" sz="850" dirty="0"/>
+              <a:t>OFSETX RMS</a:t>
+            </a:r>
+            <a:endParaRPr lang="en-US" sz="800" dirty="0"/>
           </a:p>
         </p:txBody>
       </p:sp>
@@ -7995,8 +7987,8 @@
         </p:nvSpPr>
         <p:spPr>
           <a:xfrm>
-            <a:off x="4425696" y="914400"/>
-            <a:ext cx="2395728" cy="841248"/>
+            <a:off x="3584448" y="914400"/>
+            <a:ext cx="1600200" cy="841248"/>
           </a:xfrm>
           <a:prstGeom prst="roundRect">
             <a:avLst>
@@ -8022,24 +8014,24 @@
         </p:nvSpPr>
         <p:spPr>
           <a:xfrm>
-            <a:off x="4498848" y="969264"/>
-            <a:ext cx="2249424" cy="402336"/>
-          </a:xfrm>
-          <a:prstGeom prst="rect">
-            <a:avLst/>
-          </a:prstGeom>
-          <a:noFill/>
-          <a:ln/>
-        </p:spPr>
-        <p:txBody>
-          <a:bodyPr wrap="square" lIns="0" tIns="0" rIns="0" bIns="0" rtlCol="0" anchor="ctr"/>
-          <a:lstStyle/>
-          <a:p>
-            <a:pPr indent="0" marL="0">
-              <a:buNone/>
-            </a:pPr>
-            <a:r>
-              <a:rPr lang="en-US" sz="2100" b="1" dirty="0">
+            <a:off x="3657600" y="969264"/>
+            <a:ext cx="1472184" cy="402336"/>
+          </a:xfrm>
+          <a:prstGeom prst="rect">
+            <a:avLst/>
+          </a:prstGeom>
+          <a:noFill/>
+          <a:ln/>
+        </p:spPr>
+        <p:txBody>
+          <a:bodyPr wrap="square" lIns="0" tIns="0" rIns="0" bIns="0" rtlCol="0" anchor="ctr"/>
+          <a:lstStyle/>
+          <a:p>
+            <a:pPr indent="0" marL="0">
+              <a:buNone/>
+            </a:pPr>
+            <a:r>
+              <a:rPr lang="en-US" sz="1600" b="1" dirty="0">
                 <a:solidFill>
                   <a:srgbClr val="1E2761"/>
                 </a:solidFill>
@@ -8047,9 +8039,9 @@
                 <a:ea typeface="Meiryo" pitchFamily="34" charset="-122"/>
                 <a:cs typeface="Meiryo" pitchFamily="34" charset="-120"/>
               </a:rPr>
-              <a:t>0.48 ppm</a:t>
-            </a:r>
-            <a:endParaRPr lang="en-US" sz="2100" dirty="0"/>
+              <a:t>13.6 nm</a:t>
+            </a:r>
+            <a:endParaRPr lang="en-US" sz="1600" dirty="0"/>
           </a:p>
         </p:txBody>
       </p:sp>
@@ -8061,24 +8053,24 @@
         </p:nvSpPr>
         <p:spPr>
           <a:xfrm>
-            <a:off x="4498848" y="1417320"/>
-            <a:ext cx="2249424" cy="274320"/>
-          </a:xfrm>
-          <a:prstGeom prst="rect">
-            <a:avLst/>
-          </a:prstGeom>
-          <a:noFill/>
-          <a:ln/>
-        </p:spPr>
-        <p:txBody>
-          <a:bodyPr wrap="square" lIns="0" tIns="0" rIns="0" bIns="0" rtlCol="0" anchor="ctr"/>
-          <a:lstStyle/>
-          <a:p>
-            <a:pPr indent="0" marL="0">
-              <a:buNone/>
-            </a:pPr>
-            <a:r>
-              <a:rPr lang="en-US" sz="850" dirty="0">
+            <a:off x="3657600" y="1417320"/>
+            <a:ext cx="1472184" cy="274320"/>
+          </a:xfrm>
+          <a:prstGeom prst="rect">
+            <a:avLst/>
+          </a:prstGeom>
+          <a:noFill/>
+          <a:ln/>
+        </p:spPr>
+        <p:txBody>
+          <a:bodyPr wrap="square" lIns="0" tIns="0" rIns="0" bIns="0" rtlCol="0" anchor="ctr"/>
+          <a:lstStyle/>
+          <a:p>
+            <a:pPr indent="0" marL="0">
+              <a:buNone/>
+            </a:pPr>
+            <a:r>
+              <a:rPr lang="en-US" sz="800" dirty="0">
                 <a:solidFill>
                   <a:srgbClr val="777777"/>
                 </a:solidFill>
@@ -8086,12 +8078,9 @@
                 <a:ea typeface="Meiryo" pitchFamily="34" charset="-122"/>
                 <a:cs typeface="Meiryo" pitchFamily="34" charset="-120"/>
               </a:rPr>
-              <a:t>WAFER_SCAL 平均</a:t>
-            </a:r>
-            <a:pPr indent="0" marL="0">
-              <a:buNone/>
-            </a:pPr>
-            <a:endParaRPr lang="en-US" sz="850" dirty="0"/>
+              <a:t>OFSETY RMS</a:t>
+            </a:r>
+            <a:endParaRPr lang="en-US" sz="800" dirty="0"/>
           </a:p>
         </p:txBody>
       </p:sp>
@@ -8103,8 +8092,8 @@
         </p:nvSpPr>
         <p:spPr>
           <a:xfrm>
-            <a:off x="6931152" y="914400"/>
-            <a:ext cx="2395728" cy="841248"/>
+            <a:off x="5248656" y="914400"/>
+            <a:ext cx="1600200" cy="841248"/>
           </a:xfrm>
           <a:prstGeom prst="roundRect">
             <a:avLst>
@@ -8130,24 +8119,24 @@
         </p:nvSpPr>
         <p:spPr>
           <a:xfrm>
-            <a:off x="7004304" y="969264"/>
-            <a:ext cx="2249424" cy="402336"/>
-          </a:xfrm>
-          <a:prstGeom prst="rect">
-            <a:avLst/>
-          </a:prstGeom>
-          <a:noFill/>
-          <a:ln/>
-        </p:spPr>
-        <p:txBody>
-          <a:bodyPr wrap="square" lIns="0" tIns="0" rIns="0" bIns="0" rtlCol="0" anchor="ctr"/>
-          <a:lstStyle/>
-          <a:p>
-            <a:pPr indent="0" marL="0">
-              <a:buNone/>
-            </a:pPr>
-            <a:r>
-              <a:rPr lang="en-US" sz="2100" b="1" dirty="0">
+            <a:off x="5321808" y="969264"/>
+            <a:ext cx="1472184" cy="402336"/>
+          </a:xfrm>
+          <a:prstGeom prst="rect">
+            <a:avLst/>
+          </a:prstGeom>
+          <a:noFill/>
+          <a:ln/>
+        </p:spPr>
+        <p:txBody>
+          <a:bodyPr wrap="square" lIns="0" tIns="0" rIns="0" bIns="0" rtlCol="0" anchor="ctr"/>
+          <a:lstStyle/>
+          <a:p>
+            <a:pPr indent="0" marL="0">
+              <a:buNone/>
+            </a:pPr>
+            <a:r>
+              <a:rPr lang="en-US" sz="1600" b="1" dirty="0">
                 <a:solidFill>
                   <a:srgbClr val="1E2761"/>
                 </a:solidFill>
@@ -8155,9 +8144,9 @@
                 <a:ea typeface="Meiryo" pitchFamily="34" charset="-122"/>
                 <a:cs typeface="Meiryo" pitchFamily="34" charset="-120"/>
               </a:rPr>
-              <a:t>0.52 µrad</a:t>
-            </a:r>
-            <a:endParaRPr lang="en-US" sz="2100" dirty="0"/>
+              <a:t>0.48 ppm</a:t>
+            </a:r>
+            <a:endParaRPr lang="en-US" sz="1600" dirty="0"/>
           </a:p>
         </p:txBody>
       </p:sp>
@@ -8169,24 +8158,24 @@
         </p:nvSpPr>
         <p:spPr>
           <a:xfrm>
-            <a:off x="7004304" y="1417320"/>
-            <a:ext cx="2249424" cy="274320"/>
-          </a:xfrm>
-          <a:prstGeom prst="rect">
-            <a:avLst/>
-          </a:prstGeom>
-          <a:noFill/>
-          <a:ln/>
-        </p:spPr>
-        <p:txBody>
-          <a:bodyPr wrap="square" lIns="0" tIns="0" rIns="0" bIns="0" rtlCol="0" anchor="ctr"/>
-          <a:lstStyle/>
-          <a:p>
-            <a:pPr indent="0" marL="0">
-              <a:buNone/>
-            </a:pPr>
-            <a:r>
-              <a:rPr lang="en-US" sz="850" dirty="0">
+            <a:off x="5321808" y="1417320"/>
+            <a:ext cx="1472184" cy="274320"/>
+          </a:xfrm>
+          <a:prstGeom prst="rect">
+            <a:avLst/>
+          </a:prstGeom>
+          <a:noFill/>
+          <a:ln/>
+        </p:spPr>
+        <p:txBody>
+          <a:bodyPr wrap="square" lIns="0" tIns="0" rIns="0" bIns="0" rtlCol="0" anchor="ctr"/>
+          <a:lstStyle/>
+          <a:p>
+            <a:pPr indent="0" marL="0">
+              <a:buNone/>
+            </a:pPr>
+            <a:r>
+              <a:rPr lang="en-US" sz="800" dirty="0">
                 <a:solidFill>
                   <a:srgbClr val="777777"/>
                 </a:solidFill>
@@ -8194,12 +8183,9 @@
                 <a:ea typeface="Meiryo" pitchFamily="34" charset="-122"/>
                 <a:cs typeface="Meiryo" pitchFamily="34" charset="-120"/>
               </a:rPr>
-              <a:t>WAFER_ROT 平均</a:t>
-            </a:r>
-            <a:pPr indent="0" marL="0">
-              <a:buNone/>
-            </a:pPr>
-            <a:endParaRPr lang="en-US" sz="850" dirty="0"/>
+              <a:t>SCALX 平均</a:t>
+            </a:r>
+            <a:endParaRPr lang="en-US" sz="800" dirty="0"/>
           </a:p>
         </p:txBody>
       </p:sp>
@@ -8211,8 +8197,8 @@
         </p:nvSpPr>
         <p:spPr>
           <a:xfrm>
-            <a:off x="9436608" y="914400"/>
-            <a:ext cx="2395728" cy="841248"/>
+            <a:off x="6912864" y="914400"/>
+            <a:ext cx="1600200" cy="841248"/>
           </a:xfrm>
           <a:prstGeom prst="roundRect">
             <a:avLst>
@@ -8238,24 +8224,24 @@
         </p:nvSpPr>
         <p:spPr>
           <a:xfrm>
-            <a:off x="9509760" y="969264"/>
-            <a:ext cx="2249424" cy="402336"/>
-          </a:xfrm>
-          <a:prstGeom prst="rect">
-            <a:avLst/>
-          </a:prstGeom>
-          <a:noFill/>
-          <a:ln/>
-        </p:spPr>
-        <p:txBody>
-          <a:bodyPr wrap="square" lIns="0" tIns="0" rIns="0" bIns="0" rtlCol="0" anchor="ctr"/>
-          <a:lstStyle/>
-          <a:p>
-            <a:pPr indent="0" marL="0">
-              <a:buNone/>
-            </a:pPr>
-            <a:r>
-              <a:rPr lang="en-US" sz="2100" b="1" dirty="0">
+            <a:off x="6986016" y="969264"/>
+            <a:ext cx="1472184" cy="402336"/>
+          </a:xfrm>
+          <a:prstGeom prst="rect">
+            <a:avLst/>
+          </a:prstGeom>
+          <a:noFill/>
+          <a:ln/>
+        </p:spPr>
+        <p:txBody>
+          <a:bodyPr wrap="square" lIns="0" tIns="0" rIns="0" bIns="0" rtlCol="0" anchor="ctr"/>
+          <a:lstStyle/>
+          <a:p>
+            <a:pPr indent="0" marL="0">
+              <a:buNone/>
+            </a:pPr>
+            <a:r>
+              <a:rPr lang="en-US" sz="1600" b="1" dirty="0">
                 <a:solidFill>
                   <a:srgbClr val="1E2761"/>
                 </a:solidFill>
@@ -8263,9 +8249,9 @@
                 <a:ea typeface="Meiryo" pitchFamily="34" charset="-122"/>
                 <a:cs typeface="Meiryo" pitchFamily="34" charset="-120"/>
               </a:rPr>
-              <a:t>75 枚</a:t>
-            </a:r>
-            <a:endParaRPr lang="en-US" sz="2100" dirty="0"/>
+              <a:t>0.41 ppm</a:t>
+            </a:r>
+            <a:endParaRPr lang="en-US" sz="1600" dirty="0"/>
           </a:p>
         </p:txBody>
       </p:sp>
@@ -8277,24 +8263,24 @@
         </p:nvSpPr>
         <p:spPr>
           <a:xfrm>
-            <a:off x="9509760" y="1417320"/>
-            <a:ext cx="2249424" cy="274320"/>
-          </a:xfrm>
-          <a:prstGeom prst="rect">
-            <a:avLst/>
-          </a:prstGeom>
-          <a:noFill/>
-          <a:ln/>
-        </p:spPr>
-        <p:txBody>
-          <a:bodyPr wrap="square" lIns="0" tIns="0" rIns="0" bIns="0" rtlCol="0" anchor="ctr"/>
-          <a:lstStyle/>
-          <a:p>
-            <a:pPr indent="0" marL="0">
-              <a:buNone/>
-            </a:pPr>
-            <a:r>
-              <a:rPr lang="en-US" sz="850" dirty="0">
+            <a:off x="6986016" y="1417320"/>
+            <a:ext cx="1472184" cy="274320"/>
+          </a:xfrm>
+          <a:prstGeom prst="rect">
+            <a:avLst/>
+          </a:prstGeom>
+          <a:noFill/>
+          <a:ln/>
+        </p:spPr>
+        <p:txBody>
+          <a:bodyPr wrap="square" lIns="0" tIns="0" rIns="0" bIns="0" rtlCol="0" anchor="ctr"/>
+          <a:lstStyle/>
+          <a:p>
+            <a:pPr indent="0" marL="0">
+              <a:buNone/>
+            </a:pPr>
+            <a:r>
+              <a:rPr lang="en-US" sz="800" dirty="0">
                 <a:solidFill>
                   <a:srgbClr val="777777"/>
                 </a:solidFill>
@@ -8302,12 +8288,9 @@
                 <a:ea typeface="Meiryo" pitchFamily="34" charset="-122"/>
                 <a:cs typeface="Meiryo" pitchFamily="34" charset="-120"/>
               </a:rPr>
-              <a:t>計測Wafer数</a:t>
-            </a:r>
-            <a:pPr indent="0" marL="0">
-              <a:buNone/>
-            </a:pPr>
-            <a:endParaRPr lang="en-US" sz="850" dirty="0"/>
+              <a:t>SCALY 平均</a:t>
+            </a:r>
+            <a:endParaRPr lang="en-US" sz="800" dirty="0"/>
           </a:p>
         </p:txBody>
       </p:sp>
@@ -8319,11 +8302,13 @@
         </p:nvSpPr>
         <p:spPr>
           <a:xfrm>
-            <a:off x="1920240" y="1901952"/>
-            <a:ext cx="5852160" cy="2286000"/>
-          </a:xfrm>
-          <a:prstGeom prst="rect">
-            <a:avLst/>
+            <a:off x="8577072" y="914400"/>
+            <a:ext cx="1600200" cy="841248"/>
+          </a:xfrm>
+          <a:prstGeom prst="roundRect">
+            <a:avLst>
+              <a:gd name="adj" fmla="val 5435"/>
+            </a:avLst>
           </a:prstGeom>
           <a:solidFill>
             <a:srgbClr val="FFFFFF"/>
@@ -8344,24 +8329,24 @@
         </p:nvSpPr>
         <p:spPr>
           <a:xfrm>
-            <a:off x="1993392" y="1938528"/>
-            <a:ext cx="5705856" cy="237744"/>
-          </a:xfrm>
-          <a:prstGeom prst="rect">
-            <a:avLst/>
-          </a:prstGeom>
-          <a:noFill/>
-          <a:ln/>
-        </p:spPr>
-        <p:txBody>
-          <a:bodyPr wrap="square" lIns="0" tIns="0" rIns="0" bIns="0" rtlCol="0" anchor="ctr"/>
-          <a:lstStyle/>
-          <a:p>
-            <a:pPr indent="0" marL="0">
-              <a:buNone/>
-            </a:pPr>
-            <a:r>
-              <a:rPr lang="en-US" sz="900" b="1" dirty="0">
+            <a:off x="8650224" y="969264"/>
+            <a:ext cx="1472184" cy="402336"/>
+          </a:xfrm>
+          <a:prstGeom prst="rect">
+            <a:avLst/>
+          </a:prstGeom>
+          <a:noFill/>
+          <a:ln/>
+        </p:spPr>
+        <p:txBody>
+          <a:bodyPr wrap="square" lIns="0" tIns="0" rIns="0" bIns="0" rtlCol="0" anchor="ctr"/>
+          <a:lstStyle/>
+          <a:p>
+            <a:pPr indent="0" marL="0">
+              <a:buNone/>
+            </a:pPr>
+            <a:r>
+              <a:rPr lang="en-US" sz="1600" b="1" dirty="0">
                 <a:solidFill>
                   <a:srgbClr val="1E2761"/>
                 </a:solidFill>
@@ -8369,48 +8354,66 @@
                 <a:ea typeface="Meiryo" pitchFamily="34" charset="-122"/>
                 <a:cs typeface="Meiryo" pitchFamily="34" charset="-120"/>
               </a:rPr>
-              <a:t>V-06｜Wafer線形成分トレンド（号機別・管理限界線つき）</a:t>
-            </a:r>
-            <a:endParaRPr lang="en-US" sz="900" dirty="0"/>
-          </a:p>
-        </p:txBody>
-      </p:sp>
-      <p:pic>
-        <p:nvPicPr>
-          <p:cNvPr id="38" name="Image 0" descr="/private/tmp/claude-501/-Users-sakamoto-04---------ClaudeCode-GitHub-PowerBI-LithoBooster-DashBoard/1d2ed9c0-fbf9-4130-80df-0e37d1e3ada0/scratchpad/charts/p4_trend.png">    </p:cNvPr>
-          <p:cNvPicPr>
-            <a:picLocks noChangeAspect="1"/>
-          </p:cNvPicPr>
-          <p:nvPr/>
-        </p:nvPicPr>
-        <p:blipFill>
-          <a:blip r:embed="rId1"/>
-          <a:srcRect l="0" r="0" t="0" b="0"/>
-          <a:stretch/>
-        </p:blipFill>
-        <p:spPr>
-          <a:xfrm>
-            <a:off x="1993392" y="2194560"/>
-            <a:ext cx="5705856" cy="1901952"/>
-          </a:xfrm>
-          <a:prstGeom prst="rect">
-            <a:avLst/>
-          </a:prstGeom>
-        </p:spPr>
-      </p:pic>
-      <p:sp>
-        <p:nvSpPr>
-          <p:cNvPr id="39" name="Shape 36"/>
-          <p:cNvSpPr/>
-          <p:nvPr/>
-        </p:nvSpPr>
-        <p:spPr>
-          <a:xfrm>
-            <a:off x="7882128" y="1901952"/>
-            <a:ext cx="3959352" cy="2286000"/>
-          </a:xfrm>
-          <a:prstGeom prst="rect">
-            <a:avLst/>
+              <a:t>0.52 µrad</a:t>
+            </a:r>
+            <a:endParaRPr lang="en-US" sz="1600" dirty="0"/>
+          </a:p>
+        </p:txBody>
+      </p:sp>
+      <p:sp>
+        <p:nvSpPr>
+          <p:cNvPr id="38" name="Text 36"/>
+          <p:cNvSpPr/>
+          <p:nvPr/>
+        </p:nvSpPr>
+        <p:spPr>
+          <a:xfrm>
+            <a:off x="8650224" y="1417320"/>
+            <a:ext cx="1472184" cy="274320"/>
+          </a:xfrm>
+          <a:prstGeom prst="rect">
+            <a:avLst/>
+          </a:prstGeom>
+          <a:noFill/>
+          <a:ln/>
+        </p:spPr>
+        <p:txBody>
+          <a:bodyPr wrap="square" lIns="0" tIns="0" rIns="0" bIns="0" rtlCol="0" anchor="ctr"/>
+          <a:lstStyle/>
+          <a:p>
+            <a:pPr indent="0" marL="0">
+              <a:buNone/>
+            </a:pPr>
+            <a:r>
+              <a:rPr lang="en-US" sz="800" dirty="0">
+                <a:solidFill>
+                  <a:srgbClr val="777777"/>
+                </a:solidFill>
+                <a:latin typeface="Meiryo" pitchFamily="34" charset="0"/>
+                <a:ea typeface="Meiryo" pitchFamily="34" charset="-122"/>
+                <a:cs typeface="Meiryo" pitchFamily="34" charset="-120"/>
+              </a:rPr>
+              <a:t>ROTX 平均</a:t>
+            </a:r>
+            <a:endParaRPr lang="en-US" sz="800" dirty="0"/>
+          </a:p>
+        </p:txBody>
+      </p:sp>
+      <p:sp>
+        <p:nvSpPr>
+          <p:cNvPr id="39" name="Shape 37"/>
+          <p:cNvSpPr/>
+          <p:nvPr/>
+        </p:nvSpPr>
+        <p:spPr>
+          <a:xfrm>
+            <a:off x="10241280" y="914400"/>
+            <a:ext cx="1600200" cy="841248"/>
+          </a:xfrm>
+          <a:prstGeom prst="roundRect">
+            <a:avLst>
+              <a:gd name="adj" fmla="val 5435"/>
+            </a:avLst>
           </a:prstGeom>
           <a:solidFill>
             <a:srgbClr val="FFFFFF"/>
@@ -8425,30 +8428,30 @@
       </p:sp>
       <p:sp>
         <p:nvSpPr>
-          <p:cNvPr id="40" name="Text 37"/>
-          <p:cNvSpPr/>
-          <p:nvPr/>
-        </p:nvSpPr>
-        <p:spPr>
-          <a:xfrm>
-            <a:off x="7955280" y="1938528"/>
-            <a:ext cx="3813048" cy="237744"/>
-          </a:xfrm>
-          <a:prstGeom prst="rect">
-            <a:avLst/>
-          </a:prstGeom>
-          <a:noFill/>
-          <a:ln/>
-        </p:spPr>
-        <p:txBody>
-          <a:bodyPr wrap="square" lIns="0" tIns="0" rIns="0" bIns="0" rtlCol="0" anchor="ctr"/>
-          <a:lstStyle/>
-          <a:p>
-            <a:pPr indent="0" marL="0">
-              <a:buNone/>
-            </a:pPr>
-            <a:r>
-              <a:rPr lang="en-US" sz="900" b="1" dirty="0">
+          <p:cNvPr id="40" name="Text 38"/>
+          <p:cNvSpPr/>
+          <p:nvPr/>
+        </p:nvSpPr>
+        <p:spPr>
+          <a:xfrm>
+            <a:off x="10314432" y="969264"/>
+            <a:ext cx="1472184" cy="402336"/>
+          </a:xfrm>
+          <a:prstGeom prst="rect">
+            <a:avLst/>
+          </a:prstGeom>
+          <a:noFill/>
+          <a:ln/>
+        </p:spPr>
+        <p:txBody>
+          <a:bodyPr wrap="square" lIns="0" tIns="0" rIns="0" bIns="0" rtlCol="0" anchor="ctr"/>
+          <a:lstStyle/>
+          <a:p>
+            <a:pPr indent="0" marL="0">
+              <a:buNone/>
+            </a:pPr>
+            <a:r>
+              <a:rPr lang="en-US" sz="1600" b="1" dirty="0">
                 <a:solidFill>
                   <a:srgbClr val="1E2761"/>
                 </a:solidFill>
@@ -8456,45 +8459,61 @@
                 <a:ea typeface="Meiryo" pitchFamily="34" charset="-122"/>
                 <a:cs typeface="Meiryo" pitchFamily="34" charset="-120"/>
               </a:rPr>
-              <a:t>V-02｜線形成分の号機別分布（比較軸切替）</a:t>
-            </a:r>
-            <a:endParaRPr lang="en-US" sz="900" dirty="0"/>
-          </a:p>
-        </p:txBody>
-      </p:sp>
-      <p:pic>
-        <p:nvPicPr>
-          <p:cNvPr id="41" name="Image 1" descr="/private/tmp/claude-501/-Users-sakamoto-04---------ClaudeCode-GitHub-PowerBI-LithoBooster-DashBoard/1d2ed9c0-fbf9-4130-80df-0e37d1e3ada0/scratchpad/charts/p4_box.png">    </p:cNvPr>
-          <p:cNvPicPr>
-            <a:picLocks noChangeAspect="1"/>
-          </p:cNvPicPr>
-          <p:nvPr/>
-        </p:nvPicPr>
-        <p:blipFill>
-          <a:blip r:embed="rId2"/>
-          <a:srcRect l="0" r="0" t="0" b="0"/>
-          <a:stretch/>
-        </p:blipFill>
-        <p:spPr>
-          <a:xfrm>
-            <a:off x="7955280" y="2194560"/>
-            <a:ext cx="3813048" cy="1901952"/>
-          </a:xfrm>
-          <a:prstGeom prst="rect">
-            <a:avLst/>
-          </a:prstGeom>
-        </p:spPr>
-      </p:pic>
-      <p:sp>
-        <p:nvSpPr>
-          <p:cNvPr id="42" name="Shape 38"/>
-          <p:cNvSpPr/>
-          <p:nvPr/>
-        </p:nvSpPr>
-        <p:spPr>
-          <a:xfrm>
-            <a:off x="1920240" y="4279392"/>
-            <a:ext cx="5852160" cy="2176272"/>
+              <a:t>0.47 µrad</a:t>
+            </a:r>
+            <a:endParaRPr lang="en-US" sz="1600" dirty="0"/>
+          </a:p>
+        </p:txBody>
+      </p:sp>
+      <p:sp>
+        <p:nvSpPr>
+          <p:cNvPr id="41" name="Text 39"/>
+          <p:cNvSpPr/>
+          <p:nvPr/>
+        </p:nvSpPr>
+        <p:spPr>
+          <a:xfrm>
+            <a:off x="10314432" y="1417320"/>
+            <a:ext cx="1472184" cy="274320"/>
+          </a:xfrm>
+          <a:prstGeom prst="rect">
+            <a:avLst/>
+          </a:prstGeom>
+          <a:noFill/>
+          <a:ln/>
+        </p:spPr>
+        <p:txBody>
+          <a:bodyPr wrap="square" lIns="0" tIns="0" rIns="0" bIns="0" rtlCol="0" anchor="ctr"/>
+          <a:lstStyle/>
+          <a:p>
+            <a:pPr indent="0" marL="0">
+              <a:buNone/>
+            </a:pPr>
+            <a:r>
+              <a:rPr lang="en-US" sz="800" dirty="0">
+                <a:solidFill>
+                  <a:srgbClr val="777777"/>
+                </a:solidFill>
+                <a:latin typeface="Meiryo" pitchFamily="34" charset="0"/>
+                <a:ea typeface="Meiryo" pitchFamily="34" charset="-122"/>
+                <a:cs typeface="Meiryo" pitchFamily="34" charset="-120"/>
+              </a:rPr>
+              <a:t>ROTY 平均</a:t>
+            </a:r>
+            <a:endParaRPr lang="en-US" sz="800" dirty="0"/>
+          </a:p>
+        </p:txBody>
+      </p:sp>
+      <p:sp>
+        <p:nvSpPr>
+          <p:cNvPr id="42" name="Shape 40"/>
+          <p:cNvSpPr/>
+          <p:nvPr/>
+        </p:nvSpPr>
+        <p:spPr>
+          <a:xfrm>
+            <a:off x="1920240" y="1901952"/>
+            <a:ext cx="5852160" cy="2286000"/>
           </a:xfrm>
           <a:prstGeom prst="rect">
             <a:avLst/>
@@ -8512,7 +8531,181 @@
       </p:sp>
       <p:sp>
         <p:nvSpPr>
-          <p:cNvPr id="43" name="Text 39"/>
+          <p:cNvPr id="43" name="Text 41"/>
+          <p:cNvSpPr/>
+          <p:nvPr/>
+        </p:nvSpPr>
+        <p:spPr>
+          <a:xfrm>
+            <a:off x="1993392" y="1938528"/>
+            <a:ext cx="5705856" cy="237744"/>
+          </a:xfrm>
+          <a:prstGeom prst="rect">
+            <a:avLst/>
+          </a:prstGeom>
+          <a:noFill/>
+          <a:ln/>
+        </p:spPr>
+        <p:txBody>
+          <a:bodyPr wrap="square" lIns="0" tIns="0" rIns="0" bIns="0" rtlCol="0" anchor="ctr"/>
+          <a:lstStyle/>
+          <a:p>
+            <a:pPr indent="0" marL="0">
+              <a:buNone/>
+            </a:pPr>
+            <a:r>
+              <a:rPr lang="en-US" sz="900" b="1" dirty="0">
+                <a:solidFill>
+                  <a:srgbClr val="1E2761"/>
+                </a:solidFill>
+                <a:latin typeface="Meiryo" pitchFamily="34" charset="0"/>
+                <a:ea typeface="Meiryo" pitchFamily="34" charset="-122"/>
+                <a:cs typeface="Meiryo" pitchFamily="34" charset="-120"/>
+              </a:rPr>
+              <a:t>V-06｜Wafer線形成分トレンド（号機別・管理限界線つき）</a:t>
+            </a:r>
+            <a:endParaRPr lang="en-US" sz="900" dirty="0"/>
+          </a:p>
+        </p:txBody>
+      </p:sp>
+      <p:pic>
+        <p:nvPicPr>
+          <p:cNvPr id="44" name="Image 0" descr="/private/tmp/claude-501/-Users-sakamoto-04---------ClaudeCode-GitHub-PowerBI-LithoBooster-DashBoard/1d2ed9c0-fbf9-4130-80df-0e37d1e3ada0/scratchpad/charts/p4_trend.png">    </p:cNvPr>
+          <p:cNvPicPr>
+            <a:picLocks noChangeAspect="1"/>
+          </p:cNvPicPr>
+          <p:nvPr/>
+        </p:nvPicPr>
+        <p:blipFill>
+          <a:blip r:embed="rId1"/>
+          <a:srcRect l="0" r="0" t="0" b="0"/>
+          <a:stretch/>
+        </p:blipFill>
+        <p:spPr>
+          <a:xfrm>
+            <a:off x="1993392" y="2194560"/>
+            <a:ext cx="5705856" cy="1901952"/>
+          </a:xfrm>
+          <a:prstGeom prst="rect">
+            <a:avLst/>
+          </a:prstGeom>
+        </p:spPr>
+      </p:pic>
+      <p:sp>
+        <p:nvSpPr>
+          <p:cNvPr id="45" name="Shape 42"/>
+          <p:cNvSpPr/>
+          <p:nvPr/>
+        </p:nvSpPr>
+        <p:spPr>
+          <a:xfrm>
+            <a:off x="7882128" y="1901952"/>
+            <a:ext cx="3959352" cy="2286000"/>
+          </a:xfrm>
+          <a:prstGeom prst="rect">
+            <a:avLst/>
+          </a:prstGeom>
+          <a:solidFill>
+            <a:srgbClr val="FFFFFF"/>
+          </a:solidFill>
+          <a:ln w="12700">
+            <a:solidFill>
+              <a:srgbClr val="D5DAE5"/>
+            </a:solidFill>
+            <a:prstDash val="solid"/>
+          </a:ln>
+        </p:spPr>
+      </p:sp>
+      <p:sp>
+        <p:nvSpPr>
+          <p:cNvPr id="46" name="Text 43"/>
+          <p:cNvSpPr/>
+          <p:nvPr/>
+        </p:nvSpPr>
+        <p:spPr>
+          <a:xfrm>
+            <a:off x="7955280" y="1938528"/>
+            <a:ext cx="3813048" cy="237744"/>
+          </a:xfrm>
+          <a:prstGeom prst="rect">
+            <a:avLst/>
+          </a:prstGeom>
+          <a:noFill/>
+          <a:ln/>
+        </p:spPr>
+        <p:txBody>
+          <a:bodyPr wrap="square" lIns="0" tIns="0" rIns="0" bIns="0" rtlCol="0" anchor="ctr"/>
+          <a:lstStyle/>
+          <a:p>
+            <a:pPr indent="0" marL="0">
+              <a:buNone/>
+            </a:pPr>
+            <a:r>
+              <a:rPr lang="en-US" sz="900" b="1" dirty="0">
+                <a:solidFill>
+                  <a:srgbClr val="1E2761"/>
+                </a:solidFill>
+                <a:latin typeface="Meiryo" pitchFamily="34" charset="0"/>
+                <a:ea typeface="Meiryo" pitchFamily="34" charset="-122"/>
+                <a:cs typeface="Meiryo" pitchFamily="34" charset="-120"/>
+              </a:rPr>
+              <a:t>V-02｜線形成分の号機別分布（比較軸切替）</a:t>
+            </a:r>
+            <a:endParaRPr lang="en-US" sz="900" dirty="0"/>
+          </a:p>
+        </p:txBody>
+      </p:sp>
+      <p:pic>
+        <p:nvPicPr>
+          <p:cNvPr id="47" name="Image 1" descr="/private/tmp/claude-501/-Users-sakamoto-04---------ClaudeCode-GitHub-PowerBI-LithoBooster-DashBoard/1d2ed9c0-fbf9-4130-80df-0e37d1e3ada0/scratchpad/charts/p4_box.png">    </p:cNvPr>
+          <p:cNvPicPr>
+            <a:picLocks noChangeAspect="1"/>
+          </p:cNvPicPr>
+          <p:nvPr/>
+        </p:nvPicPr>
+        <p:blipFill>
+          <a:blip r:embed="rId2"/>
+          <a:srcRect l="0" r="0" t="0" b="0"/>
+          <a:stretch/>
+        </p:blipFill>
+        <p:spPr>
+          <a:xfrm>
+            <a:off x="7955280" y="2194560"/>
+            <a:ext cx="3813048" cy="1901952"/>
+          </a:xfrm>
+          <a:prstGeom prst="rect">
+            <a:avLst/>
+          </a:prstGeom>
+        </p:spPr>
+      </p:pic>
+      <p:sp>
+        <p:nvSpPr>
+          <p:cNvPr id="48" name="Shape 44"/>
+          <p:cNvSpPr/>
+          <p:nvPr/>
+        </p:nvSpPr>
+        <p:spPr>
+          <a:xfrm>
+            <a:off x="1920240" y="4279392"/>
+            <a:ext cx="5852160" cy="2176272"/>
+          </a:xfrm>
+          <a:prstGeom prst="rect">
+            <a:avLst/>
+          </a:prstGeom>
+          <a:solidFill>
+            <a:srgbClr val="FFFFFF"/>
+          </a:solidFill>
+          <a:ln w="12700">
+            <a:solidFill>
+              <a:srgbClr val="D5DAE5"/>
+            </a:solidFill>
+            <a:prstDash val="solid"/>
+          </a:ln>
+        </p:spPr>
+      </p:sp>
+      <p:sp>
+        <p:nvSpPr>
+          <p:cNvPr id="49" name="Text 45"/>
           <p:cNvSpPr/>
           <p:nvPr/>
         </p:nvSpPr>
@@ -8551,7 +8744,7 @@
       </p:sp>
       <p:pic>
         <p:nvPicPr>
-          <p:cNvPr id="44" name="Image 2" descr="/private/tmp/claude-501/-Users-sakamoto-04---------ClaudeCode-GitHub-PowerBI-LithoBooster-DashBoard/1d2ed9c0-fbf9-4130-80df-0e37d1e3ada0/scratchpad/charts/p4_heat.png">    </p:cNvPr>
+          <p:cNvPr id="50" name="Image 2" descr="/private/tmp/claude-501/-Users-sakamoto-04---------ClaudeCode-GitHub-PowerBI-LithoBooster-DashBoard/1d2ed9c0-fbf9-4130-80df-0e37d1e3ada0/scratchpad/charts/p4_heat.png">    </p:cNvPr>
           <p:cNvPicPr>
             <a:picLocks noChangeAspect="1"/>
           </p:cNvPicPr>
@@ -8574,7 +8767,7 @@
       </p:pic>
       <p:sp>
         <p:nvSpPr>
-          <p:cNvPr id="45" name="Shape 40"/>
+          <p:cNvPr id="51" name="Shape 46"/>
           <p:cNvSpPr/>
           <p:nvPr/>
         </p:nvSpPr>
@@ -8599,7 +8792,7 @@
       </p:sp>
       <p:sp>
         <p:nvSpPr>
-          <p:cNvPr id="46" name="Text 41"/>
+          <p:cNvPr id="52" name="Text 47"/>
           <p:cNvSpPr/>
           <p:nvPr/>
         </p:nvSpPr>
@@ -8638,7 +8831,7 @@
       </p:sp>
       <p:sp>
         <p:nvSpPr>
-          <p:cNvPr id="47" name="Text 42"/>
+          <p:cNvPr id="53" name="Text 48"/>
           <p:cNvSpPr/>
           <p:nvPr/>
         </p:nvSpPr>
@@ -8673,7 +8866,7 @@
                 <a:ea typeface="Meiryo" pitchFamily="34" charset="-122"/>
                 <a:cs typeface="Meiryo" pitchFamily="34" charset="-120"/>
               </a:rPr>
-              <a:t>比較軸（PROCESS / DEVICE_TYPE / EQPID / LOT）はフィールドパラメーターで切替</a:t>
+              <a:t>KPIカードは補正成分ごとにX/Y別で表示</a:t>
             </a:r>
             <a:endParaRPr lang="en-US" sz="950" dirty="0"/>
           </a:p>
@@ -8694,7 +8887,7 @@
                 <a:ea typeface="Meiryo" pitchFamily="34" charset="-122"/>
                 <a:cs typeface="Meiryo" pitchFamily="34" charset="-120"/>
               </a:rPr>
-              <a:t>Lotをクリック→P5補正マップへドリルスルー</a:t>
+              <a:t>比較軸はフィールドパラメーターで切替</a:t>
             </a:r>
             <a:endParaRPr lang="en-US" sz="950" dirty="0"/>
           </a:p>
@@ -8715,7 +8908,7 @@
                 <a:ea typeface="Meiryo" pitchFamily="34" charset="-122"/>
                 <a:cs typeface="Meiryo" pitchFamily="34" charset="-120"/>
               </a:rPr>
-              <a:t>V-10 KPIカードは前期間比を表示</a:t>
+              <a:t>Lotをクリック → P5 俯瞰 / P6 詳細へ</a:t>
             </a:r>
             <a:endParaRPr lang="en-US" sz="950" dirty="0"/>
           </a:p>
@@ -8723,7 +8916,7 @@
       </p:sp>
       <p:sp>
         <p:nvSpPr>
-          <p:cNvPr id="48" name="Text 43"/>
+          <p:cNvPr id="54" name="Text 49"/>
           <p:cNvSpPr/>
           <p:nvPr/>
         </p:nvSpPr>
@@ -8832,7 +9025,7 @@
                 <a:ea typeface="Meiryo" pitchFamily="34" charset="-122"/>
                 <a:cs typeface="Meiryo" pitchFamily="34" charset="-120"/>
               </a:rPr>
-              <a:t>補正マップ / 高次係数（Nikon）</a:t>
+              <a:t>平均ベクトル場 俯瞰（Nikon）</a:t>
             </a:r>
             <a:endParaRPr lang="en-US" sz="2200" dirty="0"/>
           </a:p>
@@ -8871,7 +9064,7 @@
                 <a:ea typeface="Meiryo" pitchFamily="34" charset="-122"/>
                 <a:cs typeface="Meiryo" pitchFamily="34" charset="-120"/>
               </a:rPr>
-              <a:t>補正点ベクトルと高次補正係数（V-14/18/21）</a:t>
+              <a:t>補正点の平均ベクトルを装置×OPERATIONで比較（V-24）</a:t>
             </a:r>
             <a:endParaRPr lang="en-US" sz="950" dirty="0"/>
           </a:p>
@@ -9247,15 +9440,15 @@
               <a:buNone/>
             </a:pPr>
             <a:r>
-              <a:rPr lang="en-US" sz="750" b="1" dirty="0">
-                <a:solidFill>
-                  <a:srgbClr val="E24A50"/>
-                </a:solidFill>
-                <a:latin typeface="Meiryo" pitchFamily="34" charset="0"/>
-                <a:ea typeface="Meiryo" pitchFamily="34" charset="-122"/>
-                <a:cs typeface="Meiryo" pitchFamily="34" charset="-120"/>
-              </a:rPr>
-              <a:t>  必須</a:t>
+              <a:rPr lang="en-US" sz="750" dirty="0">
+                <a:solidFill>
+                  <a:srgbClr val="9AA3B5"/>
+                </a:solidFill>
+                <a:latin typeface="Meiryo" pitchFamily="34" charset="0"/>
+                <a:ea typeface="Meiryo" pitchFamily="34" charset="-122"/>
+                <a:cs typeface="Meiryo" pitchFamily="34" charset="-120"/>
+              </a:rPr>
+              <a:t>  任意</a:t>
             </a:r>
             <a:endParaRPr lang="en-US" sz="800" dirty="0"/>
           </a:p>
@@ -9294,7 +9487,7 @@
                 <a:ea typeface="Meiryo" pitchFamily="34" charset="-122"/>
                 <a:cs typeface="Meiryo" pitchFamily="34" charset="-120"/>
               </a:rPr>
-              <a:t>ML01MF +2  ▾</a:t>
+              <a:t>すべて  ▾</a:t>
             </a:r>
             <a:endParaRPr lang="en-US" sz="900" dirty="0"/>
           </a:p>
@@ -9665,127 +9858,8 @@
         </p:nvSpPr>
         <p:spPr>
           <a:xfrm>
-            <a:off x="429768" y="5705856"/>
-            <a:ext cx="1261872" cy="658368"/>
-          </a:xfrm>
-          <a:prstGeom prst="roundRect">
-            <a:avLst>
-              <a:gd name="adj" fmla="val 5556"/>
-            </a:avLst>
-          </a:prstGeom>
-          <a:solidFill>
-            <a:srgbClr val="FFFFFF"/>
-          </a:solidFill>
-          <a:ln w="9525">
-            <a:solidFill>
-              <a:srgbClr val="D5DAE5"/>
-            </a:solidFill>
-            <a:prstDash val="solid"/>
-          </a:ln>
-        </p:spPr>
-      </p:sp>
-      <p:sp>
-        <p:nvSpPr>
-          <p:cNvPr id="25" name="Text 23"/>
-          <p:cNvSpPr/>
-          <p:nvPr/>
-        </p:nvSpPr>
-        <p:spPr>
-          <a:xfrm>
-            <a:off x="484632" y="5751576"/>
-            <a:ext cx="1170432" cy="219456"/>
-          </a:xfrm>
-          <a:prstGeom prst="rect">
-            <a:avLst/>
-          </a:prstGeom>
-          <a:noFill/>
-          <a:ln/>
-        </p:spPr>
-        <p:txBody>
-          <a:bodyPr wrap="square" lIns="0" tIns="0" rIns="0" bIns="0" rtlCol="0" anchor="ctr"/>
-          <a:lstStyle/>
-          <a:p>
-            <a:pPr indent="0" marL="0">
-              <a:buNone/>
-            </a:pPr>
-            <a:r>
-              <a:rPr lang="en-US" sz="800" dirty="0">
-                <a:solidFill>
-                  <a:srgbClr val="777777"/>
-                </a:solidFill>
-                <a:latin typeface="Meiryo" pitchFamily="34" charset="0"/>
-                <a:ea typeface="Meiryo" pitchFamily="34" charset="-122"/>
-                <a:cs typeface="Meiryo" pitchFamily="34" charset="-120"/>
-              </a:rPr>
-              <a:t>WAFER選択</a:t>
-            </a:r>
-            <a:pPr indent="0" marL="0">
-              <a:buNone/>
-            </a:pPr>
-            <a:r>
-              <a:rPr lang="en-US" sz="750" b="1" dirty="0">
-                <a:solidFill>
-                  <a:srgbClr val="E24A50"/>
-                </a:solidFill>
-                <a:latin typeface="Meiryo" pitchFamily="34" charset="0"/>
-                <a:ea typeface="Meiryo" pitchFamily="34" charset="-122"/>
-                <a:cs typeface="Meiryo" pitchFamily="34" charset="-120"/>
-              </a:rPr>
-              <a:t>  必須</a:t>
-            </a:r>
-            <a:endParaRPr lang="en-US" sz="800" dirty="0"/>
-          </a:p>
-        </p:txBody>
-      </p:sp>
-      <p:sp>
-        <p:nvSpPr>
-          <p:cNvPr id="26" name="Text 24"/>
-          <p:cNvSpPr/>
-          <p:nvPr/>
-        </p:nvSpPr>
-        <p:spPr>
-          <a:xfrm>
-            <a:off x="484632" y="5998464"/>
-            <a:ext cx="1170432" cy="274320"/>
-          </a:xfrm>
-          <a:prstGeom prst="rect">
-            <a:avLst/>
-          </a:prstGeom>
-          <a:noFill/>
-          <a:ln/>
-        </p:spPr>
-        <p:txBody>
-          <a:bodyPr wrap="square" lIns="0" tIns="0" rIns="0" bIns="0" rtlCol="0" anchor="ctr"/>
-          <a:lstStyle/>
-          <a:p>
-            <a:pPr indent="0" marL="0">
-              <a:buNone/>
-            </a:pPr>
-            <a:r>
-              <a:rPr lang="en-US" sz="900" dirty="0">
-                <a:solidFill>
-                  <a:srgbClr val="2B2B2B"/>
-                </a:solidFill>
-                <a:latin typeface="Meiryo" pitchFamily="34" charset="0"/>
-                <a:ea typeface="Meiryo" pitchFamily="34" charset="-122"/>
-                <a:cs typeface="Meiryo" pitchFamily="34" charset="-120"/>
-              </a:rPr>
-              <a:t>5BW975B43-01  ▾</a:t>
-            </a:r>
-            <a:endParaRPr lang="en-US" sz="900" dirty="0"/>
-          </a:p>
-        </p:txBody>
-      </p:sp>
-      <p:sp>
-        <p:nvSpPr>
-          <p:cNvPr id="27" name="Shape 25"/>
-          <p:cNvSpPr/>
-          <p:nvPr/>
-        </p:nvSpPr>
-        <p:spPr>
-          <a:xfrm>
             <a:off x="1920240" y="914400"/>
-            <a:ext cx="3246120" cy="3657600"/>
+            <a:ext cx="6949440" cy="5532120"/>
           </a:xfrm>
           <a:prstGeom prst="rect">
             <a:avLst/>
@@ -9803,14 +9877,14 @@
       </p:sp>
       <p:sp>
         <p:nvSpPr>
-          <p:cNvPr id="28" name="Text 26"/>
+          <p:cNvPr id="25" name="Text 23"/>
           <p:cNvSpPr/>
           <p:nvPr/>
         </p:nvSpPr>
         <p:spPr>
           <a:xfrm>
             <a:off x="1993392" y="950976"/>
-            <a:ext cx="3099816" cy="237744"/>
+            <a:ext cx="6803136" cy="237744"/>
           </a:xfrm>
           <a:prstGeom prst="rect">
             <a:avLst/>
@@ -9834,7 +9908,7 @@
                 <a:ea typeface="Meiryo" pitchFamily="34" charset="-122"/>
                 <a:cs typeface="Meiryo" pitchFamily="34" charset="-120"/>
               </a:rPr>
-              <a:t>V-14｜補正点ベクトルマップ（成分切替）</a:t>
+              <a:t>V-24｜平均補正ベクトル場（装置別 × OPERATION別の小マルチ、Shot枠つき）</a:t>
             </a:r>
             <a:endParaRPr lang="en-US" sz="900" dirty="0"/>
           </a:p>
@@ -9842,7 +9916,7 @@
       </p:sp>
       <p:pic>
         <p:nvPicPr>
-          <p:cNvPr id="29" name="Image 0" descr="/private/tmp/claude-501/-Users-sakamoto-04---------ClaudeCode-GitHub-PowerBI-LithoBooster-DashBoard/1d2ed9c0-fbf9-4130-80df-0e37d1e3ada0/scratchpad/charts/p5_quiver.png">    </p:cNvPr>
+          <p:cNvPr id="26" name="Image 0" descr="/private/tmp/claude-501/-Users-sakamoto-04---------ClaudeCode-GitHub-PowerBI-LithoBooster-DashBoard/1d2ed9c0-fbf9-4130-80df-0e37d1e3ada0/scratchpad/charts/p5_meanfield.png">    </p:cNvPr>
           <p:cNvPicPr>
             <a:picLocks noChangeAspect="1"/>
           </p:cNvPicPr>
@@ -9856,7 +9930,7 @@
         <p:spPr>
           <a:xfrm>
             <a:off x="1993392" y="1207008"/>
-            <a:ext cx="3099816" cy="3273552"/>
+            <a:ext cx="6803136" cy="5148072"/>
           </a:xfrm>
           <a:prstGeom prst="rect">
             <a:avLst/>
@@ -9865,188 +9939,14 @@
       </p:pic>
       <p:sp>
         <p:nvSpPr>
-          <p:cNvPr id="30" name="Shape 27"/>
-          <p:cNvSpPr/>
-          <p:nvPr/>
-        </p:nvSpPr>
-        <p:spPr>
-          <a:xfrm>
-            <a:off x="5257800" y="914400"/>
-            <a:ext cx="3246120" cy="3657600"/>
-          </a:xfrm>
-          <a:prstGeom prst="rect">
-            <a:avLst/>
-          </a:prstGeom>
-          <a:solidFill>
-            <a:srgbClr val="FFFFFF"/>
-          </a:solidFill>
-          <a:ln w="12700">
-            <a:solidFill>
-              <a:srgbClr val="D5DAE5"/>
-            </a:solidFill>
-            <a:prstDash val="solid"/>
-          </a:ln>
-        </p:spPr>
-      </p:sp>
-      <p:sp>
-        <p:nvSpPr>
-          <p:cNvPr id="31" name="Text 28"/>
-          <p:cNvSpPr/>
-          <p:nvPr/>
-        </p:nvSpPr>
-        <p:spPr>
-          <a:xfrm>
-            <a:off x="5330952" y="950976"/>
-            <a:ext cx="3099816" cy="237744"/>
-          </a:xfrm>
-          <a:prstGeom prst="rect">
-            <a:avLst/>
-          </a:prstGeom>
-          <a:noFill/>
-          <a:ln/>
-        </p:spPr>
-        <p:txBody>
-          <a:bodyPr wrap="square" lIns="0" tIns="0" rIns="0" bIns="0" rtlCol="0" anchor="ctr"/>
-          <a:lstStyle/>
-          <a:p>
-            <a:pPr indent="0" marL="0">
-              <a:buNone/>
-            </a:pPr>
-            <a:r>
-              <a:rPr lang="en-US" sz="900" b="1" dirty="0">
-                <a:solidFill>
-                  <a:srgbClr val="1E2761"/>
-                </a:solidFill>
-                <a:latin typeface="Meiryo" pitchFamily="34" charset="0"/>
-                <a:ea typeface="Meiryo" pitchFamily="34" charset="-122"/>
-                <a:cs typeface="Meiryo" pitchFamily="34" charset="-120"/>
-              </a:rPr>
-              <a:t>V-18｜補正前想定マップ（線形+CORRDATA再構成）</a:t>
-            </a:r>
-            <a:endParaRPr lang="en-US" sz="900" dirty="0"/>
-          </a:p>
-        </p:txBody>
-      </p:sp>
-      <p:pic>
-        <p:nvPicPr>
-          <p:cNvPr id="32" name="Image 1" descr="/private/tmp/claude-501/-Users-sakamoto-04---------ClaudeCode-GitHub-PowerBI-LithoBooster-DashBoard/1d2ed9c0-fbf9-4130-80df-0e37d1e3ada0/scratchpad/charts/p5_pre.png">    </p:cNvPr>
-          <p:cNvPicPr>
-            <a:picLocks noChangeAspect="1"/>
-          </p:cNvPicPr>
-          <p:nvPr/>
-        </p:nvPicPr>
-        <p:blipFill>
-          <a:blip r:embed="rId2"/>
-          <a:srcRect l="0" r="0" t="0" b="0"/>
-          <a:stretch/>
-        </p:blipFill>
-        <p:spPr>
-          <a:xfrm>
-            <a:off x="5330952" y="1207008"/>
-            <a:ext cx="3099816" cy="3273552"/>
-          </a:xfrm>
-          <a:prstGeom prst="rect">
-            <a:avLst/>
-          </a:prstGeom>
-        </p:spPr>
-      </p:pic>
-      <p:sp>
-        <p:nvSpPr>
-          <p:cNvPr id="33" name="Shape 29"/>
-          <p:cNvSpPr/>
-          <p:nvPr/>
-        </p:nvSpPr>
-        <p:spPr>
-          <a:xfrm>
-            <a:off x="8595360" y="914400"/>
-            <a:ext cx="3246120" cy="2377440"/>
-          </a:xfrm>
-          <a:prstGeom prst="rect">
-            <a:avLst/>
-          </a:prstGeom>
-          <a:solidFill>
-            <a:srgbClr val="FFFFFF"/>
-          </a:solidFill>
-          <a:ln w="12700">
-            <a:solidFill>
-              <a:srgbClr val="D5DAE5"/>
-            </a:solidFill>
-            <a:prstDash val="solid"/>
-          </a:ln>
-        </p:spPr>
-      </p:sp>
-      <p:sp>
-        <p:nvSpPr>
-          <p:cNvPr id="34" name="Text 30"/>
-          <p:cNvSpPr/>
-          <p:nvPr/>
-        </p:nvSpPr>
-        <p:spPr>
-          <a:xfrm>
-            <a:off x="8668512" y="950976"/>
-            <a:ext cx="3099816" cy="237744"/>
-          </a:xfrm>
-          <a:prstGeom prst="rect">
-            <a:avLst/>
-          </a:prstGeom>
-          <a:noFill/>
-          <a:ln/>
-        </p:spPr>
-        <p:txBody>
-          <a:bodyPr wrap="square" lIns="0" tIns="0" rIns="0" bIns="0" rtlCol="0" anchor="ctr"/>
-          <a:lstStyle/>
-          <a:p>
-            <a:pPr indent="0" marL="0">
-              <a:buNone/>
-            </a:pPr>
-            <a:r>
-              <a:rPr lang="en-US" sz="900" b="1" dirty="0">
-                <a:solidFill>
-                  <a:srgbClr val="1E2761"/>
-                </a:solidFill>
-                <a:latin typeface="Meiryo" pitchFamily="34" charset="0"/>
-                <a:ea typeface="Meiryo" pitchFamily="34" charset="-122"/>
-                <a:cs typeface="Meiryo" pitchFamily="34" charset="-120"/>
-              </a:rPr>
-              <a:t>V-21｜SHOTFAC係数の大きさ比較</a:t>
-            </a:r>
-            <a:endParaRPr lang="en-US" sz="900" dirty="0"/>
-          </a:p>
-        </p:txBody>
-      </p:sp>
-      <p:pic>
-        <p:nvPicPr>
-          <p:cNvPr id="35" name="Image 2" descr="/private/tmp/claude-501/-Users-sakamoto-04---------ClaudeCode-GitHub-PowerBI-LithoBooster-DashBoard/1d2ed9c0-fbf9-4130-80df-0e37d1e3ada0/scratchpad/charts/p5_fac.png">    </p:cNvPr>
-          <p:cNvPicPr>
-            <a:picLocks noChangeAspect="1"/>
-          </p:cNvPicPr>
-          <p:nvPr/>
-        </p:nvPicPr>
-        <p:blipFill>
-          <a:blip r:embed="rId3"/>
-          <a:srcRect l="0" r="0" t="0" b="0"/>
-          <a:stretch/>
-        </p:blipFill>
-        <p:spPr>
-          <a:xfrm>
-            <a:off x="8668512" y="1207008"/>
-            <a:ext cx="3099816" cy="1993392"/>
-          </a:xfrm>
-          <a:prstGeom prst="rect">
-            <a:avLst/>
-          </a:prstGeom>
-        </p:spPr>
-      </p:pic>
-      <p:sp>
-        <p:nvSpPr>
-          <p:cNvPr id="36" name="Shape 31"/>
-          <p:cNvSpPr/>
-          <p:nvPr/>
-        </p:nvSpPr>
-        <p:spPr>
-          <a:xfrm>
-            <a:off x="8595360" y="3383280"/>
-            <a:ext cx="3246120" cy="1188720"/>
+          <p:cNvPr id="27" name="Shape 24"/>
+          <p:cNvSpPr/>
+          <p:nvPr/>
+        </p:nvSpPr>
+        <p:spPr>
+          <a:xfrm>
+            <a:off x="9006840" y="914400"/>
+            <a:ext cx="2834640" cy="2743200"/>
           </a:xfrm>
           <a:prstGeom prst="rect">
             <a:avLst/>
@@ -10064,14 +9964,14 @@
       </p:sp>
       <p:sp>
         <p:nvSpPr>
-          <p:cNvPr id="37" name="Text 32"/>
-          <p:cNvSpPr/>
-          <p:nvPr/>
-        </p:nvSpPr>
-        <p:spPr>
-          <a:xfrm>
-            <a:off x="8686800" y="3429000"/>
-            <a:ext cx="3063240" cy="237744"/>
+          <p:cNvPr id="28" name="Text 25"/>
+          <p:cNvSpPr/>
+          <p:nvPr/>
+        </p:nvSpPr>
+        <p:spPr>
+          <a:xfrm>
+            <a:off x="9098280" y="960120"/>
+            <a:ext cx="2651760" cy="237744"/>
           </a:xfrm>
           <a:prstGeom prst="rect">
             <a:avLst/>
@@ -10095,7 +9995,7 @@
                 <a:ea typeface="Meiryo" pitchFamily="34" charset="-122"/>
                 <a:cs typeface="Meiryo" pitchFamily="34" charset="-120"/>
               </a:rPr>
-              <a:t>確認事項</a:t>
+              <a:t>使い方</a:t>
             </a:r>
             <a:endParaRPr lang="en-US" sz="950" dirty="0"/>
           </a:p>
@@ -10103,14 +10003,14 @@
       </p:sp>
       <p:sp>
         <p:nvSpPr>
-          <p:cNvPr id="38" name="Text 33"/>
-          <p:cNvSpPr/>
-          <p:nvPr/>
-        </p:nvSpPr>
-        <p:spPr>
-          <a:xfrm>
-            <a:off x="8732520" y="3694176"/>
-            <a:ext cx="2971800" cy="804672"/>
+          <p:cNvPr id="29" name="Text 26"/>
+          <p:cNvSpPr/>
+          <p:nvPr/>
+        </p:nvSpPr>
+        <p:spPr>
+          <a:xfrm>
+            <a:off x="9144000" y="1225296"/>
+            <a:ext cx="2560320" cy="2359152"/>
           </a:xfrm>
           <a:prstGeom prst="rect">
             <a:avLst/>
@@ -10138,22 +10038,64 @@
                 <a:ea typeface="Meiryo" pitchFamily="34" charset="-122"/>
                 <a:cs typeface="Meiryo" pitchFamily="34" charset="-120"/>
               </a:rPr>
-              <a:t>SHOTFAC番号と多項式次数の対応・単位は要確認 → I-002</a:t>
+              <a:t>CORRDATA_OFSETX/Yの平均ベクトルを補正点位置ごとに表示</a:t>
             </a:r>
             <a:endParaRPr lang="en-US" sz="950" dirty="0"/>
           </a:p>
-        </p:txBody>
-      </p:sp>
-      <p:sp>
-        <p:nvSpPr>
-          <p:cNvPr id="39" name="Shape 34"/>
-          <p:cNvSpPr/>
-          <p:nvPr/>
-        </p:nvSpPr>
-        <p:spPr>
-          <a:xfrm>
-            <a:off x="1920240" y="4709160"/>
-            <a:ext cx="9921240" cy="1737360"/>
+          <a:p>
+            <a:pPr marL="101600" indent="-101600">
+              <a:lnSpc>
+                <a:spcPct val="145000"/>
+              </a:lnSpc>
+              <a:buSzPct val="100000"/>
+              <a:buChar char="•"/>
+            </a:pPr>
+            <a:r>
+              <a:rPr lang="en-US" sz="950" dirty="0">
+                <a:solidFill>
+                  <a:srgbClr val="2B2B2B"/>
+                </a:solidFill>
+                <a:latin typeface="Meiryo" pitchFamily="34" charset="0"/>
+                <a:ea typeface="Meiryo" pitchFamily="34" charset="-122"/>
+                <a:cs typeface="Meiryo" pitchFamily="34" charset="-120"/>
+              </a:rPr>
+              <a:t>装置×OPERATIONごとの補正傾向を俯瞰比較</a:t>
+            </a:r>
+            <a:endParaRPr lang="en-US" sz="950" dirty="0"/>
+          </a:p>
+          <a:p>
+            <a:pPr marL="101600" indent="-101600">
+              <a:lnSpc>
+                <a:spcPct val="145000"/>
+              </a:lnSpc>
+              <a:buSzPct val="100000"/>
+              <a:buChar char="•"/>
+            </a:pPr>
+            <a:r>
+              <a:rPr lang="en-US" sz="950" dirty="0">
+                <a:solidFill>
+                  <a:srgbClr val="2B2B2B"/>
+                </a:solidFill>
+                <a:latin typeface="Meiryo" pitchFamily="34" charset="0"/>
+                <a:ea typeface="Meiryo" pitchFamily="34" charset="-122"/>
+                <a:cs typeface="Meiryo" pitchFamily="34" charset="-120"/>
+              </a:rPr>
+              <a:t>気になるマスを右クリック → P6 詳細分析へドリルスルー</a:t>
+            </a:r>
+            <a:endParaRPr lang="en-US" sz="950" dirty="0"/>
+          </a:p>
+        </p:txBody>
+      </p:sp>
+      <p:sp>
+        <p:nvSpPr>
+          <p:cNvPr id="30" name="Shape 27"/>
+          <p:cNvSpPr/>
+          <p:nvPr/>
+        </p:nvSpPr>
+        <p:spPr>
+          <a:xfrm>
+            <a:off x="9006840" y="3794760"/>
+            <a:ext cx="2834640" cy="2651760"/>
           </a:xfrm>
           <a:prstGeom prst="rect">
             <a:avLst/>
@@ -10171,14 +10113,14 @@
       </p:sp>
       <p:sp>
         <p:nvSpPr>
-          <p:cNvPr id="40" name="Text 35"/>
-          <p:cNvSpPr/>
-          <p:nvPr/>
-        </p:nvSpPr>
-        <p:spPr>
-          <a:xfrm>
-            <a:off x="2011680" y="4754880"/>
-            <a:ext cx="9738360" cy="237744"/>
+          <p:cNvPr id="31" name="Text 28"/>
+          <p:cNvSpPr/>
+          <p:nvPr/>
+        </p:nvSpPr>
+        <p:spPr>
+          <a:xfrm>
+            <a:off x="9098280" y="3840480"/>
+            <a:ext cx="2651760" cy="237744"/>
           </a:xfrm>
           <a:prstGeom prst="rect">
             <a:avLst/>
@@ -10202,7 +10144,7 @@
                 <a:ea typeface="Meiryo" pitchFamily="34" charset="-122"/>
                 <a:cs typeface="Meiryo" pitchFamily="34" charset="-120"/>
               </a:rPr>
-              <a:t>操作・補足</a:t>
+              <a:t>表示仕様</a:t>
             </a:r>
             <a:endParaRPr lang="en-US" sz="950" dirty="0"/>
           </a:p>
@@ -10210,14 +10152,14 @@
       </p:sp>
       <p:sp>
         <p:nvSpPr>
-          <p:cNvPr id="41" name="Text 36"/>
-          <p:cNvSpPr/>
-          <p:nvPr/>
-        </p:nvSpPr>
-        <p:spPr>
-          <a:xfrm>
-            <a:off x="2057400" y="5020056"/>
-            <a:ext cx="9646920" cy="1353312"/>
+          <p:cNvPr id="32" name="Text 29"/>
+          <p:cNvSpPr/>
+          <p:nvPr/>
+        </p:nvSpPr>
+        <p:spPr>
+          <a:xfrm>
+            <a:off x="9144000" y="4105656"/>
+            <a:ext cx="2560320" cy="2267712"/>
           </a:xfrm>
           <a:prstGeom prst="rect">
             <a:avLst/>
@@ -10245,7 +10187,7 @@
                 <a:ea typeface="Meiryo" pitchFamily="34" charset="-122"/>
                 <a:cs typeface="Meiryo" pitchFamily="34" charset="-120"/>
               </a:rPr>
-              <a:t>表示成分（OFSET / SCAL / ROT）はスライサーで切替。矢印の倍率スケールはスライダーで調整</a:t>
+              <a:t>Shot枠とWafer外周円（150mm）を描画</a:t>
             </a:r>
             <a:endParaRPr lang="en-US" sz="950" dirty="0"/>
           </a:p>
@@ -10266,36 +10208,15 @@
                 <a:ea typeface="Meiryo" pitchFamily="34" charset="-122"/>
                 <a:cs typeface="Meiryo" pitchFamily="34" charset="-120"/>
               </a:rPr>
-              <a:t>V-18の再構成式（CORRDATA適用の符号）は装置エンジニアに確認 → I-009</a:t>
+              <a:t>表示成分（OFSET / SCAL / ROT）は切替可能</a:t>
             </a:r>
             <a:endParaRPr lang="en-US" sz="950" dirty="0"/>
           </a:p>
-          <a:p>
-            <a:pPr marL="101600" indent="-101600">
-              <a:lnSpc>
-                <a:spcPct val="145000"/>
-              </a:lnSpc>
-              <a:buSzPct val="100000"/>
-              <a:buChar char="•"/>
-            </a:pPr>
-            <a:r>
-              <a:rPr lang="en-US" sz="950" dirty="0">
-                <a:solidFill>
-                  <a:srgbClr val="2B2B2B"/>
-                </a:solidFill>
-                <a:latin typeface="Meiryo" pitchFamily="34" charset="0"/>
-                <a:ea typeface="Meiryo" pitchFamily="34" charset="-122"/>
-                <a:cs typeface="Meiryo" pitchFamily="34" charset="-120"/>
-              </a:rPr>
-              <a:t>Wafer1枚選択で描画（DirectQuery負荷対策）</a:t>
-            </a:r>
-            <a:endParaRPr lang="en-US" sz="950" dirty="0"/>
-          </a:p>
-        </p:txBody>
-      </p:sp>
-      <p:sp>
-        <p:nvSpPr>
-          <p:cNvPr id="42" name="Text 37"/>
+        </p:txBody>
+      </p:sp>
+      <p:sp>
+        <p:nvSpPr>
+          <p:cNvPr id="33" name="Text 30"/>
           <p:cNvSpPr/>
           <p:nvPr/>
         </p:nvSpPr>
@@ -10404,7 +10325,7 @@
                 <a:ea typeface="Meiryo" pitchFamily="34" charset="-122"/>
                 <a:cs typeface="Meiryo" pitchFamily="34" charset="-120"/>
               </a:rPr>
-              <a:t>Shotスタック分析</a:t>
+              <a:t>詳細分析（Nikon）</a:t>
             </a:r>
             <a:endParaRPr lang="en-US" sz="2200" dirty="0"/>
           </a:p>
@@ -10443,7 +10364,7 @@
                 <a:ea typeface="Meiryo" pitchFamily="34" charset="-122"/>
                 <a:cs typeface="Meiryo" pitchFamily="34" charset="-120"/>
               </a:rPr>
-              <a:t>全ShotをShot座標系に重ねてShot内の系統傾向を把握（V-19/21/23）</a:t>
+              <a:t>特定Lot・Waferに絞って詳細確認（V-14/18/21）</a:t>
             </a:r>
             <a:endParaRPr lang="en-US" sz="950" dirty="0"/>
           </a:p>
@@ -10819,15 +10740,15 @@
               <a:buNone/>
             </a:pPr>
             <a:r>
-              <a:rPr lang="en-US" sz="750" b="1" dirty="0">
-                <a:solidFill>
-                  <a:srgbClr val="E24A50"/>
-                </a:solidFill>
-                <a:latin typeface="Meiryo" pitchFamily="34" charset="0"/>
-                <a:ea typeface="Meiryo" pitchFamily="34" charset="-122"/>
-                <a:cs typeface="Meiryo" pitchFamily="34" charset="-120"/>
-              </a:rPr>
-              <a:t>  必須</a:t>
+              <a:rPr lang="en-US" sz="750" dirty="0">
+                <a:solidFill>
+                  <a:srgbClr val="9AA3B5"/>
+                </a:solidFill>
+                <a:latin typeface="Meiryo" pitchFamily="34" charset="0"/>
+                <a:ea typeface="Meiryo" pitchFamily="34" charset="-122"/>
+                <a:cs typeface="Meiryo" pitchFamily="34" charset="-120"/>
+              </a:rPr>
+              <a:t>  任意</a:t>
             </a:r>
             <a:endParaRPr lang="en-US" sz="800" dirty="0"/>
           </a:p>
@@ -10866,7 +10787,7 @@
                 <a:ea typeface="Meiryo" pitchFamily="34" charset="-122"/>
                 <a:cs typeface="Meiryo" pitchFamily="34" charset="-120"/>
               </a:rPr>
-              <a:t>ML01MF +2  ▾</a:t>
+              <a:t>すべて  ▾</a:t>
             </a:r>
             <a:endParaRPr lang="en-US" sz="900" dirty="0"/>
           </a:p>
@@ -11237,8 +11158,127 @@
         </p:nvSpPr>
         <p:spPr>
           <a:xfrm>
+            <a:off x="429768" y="5705856"/>
+            <a:ext cx="1261872" cy="658368"/>
+          </a:xfrm>
+          <a:prstGeom prst="roundRect">
+            <a:avLst>
+              <a:gd name="adj" fmla="val 5556"/>
+            </a:avLst>
+          </a:prstGeom>
+          <a:solidFill>
+            <a:srgbClr val="FFFFFF"/>
+          </a:solidFill>
+          <a:ln w="9525">
+            <a:solidFill>
+              <a:srgbClr val="D5DAE5"/>
+            </a:solidFill>
+            <a:prstDash val="solid"/>
+          </a:ln>
+        </p:spPr>
+      </p:sp>
+      <p:sp>
+        <p:nvSpPr>
+          <p:cNvPr id="25" name="Text 23"/>
+          <p:cNvSpPr/>
+          <p:nvPr/>
+        </p:nvSpPr>
+        <p:spPr>
+          <a:xfrm>
+            <a:off x="484632" y="5751576"/>
+            <a:ext cx="1170432" cy="219456"/>
+          </a:xfrm>
+          <a:prstGeom prst="rect">
+            <a:avLst/>
+          </a:prstGeom>
+          <a:noFill/>
+          <a:ln/>
+        </p:spPr>
+        <p:txBody>
+          <a:bodyPr wrap="square" lIns="0" tIns="0" rIns="0" bIns="0" rtlCol="0" anchor="ctr"/>
+          <a:lstStyle/>
+          <a:p>
+            <a:pPr indent="0" marL="0">
+              <a:buNone/>
+            </a:pPr>
+            <a:r>
+              <a:rPr lang="en-US" sz="800" dirty="0">
+                <a:solidFill>
+                  <a:srgbClr val="777777"/>
+                </a:solidFill>
+                <a:latin typeface="Meiryo" pitchFamily="34" charset="0"/>
+                <a:ea typeface="Meiryo" pitchFamily="34" charset="-122"/>
+                <a:cs typeface="Meiryo" pitchFamily="34" charset="-120"/>
+              </a:rPr>
+              <a:t>WAFER選択</a:t>
+            </a:r>
+            <a:pPr indent="0" marL="0">
+              <a:buNone/>
+            </a:pPr>
+            <a:r>
+              <a:rPr lang="en-US" sz="750" b="1" dirty="0">
+                <a:solidFill>
+                  <a:srgbClr val="E24A50"/>
+                </a:solidFill>
+                <a:latin typeface="Meiryo" pitchFamily="34" charset="0"/>
+                <a:ea typeface="Meiryo" pitchFamily="34" charset="-122"/>
+                <a:cs typeface="Meiryo" pitchFamily="34" charset="-120"/>
+              </a:rPr>
+              <a:t>  必須</a:t>
+            </a:r>
+            <a:endParaRPr lang="en-US" sz="800" dirty="0"/>
+          </a:p>
+        </p:txBody>
+      </p:sp>
+      <p:sp>
+        <p:nvSpPr>
+          <p:cNvPr id="26" name="Text 24"/>
+          <p:cNvSpPr/>
+          <p:nvPr/>
+        </p:nvSpPr>
+        <p:spPr>
+          <a:xfrm>
+            <a:off x="484632" y="5998464"/>
+            <a:ext cx="1170432" cy="274320"/>
+          </a:xfrm>
+          <a:prstGeom prst="rect">
+            <a:avLst/>
+          </a:prstGeom>
+          <a:noFill/>
+          <a:ln/>
+        </p:spPr>
+        <p:txBody>
+          <a:bodyPr wrap="square" lIns="0" tIns="0" rIns="0" bIns="0" rtlCol="0" anchor="ctr"/>
+          <a:lstStyle/>
+          <a:p>
+            <a:pPr indent="0" marL="0">
+              <a:buNone/>
+            </a:pPr>
+            <a:r>
+              <a:rPr lang="en-US" sz="900" dirty="0">
+                <a:solidFill>
+                  <a:srgbClr val="2B2B2B"/>
+                </a:solidFill>
+                <a:latin typeface="Meiryo" pitchFamily="34" charset="0"/>
+                <a:ea typeface="Meiryo" pitchFamily="34" charset="-122"/>
+                <a:cs typeface="Meiryo" pitchFamily="34" charset="-120"/>
+              </a:rPr>
+              <a:t>5BW975B43-01  ▾</a:t>
+            </a:r>
+            <a:endParaRPr lang="en-US" sz="900" dirty="0"/>
+          </a:p>
+        </p:txBody>
+      </p:sp>
+      <p:sp>
+        <p:nvSpPr>
+          <p:cNvPr id="27" name="Shape 25"/>
+          <p:cNvSpPr/>
+          <p:nvPr/>
+        </p:nvSpPr>
+        <p:spPr>
+          <a:xfrm>
             <a:off x="1920240" y="914400"/>
-            <a:ext cx="3200400" cy="3657600"/>
+            <a:ext cx="3246120" cy="3657600"/>
           </a:xfrm>
           <a:prstGeom prst="rect">
             <a:avLst/>
@@ -11256,14 +11296,14 @@
       </p:sp>
       <p:sp>
         <p:nvSpPr>
-          <p:cNvPr id="25" name="Text 23"/>
+          <p:cNvPr id="28" name="Text 26"/>
           <p:cNvSpPr/>
           <p:nvPr/>
         </p:nvSpPr>
         <p:spPr>
           <a:xfrm>
             <a:off x="1993392" y="950976"/>
-            <a:ext cx="3054096" cy="237744"/>
+            <a:ext cx="3099816" cy="237744"/>
           </a:xfrm>
           <a:prstGeom prst="rect">
             <a:avLst/>
@@ -11287,7 +11327,7 @@
                 <a:ea typeface="Meiryo" pitchFamily="34" charset="-122"/>
                 <a:cs typeface="Meiryo" pitchFamily="34" charset="-120"/>
               </a:rPr>
-              <a:t>V-19｜スタック平均ベクトル（Shot内の指紋）</a:t>
+              <a:t>V-14｜補正点ベクトルマップ（成分切替）</a:t>
             </a:r>
             <a:endParaRPr lang="en-US" sz="900" dirty="0"/>
           </a:p>
@@ -11295,7 +11335,7 @@
       </p:sp>
       <p:pic>
         <p:nvPicPr>
-          <p:cNvPr id="26" name="Image 0" descr="/private/tmp/claude-501/-Users-sakamoto-04---------ClaudeCode-GitHub-PowerBI-LithoBooster-DashBoard/1d2ed9c0-fbf9-4130-80df-0e37d1e3ada0/scratchpad/charts/p6_stack.png">    </p:cNvPr>
+          <p:cNvPr id="29" name="Image 0" descr="/private/tmp/claude-501/-Users-sakamoto-04---------ClaudeCode-GitHub-PowerBI-LithoBooster-DashBoard/1d2ed9c0-fbf9-4130-80df-0e37d1e3ada0/scratchpad/charts/p5_quiver.png">    </p:cNvPr>
           <p:cNvPicPr>
             <a:picLocks noChangeAspect="1"/>
           </p:cNvPicPr>
@@ -11309,7 +11349,7 @@
         <p:spPr>
           <a:xfrm>
             <a:off x="1993392" y="1207008"/>
-            <a:ext cx="3054096" cy="3273552"/>
+            <a:ext cx="3099816" cy="3273552"/>
           </a:xfrm>
           <a:prstGeom prst="rect">
             <a:avLst/>
@@ -11318,14 +11358,14 @@
       </p:pic>
       <p:sp>
         <p:nvSpPr>
-          <p:cNvPr id="27" name="Shape 24"/>
-          <p:cNvSpPr/>
-          <p:nvPr/>
-        </p:nvSpPr>
-        <p:spPr>
-          <a:xfrm>
-            <a:off x="5212080" y="914400"/>
-            <a:ext cx="3520440" cy="3657600"/>
+          <p:cNvPr id="30" name="Shape 27"/>
+          <p:cNvSpPr/>
+          <p:nvPr/>
+        </p:nvSpPr>
+        <p:spPr>
+          <a:xfrm>
+            <a:off x="5257800" y="914400"/>
+            <a:ext cx="3246120" cy="3657600"/>
           </a:xfrm>
           <a:prstGeom prst="rect">
             <a:avLst/>
@@ -11343,14 +11383,14 @@
       </p:sp>
       <p:sp>
         <p:nvSpPr>
-          <p:cNvPr id="28" name="Text 25"/>
-          <p:cNvSpPr/>
-          <p:nvPr/>
-        </p:nvSpPr>
-        <p:spPr>
-          <a:xfrm>
-            <a:off x="5285232" y="950976"/>
-            <a:ext cx="3374136" cy="237744"/>
+          <p:cNvPr id="31" name="Text 28"/>
+          <p:cNvSpPr/>
+          <p:nvPr/>
+        </p:nvSpPr>
+        <p:spPr>
+          <a:xfrm>
+            <a:off x="5330952" y="950976"/>
+            <a:ext cx="3099816" cy="237744"/>
           </a:xfrm>
           <a:prstGeom prst="rect">
             <a:avLst/>
@@ -11374,7 +11414,7 @@
                 <a:ea typeface="Meiryo" pitchFamily="34" charset="-122"/>
                 <a:cs typeface="Meiryo" pitchFamily="34" charset="-120"/>
               </a:rPr>
-              <a:t>V-23｜Mark位置ごとの共分散楕円</a:t>
+              <a:t>V-18｜補正前想定マップ（線形+CORRDATA再構成）</a:t>
             </a:r>
             <a:endParaRPr lang="en-US" sz="900" dirty="0"/>
           </a:p>
@@ -11382,7 +11422,7 @@
       </p:sp>
       <p:pic>
         <p:nvPicPr>
-          <p:cNvPr id="29" name="Image 1" descr="/private/tmp/claude-501/-Users-sakamoto-04---------ClaudeCode-GitHub-PowerBI-LithoBooster-DashBoard/1d2ed9c0-fbf9-4130-80df-0e37d1e3ada0/scratchpad/charts/p6_ellipse.png">    </p:cNvPr>
+          <p:cNvPr id="32" name="Image 1" descr="/private/tmp/claude-501/-Users-sakamoto-04---------ClaudeCode-GitHub-PowerBI-LithoBooster-DashBoard/1d2ed9c0-fbf9-4130-80df-0e37d1e3ada0/scratchpad/charts/p5_pre.png">    </p:cNvPr>
           <p:cNvPicPr>
             <a:picLocks noChangeAspect="1"/>
           </p:cNvPicPr>
@@ -11395,8 +11435,8 @@
         </p:blipFill>
         <p:spPr>
           <a:xfrm>
-            <a:off x="5285232" y="1207008"/>
-            <a:ext cx="3374136" cy="3273552"/>
+            <a:off x="5330952" y="1207008"/>
+            <a:ext cx="3099816" cy="3273552"/>
           </a:xfrm>
           <a:prstGeom prst="rect">
             <a:avLst/>
@@ -11405,14 +11445,14 @@
       </p:pic>
       <p:sp>
         <p:nvSpPr>
-          <p:cNvPr id="30" name="Shape 26"/>
-          <p:cNvSpPr/>
-          <p:nvPr/>
-        </p:nvSpPr>
-        <p:spPr>
-          <a:xfrm>
-            <a:off x="8823960" y="914400"/>
-            <a:ext cx="3017520" cy="3657600"/>
+          <p:cNvPr id="33" name="Shape 29"/>
+          <p:cNvSpPr/>
+          <p:nvPr/>
+        </p:nvSpPr>
+        <p:spPr>
+          <a:xfrm>
+            <a:off x="8595360" y="914400"/>
+            <a:ext cx="3246120" cy="2377440"/>
           </a:xfrm>
           <a:prstGeom prst="rect">
             <a:avLst/>
@@ -11430,14 +11470,14 @@
       </p:sp>
       <p:sp>
         <p:nvSpPr>
-          <p:cNvPr id="31" name="Text 27"/>
-          <p:cNvSpPr/>
-          <p:nvPr/>
-        </p:nvSpPr>
-        <p:spPr>
-          <a:xfrm>
-            <a:off x="8897112" y="950976"/>
-            <a:ext cx="2871216" cy="237744"/>
+          <p:cNvPr id="34" name="Text 30"/>
+          <p:cNvSpPr/>
+          <p:nvPr/>
+        </p:nvSpPr>
+        <p:spPr>
+          <a:xfrm>
+            <a:off x="8668512" y="950976"/>
+            <a:ext cx="3099816" cy="237744"/>
           </a:xfrm>
           <a:prstGeom prst="rect">
             <a:avLst/>
@@ -11461,7 +11501,7 @@
                 <a:ea typeface="Meiryo" pitchFamily="34" charset="-122"/>
                 <a:cs typeface="Meiryo" pitchFamily="34" charset="-120"/>
               </a:rPr>
-              <a:t>V-21｜Shot成分の再構成（倍率+回転）</a:t>
+              <a:t>V-21｜SHOTFAC係数の大きさ比較</a:t>
             </a:r>
             <a:endParaRPr lang="en-US" sz="900" dirty="0"/>
           </a:p>
@@ -11469,7 +11509,7 @@
       </p:sp>
       <p:pic>
         <p:nvPicPr>
-          <p:cNvPr id="32" name="Image 2" descr="/private/tmp/claude-501/-Users-sakamoto-04---------ClaudeCode-GitHub-PowerBI-LithoBooster-DashBoard/1d2ed9c0-fbf9-4130-80df-0e37d1e3ada0/scratchpad/charts/p6_shotcomp.png">    </p:cNvPr>
+          <p:cNvPr id="35" name="Image 2" descr="/private/tmp/claude-501/-Users-sakamoto-04---------ClaudeCode-GitHub-PowerBI-LithoBooster-DashBoard/1d2ed9c0-fbf9-4130-80df-0e37d1e3ada0/scratchpad/charts/p5_fac.png">    </p:cNvPr>
           <p:cNvPicPr>
             <a:picLocks noChangeAspect="1"/>
           </p:cNvPicPr>
@@ -11482,8 +11522,8 @@
         </p:blipFill>
         <p:spPr>
           <a:xfrm>
-            <a:off x="8897112" y="1207008"/>
-            <a:ext cx="2871216" cy="3273552"/>
+            <a:off x="8668512" y="1207008"/>
+            <a:ext cx="3099816" cy="1993392"/>
           </a:xfrm>
           <a:prstGeom prst="rect">
             <a:avLst/>
@@ -11492,14 +11532,14 @@
       </p:pic>
       <p:sp>
         <p:nvSpPr>
-          <p:cNvPr id="33" name="Shape 28"/>
-          <p:cNvSpPr/>
-          <p:nvPr/>
-        </p:nvSpPr>
-        <p:spPr>
-          <a:xfrm>
-            <a:off x="1920240" y="4709160"/>
-            <a:ext cx="9921240" cy="1737360"/>
+          <p:cNvPr id="36" name="Shape 31"/>
+          <p:cNvSpPr/>
+          <p:nvPr/>
+        </p:nvSpPr>
+        <p:spPr>
+          <a:xfrm>
+            <a:off x="8595360" y="3383280"/>
+            <a:ext cx="3246120" cy="1188720"/>
           </a:xfrm>
           <a:prstGeom prst="rect">
             <a:avLst/>
@@ -11517,14 +11557,14 @@
       </p:sp>
       <p:sp>
         <p:nvSpPr>
-          <p:cNvPr id="34" name="Text 29"/>
-          <p:cNvSpPr/>
-          <p:nvPr/>
-        </p:nvSpPr>
-        <p:spPr>
-          <a:xfrm>
-            <a:off x="2011680" y="4754880"/>
-            <a:ext cx="9738360" cy="237744"/>
+          <p:cNvPr id="37" name="Text 32"/>
+          <p:cNvSpPr/>
+          <p:nvPr/>
+        </p:nvSpPr>
+        <p:spPr>
+          <a:xfrm>
+            <a:off x="8686800" y="3429000"/>
+            <a:ext cx="3063240" cy="237744"/>
           </a:xfrm>
           <a:prstGeom prst="rect">
             <a:avLst/>
@@ -11548,7 +11588,7 @@
                 <a:ea typeface="Meiryo" pitchFamily="34" charset="-122"/>
                 <a:cs typeface="Meiryo" pitchFamily="34" charset="-120"/>
               </a:rPr>
-              <a:t>スタックの定義と楕円の見方</a:t>
+              <a:t>確認事項</a:t>
             </a:r>
             <a:endParaRPr lang="en-US" sz="950" dirty="0"/>
           </a:p>
@@ -11556,14 +11596,14 @@
       </p:sp>
       <p:sp>
         <p:nvSpPr>
-          <p:cNvPr id="35" name="Text 30"/>
-          <p:cNvSpPr/>
-          <p:nvPr/>
-        </p:nvSpPr>
-        <p:spPr>
-          <a:xfrm>
-            <a:off x="2057400" y="5020056"/>
-            <a:ext cx="9646920" cy="1353312"/>
+          <p:cNvPr id="38" name="Text 33"/>
+          <p:cNvSpPr/>
+          <p:nvPr/>
+        </p:nvSpPr>
+        <p:spPr>
+          <a:xfrm>
+            <a:off x="8732520" y="3694176"/>
+            <a:ext cx="2971800" cy="804672"/>
           </a:xfrm>
           <a:prstGeom prst="rect">
             <a:avLst/>
@@ -11591,10 +11631,96 @@
                 <a:ea typeface="Meiryo" pitchFamily="34" charset="-122"/>
                 <a:cs typeface="Meiryo" pitchFamily="34" charset="-120"/>
               </a:rPr>
-              <a:t>スタック: 全Shot・全WaferのMark残差をShot中心原点の座標系に重ね、Mark位置ごとに集計（Wafer平均を差し引き）</a:t>
+              <a:t>SHOTFAC番号と多項式次数の対応・単位は要確認 → I-002</a:t>
             </a:r>
             <a:endParaRPr lang="en-US" sz="950" dirty="0"/>
           </a:p>
+        </p:txBody>
+      </p:sp>
+      <p:sp>
+        <p:nvSpPr>
+          <p:cNvPr id="39" name="Shape 34"/>
+          <p:cNvSpPr/>
+          <p:nvPr/>
+        </p:nvSpPr>
+        <p:spPr>
+          <a:xfrm>
+            <a:off x="1920240" y="4709160"/>
+            <a:ext cx="9921240" cy="1737360"/>
+          </a:xfrm>
+          <a:prstGeom prst="rect">
+            <a:avLst/>
+          </a:prstGeom>
+          <a:solidFill>
+            <a:srgbClr val="F7F9FC"/>
+          </a:solidFill>
+          <a:ln w="12700">
+            <a:solidFill>
+              <a:srgbClr val="D5DAE5"/>
+            </a:solidFill>
+            <a:prstDash val="solid"/>
+          </a:ln>
+        </p:spPr>
+      </p:sp>
+      <p:sp>
+        <p:nvSpPr>
+          <p:cNvPr id="40" name="Text 35"/>
+          <p:cNvSpPr/>
+          <p:nvPr/>
+        </p:nvSpPr>
+        <p:spPr>
+          <a:xfrm>
+            <a:off x="2011680" y="4754880"/>
+            <a:ext cx="9738360" cy="237744"/>
+          </a:xfrm>
+          <a:prstGeom prst="rect">
+            <a:avLst/>
+          </a:prstGeom>
+          <a:noFill/>
+          <a:ln/>
+        </p:spPr>
+        <p:txBody>
+          <a:bodyPr wrap="square" lIns="0" tIns="0" rIns="0" bIns="0" rtlCol="0" anchor="ctr"/>
+          <a:lstStyle/>
+          <a:p>
+            <a:pPr indent="0" marL="0">
+              <a:buNone/>
+            </a:pPr>
+            <a:r>
+              <a:rPr lang="en-US" sz="950" b="1" dirty="0">
+                <a:solidFill>
+                  <a:srgbClr val="1E2761"/>
+                </a:solidFill>
+                <a:latin typeface="Meiryo" pitchFamily="34" charset="0"/>
+                <a:ea typeface="Meiryo" pitchFamily="34" charset="-122"/>
+                <a:cs typeface="Meiryo" pitchFamily="34" charset="-120"/>
+              </a:rPr>
+              <a:t>操作・補足</a:t>
+            </a:r>
+            <a:endParaRPr lang="en-US" sz="950" dirty="0"/>
+          </a:p>
+        </p:txBody>
+      </p:sp>
+      <p:sp>
+        <p:nvSpPr>
+          <p:cNvPr id="41" name="Text 36"/>
+          <p:cNvSpPr/>
+          <p:nvPr/>
+        </p:nvSpPr>
+        <p:spPr>
+          <a:xfrm>
+            <a:off x="2057400" y="5020056"/>
+            <a:ext cx="9646920" cy="1353312"/>
+          </a:xfrm>
+          <a:prstGeom prst="rect">
+            <a:avLst/>
+          </a:prstGeom>
+          <a:noFill/>
+          <a:ln/>
+        </p:spPr>
+        <p:txBody>
+          <a:bodyPr wrap="square" lIns="0" tIns="0" rIns="0" bIns="0" rtlCol="0" anchor="t"/>
+          <a:lstStyle/>
           <a:p>
             <a:pPr marL="101600" indent="-101600">
               <a:lnSpc>
@@ -11612,7 +11738,7 @@
                 <a:ea typeface="Meiryo" pitchFamily="34" charset="-122"/>
                 <a:cs typeface="Meiryo" pitchFamily="34" charset="-120"/>
               </a:rPr>
-              <a:t>V-23の楕円: サイズ=分散（固有値√×k）、傾き=X/Y相関の向き、色=|相関係数|。V-22と同じ規則</a:t>
+              <a:t>表示成分（OFSET / SCAL / ROT）はスライサーで切替。矢印の倍率スケールはスライダーで調整</a:t>
             </a:r>
             <a:endParaRPr lang="en-US" sz="950" dirty="0"/>
           </a:p>
@@ -11633,15 +11759,36 @@
                 <a:ea typeface="Meiryo" pitchFamily="34" charset="-122"/>
                 <a:cs typeface="Meiryo" pitchFamily="34" charset="-120"/>
               </a:rPr>
-              <a:t>OPERATIONによりShotサイズ・Mark数（RDH: 4点 / MSR: 6点）が異なるため、OPERATION絞り込みは必須</a:t>
+              <a:t>V-18の再構成式（CORRDATA適用の符号）は装置エンジニアに確認 → I-009</a:t>
             </a:r>
             <a:endParaRPr lang="en-US" sz="950" dirty="0"/>
           </a:p>
-        </p:txBody>
-      </p:sp>
-      <p:sp>
-        <p:nvSpPr>
-          <p:cNvPr id="36" name="Text 31"/>
+          <a:p>
+            <a:pPr marL="101600" indent="-101600">
+              <a:lnSpc>
+                <a:spcPct val="145000"/>
+              </a:lnSpc>
+              <a:buSzPct val="100000"/>
+              <a:buChar char="•"/>
+            </a:pPr>
+            <a:r>
+              <a:rPr lang="en-US" sz="950" dirty="0">
+                <a:solidFill>
+                  <a:srgbClr val="2B2B2B"/>
+                </a:solidFill>
+                <a:latin typeface="Meiryo" pitchFamily="34" charset="0"/>
+                <a:ea typeface="Meiryo" pitchFamily="34" charset="-122"/>
+                <a:cs typeface="Meiryo" pitchFamily="34" charset="-120"/>
+              </a:rPr>
+              <a:t>Wafer1枚選択で描画（DirectQuery負荷対策）。Shot枠を描画</a:t>
+            </a:r>
+            <a:endParaRPr lang="en-US" sz="950" dirty="0"/>
+          </a:p>
+        </p:txBody>
+      </p:sp>
+      <p:sp>
+        <p:nvSpPr>
+          <p:cNvPr id="42" name="Text 37"/>
           <p:cNvSpPr/>
           <p:nvPr/>
         </p:nvSpPr>
@@ -11689,6 +11836,1352 @@
 <file path=ppt/slides/slide8.xml><?xml version="1.0" encoding="utf-8"?>
 <p:sld xmlns:a="http://schemas.openxmlformats.org/drawingml/2006/main" xmlns:r="http://schemas.openxmlformats.org/officeDocument/2006/relationships" xmlns:p="http://schemas.openxmlformats.org/presentationml/2006/main">
   <p:cSld name="Slide 8">
+    <p:spTree>
+      <p:nvGrpSpPr>
+        <p:cNvPr id="1" name=""/>
+        <p:cNvGrpSpPr/>
+        <p:nvPr/>
+      </p:nvGrpSpPr>
+      <p:grpSpPr>
+        <a:xfrm>
+          <a:off x="0" y="0"/>
+          <a:ext cx="0" cy="0"/>
+          <a:chOff x="0" y="0"/>
+          <a:chExt cx="0" cy="0"/>
+        </a:xfrm>
+      </p:grpSpPr>
+      <p:sp>
+        <p:nvSpPr>
+          <p:cNvPr id="2" name="Text 0"/>
+          <p:cNvSpPr/>
+          <p:nvPr/>
+        </p:nvSpPr>
+        <p:spPr>
+          <a:xfrm>
+            <a:off x="320040" y="109728"/>
+            <a:ext cx="7863840" cy="502920"/>
+          </a:xfrm>
+          <a:prstGeom prst="rect">
+            <a:avLst/>
+          </a:prstGeom>
+          <a:noFill/>
+          <a:ln/>
+        </p:spPr>
+        <p:txBody>
+          <a:bodyPr wrap="square" lIns="0" tIns="0" rIns="0" bIns="0" rtlCol="0" anchor="ctr"/>
+          <a:lstStyle/>
+          <a:p>
+            <a:pPr indent="0" marL="0">
+              <a:buNone/>
+            </a:pPr>
+            <a:r>
+              <a:rPr lang="en-US" sz="2200" b="1" dirty="0">
+                <a:solidFill>
+                  <a:srgbClr val="E24A50"/>
+                </a:solidFill>
+                <a:latin typeface="Meiryo" pitchFamily="34" charset="0"/>
+                <a:ea typeface="Meiryo" pitchFamily="34" charset="-122"/>
+                <a:cs typeface="Meiryo" pitchFamily="34" charset="-120"/>
+              </a:rPr>
+              <a:t>P7　</a:t>
+            </a:r>
+            <a:pPr indent="0" marL="0">
+              <a:buNone/>
+            </a:pPr>
+            <a:r>
+              <a:rPr lang="en-US" sz="2200" b="1" dirty="0">
+                <a:solidFill>
+                  <a:srgbClr val="1E2761"/>
+                </a:solidFill>
+                <a:latin typeface="Meiryo" pitchFamily="34" charset="0"/>
+                <a:ea typeface="Meiryo" pitchFamily="34" charset="-122"/>
+                <a:cs typeface="Meiryo" pitchFamily="34" charset="-120"/>
+              </a:rPr>
+              <a:t>Shotスタック分析</a:t>
+            </a:r>
+            <a:endParaRPr lang="en-US" sz="2200" dirty="0"/>
+          </a:p>
+        </p:txBody>
+      </p:sp>
+      <p:sp>
+        <p:nvSpPr>
+          <p:cNvPr id="3" name="Text 1"/>
+          <p:cNvSpPr/>
+          <p:nvPr/>
+        </p:nvSpPr>
+        <p:spPr>
+          <a:xfrm>
+            <a:off x="8229600" y="164592"/>
+            <a:ext cx="3657600" cy="457200"/>
+          </a:xfrm>
+          <a:prstGeom prst="rect">
+            <a:avLst/>
+          </a:prstGeom>
+          <a:noFill/>
+          <a:ln/>
+        </p:spPr>
+        <p:txBody>
+          <a:bodyPr wrap="square" lIns="0" tIns="0" rIns="0" bIns="0" rtlCol="0" anchor="ctr"/>
+          <a:lstStyle/>
+          <a:p>
+            <a:pPr algn="r" indent="0" marL="0">
+              <a:buNone/>
+            </a:pPr>
+            <a:r>
+              <a:rPr lang="en-US" sz="950" dirty="0">
+                <a:solidFill>
+                  <a:srgbClr val="777777"/>
+                </a:solidFill>
+                <a:latin typeface="Meiryo" pitchFamily="34" charset="0"/>
+                <a:ea typeface="Meiryo" pitchFamily="34" charset="-122"/>
+                <a:cs typeface="Meiryo" pitchFamily="34" charset="-120"/>
+              </a:rPr>
+              <a:t>全ShotをShot座標系に重ねてShot内の系統傾向を把握（V-19/21/23）</a:t>
+            </a:r>
+            <a:endParaRPr lang="en-US" sz="950" dirty="0"/>
+          </a:p>
+        </p:txBody>
+      </p:sp>
+      <p:sp>
+        <p:nvSpPr>
+          <p:cNvPr id="4" name="Shape 2"/>
+          <p:cNvSpPr/>
+          <p:nvPr/>
+        </p:nvSpPr>
+        <p:spPr>
+          <a:xfrm>
+            <a:off x="320040" y="777240"/>
+            <a:ext cx="1481328" cy="5669280"/>
+          </a:xfrm>
+          <a:prstGeom prst="roundRect">
+            <a:avLst>
+              <a:gd name="adj" fmla="val 3086"/>
+            </a:avLst>
+          </a:prstGeom>
+          <a:solidFill>
+            <a:srgbClr val="EEF1F7"/>
+          </a:solidFill>
+          <a:ln w="9525">
+            <a:solidFill>
+              <a:srgbClr val="D5DAE5"/>
+            </a:solidFill>
+            <a:prstDash val="solid"/>
+          </a:ln>
+        </p:spPr>
+      </p:sp>
+      <p:sp>
+        <p:nvSpPr>
+          <p:cNvPr id="5" name="Text 3"/>
+          <p:cNvSpPr/>
+          <p:nvPr/>
+        </p:nvSpPr>
+        <p:spPr>
+          <a:xfrm>
+            <a:off x="411480" y="868680"/>
+            <a:ext cx="1280160" cy="274320"/>
+          </a:xfrm>
+          <a:prstGeom prst="rect">
+            <a:avLst/>
+          </a:prstGeom>
+          <a:noFill/>
+          <a:ln/>
+        </p:spPr>
+        <p:txBody>
+          <a:bodyPr wrap="square" lIns="0" tIns="0" rIns="0" bIns="0" rtlCol="0" anchor="ctr"/>
+          <a:lstStyle/>
+          <a:p>
+            <a:pPr indent="0" marL="0">
+              <a:buNone/>
+            </a:pPr>
+            <a:r>
+              <a:rPr lang="en-US" sz="1100" b="1" dirty="0">
+                <a:solidFill>
+                  <a:srgbClr val="1E2761"/>
+                </a:solidFill>
+                <a:latin typeface="Meiryo" pitchFamily="34" charset="0"/>
+                <a:ea typeface="Meiryo" pitchFamily="34" charset="-122"/>
+                <a:cs typeface="Meiryo" pitchFamily="34" charset="-120"/>
+              </a:rPr>
+              <a:t>フィルター</a:t>
+            </a:r>
+            <a:endParaRPr lang="en-US" sz="1100" dirty="0"/>
+          </a:p>
+        </p:txBody>
+      </p:sp>
+      <p:sp>
+        <p:nvSpPr>
+          <p:cNvPr id="6" name="Shape 4"/>
+          <p:cNvSpPr/>
+          <p:nvPr/>
+        </p:nvSpPr>
+        <p:spPr>
+          <a:xfrm>
+            <a:off x="429768" y="1207008"/>
+            <a:ext cx="1261872" cy="658368"/>
+          </a:xfrm>
+          <a:prstGeom prst="roundRect">
+            <a:avLst>
+              <a:gd name="adj" fmla="val 5556"/>
+            </a:avLst>
+          </a:prstGeom>
+          <a:solidFill>
+            <a:srgbClr val="FFFFFF"/>
+          </a:solidFill>
+          <a:ln w="9525">
+            <a:solidFill>
+              <a:srgbClr val="D5DAE5"/>
+            </a:solidFill>
+            <a:prstDash val="solid"/>
+          </a:ln>
+        </p:spPr>
+      </p:sp>
+      <p:sp>
+        <p:nvSpPr>
+          <p:cNvPr id="7" name="Text 5"/>
+          <p:cNvSpPr/>
+          <p:nvPr/>
+        </p:nvSpPr>
+        <p:spPr>
+          <a:xfrm>
+            <a:off x="484632" y="1252728"/>
+            <a:ext cx="1170432" cy="219456"/>
+          </a:xfrm>
+          <a:prstGeom prst="rect">
+            <a:avLst/>
+          </a:prstGeom>
+          <a:noFill/>
+          <a:ln/>
+        </p:spPr>
+        <p:txBody>
+          <a:bodyPr wrap="square" lIns="0" tIns="0" rIns="0" bIns="0" rtlCol="0" anchor="ctr"/>
+          <a:lstStyle/>
+          <a:p>
+            <a:pPr indent="0" marL="0">
+              <a:buNone/>
+            </a:pPr>
+            <a:r>
+              <a:rPr lang="en-US" sz="800" dirty="0">
+                <a:solidFill>
+                  <a:srgbClr val="777777"/>
+                </a:solidFill>
+                <a:latin typeface="Meiryo" pitchFamily="34" charset="0"/>
+                <a:ea typeface="Meiryo" pitchFamily="34" charset="-122"/>
+                <a:cs typeface="Meiryo" pitchFamily="34" charset="-120"/>
+              </a:rPr>
+              <a:t>期間</a:t>
+            </a:r>
+            <a:pPr indent="0" marL="0">
+              <a:buNone/>
+            </a:pPr>
+            <a:r>
+              <a:rPr lang="en-US" sz="750" b="1" dirty="0">
+                <a:solidFill>
+                  <a:srgbClr val="E24A50"/>
+                </a:solidFill>
+                <a:latin typeface="Meiryo" pitchFamily="34" charset="0"/>
+                <a:ea typeface="Meiryo" pitchFamily="34" charset="-122"/>
+                <a:cs typeface="Meiryo" pitchFamily="34" charset="-120"/>
+              </a:rPr>
+              <a:t>  必須</a:t>
+            </a:r>
+            <a:endParaRPr lang="en-US" sz="800" dirty="0"/>
+          </a:p>
+        </p:txBody>
+      </p:sp>
+      <p:sp>
+        <p:nvSpPr>
+          <p:cNvPr id="8" name="Text 6"/>
+          <p:cNvSpPr/>
+          <p:nvPr/>
+        </p:nvSpPr>
+        <p:spPr>
+          <a:xfrm>
+            <a:off x="484632" y="1499616"/>
+            <a:ext cx="1170432" cy="274320"/>
+          </a:xfrm>
+          <a:prstGeom prst="rect">
+            <a:avLst/>
+          </a:prstGeom>
+          <a:noFill/>
+          <a:ln/>
+        </p:spPr>
+        <p:txBody>
+          <a:bodyPr wrap="square" lIns="0" tIns="0" rIns="0" bIns="0" rtlCol="0" anchor="ctr"/>
+          <a:lstStyle/>
+          <a:p>
+            <a:pPr indent="0" marL="0">
+              <a:buNone/>
+            </a:pPr>
+            <a:r>
+              <a:rPr lang="en-US" sz="900" dirty="0">
+                <a:solidFill>
+                  <a:srgbClr val="2B2B2B"/>
+                </a:solidFill>
+                <a:latin typeface="Meiryo" pitchFamily="34" charset="0"/>
+                <a:ea typeface="Meiryo" pitchFamily="34" charset="-122"/>
+                <a:cs typeface="Meiryo" pitchFamily="34" charset="-120"/>
+              </a:rPr>
+              <a:t>6/28 – 7/4  ▾</a:t>
+            </a:r>
+            <a:endParaRPr lang="en-US" sz="900" dirty="0"/>
+          </a:p>
+        </p:txBody>
+      </p:sp>
+      <p:sp>
+        <p:nvSpPr>
+          <p:cNvPr id="9" name="Shape 7"/>
+          <p:cNvSpPr/>
+          <p:nvPr/>
+        </p:nvSpPr>
+        <p:spPr>
+          <a:xfrm>
+            <a:off x="429768" y="1956816"/>
+            <a:ext cx="1261872" cy="658368"/>
+          </a:xfrm>
+          <a:prstGeom prst="roundRect">
+            <a:avLst>
+              <a:gd name="adj" fmla="val 5556"/>
+            </a:avLst>
+          </a:prstGeom>
+          <a:solidFill>
+            <a:srgbClr val="FFFFFF"/>
+          </a:solidFill>
+          <a:ln w="9525">
+            <a:solidFill>
+              <a:srgbClr val="D5DAE5"/>
+            </a:solidFill>
+            <a:prstDash val="solid"/>
+          </a:ln>
+        </p:spPr>
+      </p:sp>
+      <p:sp>
+        <p:nvSpPr>
+          <p:cNvPr id="10" name="Text 8"/>
+          <p:cNvSpPr/>
+          <p:nvPr/>
+        </p:nvSpPr>
+        <p:spPr>
+          <a:xfrm>
+            <a:off x="484632" y="2002536"/>
+            <a:ext cx="1170432" cy="219456"/>
+          </a:xfrm>
+          <a:prstGeom prst="rect">
+            <a:avLst/>
+          </a:prstGeom>
+          <a:noFill/>
+          <a:ln/>
+        </p:spPr>
+        <p:txBody>
+          <a:bodyPr wrap="square" lIns="0" tIns="0" rIns="0" bIns="0" rtlCol="0" anchor="ctr"/>
+          <a:lstStyle/>
+          <a:p>
+            <a:pPr indent="0" marL="0">
+              <a:buNone/>
+            </a:pPr>
+            <a:r>
+              <a:rPr lang="en-US" sz="800" dirty="0">
+                <a:solidFill>
+                  <a:srgbClr val="777777"/>
+                </a:solidFill>
+                <a:latin typeface="Meiryo" pitchFamily="34" charset="0"/>
+                <a:ea typeface="Meiryo" pitchFamily="34" charset="-122"/>
+                <a:cs typeface="Meiryo" pitchFamily="34" charset="-120"/>
+              </a:rPr>
+              <a:t>DEVICE_TYPE</a:t>
+            </a:r>
+            <a:pPr indent="0" marL="0">
+              <a:buNone/>
+            </a:pPr>
+            <a:r>
+              <a:rPr lang="en-US" sz="750" b="1" dirty="0">
+                <a:solidFill>
+                  <a:srgbClr val="E24A50"/>
+                </a:solidFill>
+                <a:latin typeface="Meiryo" pitchFamily="34" charset="0"/>
+                <a:ea typeface="Meiryo" pitchFamily="34" charset="-122"/>
+                <a:cs typeface="Meiryo" pitchFamily="34" charset="-120"/>
+              </a:rPr>
+              <a:t>  必須</a:t>
+            </a:r>
+            <a:endParaRPr lang="en-US" sz="800" dirty="0"/>
+          </a:p>
+        </p:txBody>
+      </p:sp>
+      <p:sp>
+        <p:nvSpPr>
+          <p:cNvPr id="11" name="Text 9"/>
+          <p:cNvSpPr/>
+          <p:nvPr/>
+        </p:nvSpPr>
+        <p:spPr>
+          <a:xfrm>
+            <a:off x="484632" y="2249424"/>
+            <a:ext cx="1170432" cy="274320"/>
+          </a:xfrm>
+          <a:prstGeom prst="rect">
+            <a:avLst/>
+          </a:prstGeom>
+          <a:noFill/>
+          <a:ln/>
+        </p:spPr>
+        <p:txBody>
+          <a:bodyPr wrap="square" lIns="0" tIns="0" rIns="0" bIns="0" rtlCol="0" anchor="ctr"/>
+          <a:lstStyle/>
+          <a:p>
+            <a:pPr indent="0" marL="0">
+              <a:buNone/>
+            </a:pPr>
+            <a:r>
+              <a:rPr lang="en-US" sz="900" dirty="0">
+                <a:solidFill>
+                  <a:srgbClr val="2B2B2B"/>
+                </a:solidFill>
+                <a:latin typeface="Meiryo" pitchFamily="34" charset="0"/>
+                <a:ea typeface="Meiryo" pitchFamily="34" charset="-122"/>
+                <a:cs typeface="Meiryo" pitchFamily="34" charset="-120"/>
+              </a:rPr>
+              <a:t>AADE058_01.00  ▾</a:t>
+            </a:r>
+            <a:endParaRPr lang="en-US" sz="900" dirty="0"/>
+          </a:p>
+        </p:txBody>
+      </p:sp>
+      <p:sp>
+        <p:nvSpPr>
+          <p:cNvPr id="12" name="Shape 10"/>
+          <p:cNvSpPr/>
+          <p:nvPr/>
+        </p:nvSpPr>
+        <p:spPr>
+          <a:xfrm>
+            <a:off x="429768" y="2706624"/>
+            <a:ext cx="1261872" cy="658368"/>
+          </a:xfrm>
+          <a:prstGeom prst="roundRect">
+            <a:avLst>
+              <a:gd name="adj" fmla="val 5556"/>
+            </a:avLst>
+          </a:prstGeom>
+          <a:solidFill>
+            <a:srgbClr val="FFFFFF"/>
+          </a:solidFill>
+          <a:ln w="9525">
+            <a:solidFill>
+              <a:srgbClr val="D5DAE5"/>
+            </a:solidFill>
+            <a:prstDash val="solid"/>
+          </a:ln>
+        </p:spPr>
+      </p:sp>
+      <p:sp>
+        <p:nvSpPr>
+          <p:cNvPr id="13" name="Text 11"/>
+          <p:cNvSpPr/>
+          <p:nvPr/>
+        </p:nvSpPr>
+        <p:spPr>
+          <a:xfrm>
+            <a:off x="484632" y="2752344"/>
+            <a:ext cx="1170432" cy="219456"/>
+          </a:xfrm>
+          <a:prstGeom prst="rect">
+            <a:avLst/>
+          </a:prstGeom>
+          <a:noFill/>
+          <a:ln/>
+        </p:spPr>
+        <p:txBody>
+          <a:bodyPr wrap="square" lIns="0" tIns="0" rIns="0" bIns="0" rtlCol="0" anchor="ctr"/>
+          <a:lstStyle/>
+          <a:p>
+            <a:pPr indent="0" marL="0">
+              <a:buNone/>
+            </a:pPr>
+            <a:r>
+              <a:rPr lang="en-US" sz="800" dirty="0">
+                <a:solidFill>
+                  <a:srgbClr val="777777"/>
+                </a:solidFill>
+                <a:latin typeface="Meiryo" pitchFamily="34" charset="0"/>
+                <a:ea typeface="Meiryo" pitchFamily="34" charset="-122"/>
+                <a:cs typeface="Meiryo" pitchFamily="34" charset="-120"/>
+              </a:rPr>
+              <a:t>装置（EQPID）</a:t>
+            </a:r>
+            <a:pPr indent="0" marL="0">
+              <a:buNone/>
+            </a:pPr>
+            <a:r>
+              <a:rPr lang="en-US" sz="750" dirty="0">
+                <a:solidFill>
+                  <a:srgbClr val="9AA3B5"/>
+                </a:solidFill>
+                <a:latin typeface="Meiryo" pitchFamily="34" charset="0"/>
+                <a:ea typeface="Meiryo" pitchFamily="34" charset="-122"/>
+                <a:cs typeface="Meiryo" pitchFamily="34" charset="-120"/>
+              </a:rPr>
+              <a:t>  任意</a:t>
+            </a:r>
+            <a:endParaRPr lang="en-US" sz="800" dirty="0"/>
+          </a:p>
+        </p:txBody>
+      </p:sp>
+      <p:sp>
+        <p:nvSpPr>
+          <p:cNvPr id="14" name="Text 12"/>
+          <p:cNvSpPr/>
+          <p:nvPr/>
+        </p:nvSpPr>
+        <p:spPr>
+          <a:xfrm>
+            <a:off x="484632" y="2999232"/>
+            <a:ext cx="1170432" cy="274320"/>
+          </a:xfrm>
+          <a:prstGeom prst="rect">
+            <a:avLst/>
+          </a:prstGeom>
+          <a:noFill/>
+          <a:ln/>
+        </p:spPr>
+        <p:txBody>
+          <a:bodyPr wrap="square" lIns="0" tIns="0" rIns="0" bIns="0" rtlCol="0" anchor="ctr"/>
+          <a:lstStyle/>
+          <a:p>
+            <a:pPr indent="0" marL="0">
+              <a:buNone/>
+            </a:pPr>
+            <a:r>
+              <a:rPr lang="en-US" sz="900" dirty="0">
+                <a:solidFill>
+                  <a:srgbClr val="2B2B2B"/>
+                </a:solidFill>
+                <a:latin typeface="Meiryo" pitchFamily="34" charset="0"/>
+                <a:ea typeface="Meiryo" pitchFamily="34" charset="-122"/>
+                <a:cs typeface="Meiryo" pitchFamily="34" charset="-120"/>
+              </a:rPr>
+              <a:t>すべて  ▾</a:t>
+            </a:r>
+            <a:endParaRPr lang="en-US" sz="900" dirty="0"/>
+          </a:p>
+        </p:txBody>
+      </p:sp>
+      <p:sp>
+        <p:nvSpPr>
+          <p:cNvPr id="15" name="Shape 13"/>
+          <p:cNvSpPr/>
+          <p:nvPr/>
+        </p:nvSpPr>
+        <p:spPr>
+          <a:xfrm>
+            <a:off x="429768" y="3456432"/>
+            <a:ext cx="1261872" cy="658368"/>
+          </a:xfrm>
+          <a:prstGeom prst="roundRect">
+            <a:avLst>
+              <a:gd name="adj" fmla="val 5556"/>
+            </a:avLst>
+          </a:prstGeom>
+          <a:solidFill>
+            <a:srgbClr val="FFFFFF"/>
+          </a:solidFill>
+          <a:ln w="9525">
+            <a:solidFill>
+              <a:srgbClr val="D5DAE5"/>
+            </a:solidFill>
+            <a:prstDash val="solid"/>
+          </a:ln>
+        </p:spPr>
+      </p:sp>
+      <p:sp>
+        <p:nvSpPr>
+          <p:cNvPr id="16" name="Text 14"/>
+          <p:cNvSpPr/>
+          <p:nvPr/>
+        </p:nvSpPr>
+        <p:spPr>
+          <a:xfrm>
+            <a:off x="484632" y="3502152"/>
+            <a:ext cx="1170432" cy="219456"/>
+          </a:xfrm>
+          <a:prstGeom prst="rect">
+            <a:avLst/>
+          </a:prstGeom>
+          <a:noFill/>
+          <a:ln/>
+        </p:spPr>
+        <p:txBody>
+          <a:bodyPr wrap="square" lIns="0" tIns="0" rIns="0" bIns="0" rtlCol="0" anchor="ctr"/>
+          <a:lstStyle/>
+          <a:p>
+            <a:pPr indent="0" marL="0">
+              <a:buNone/>
+            </a:pPr>
+            <a:r>
+              <a:rPr lang="en-US" sz="800" dirty="0">
+                <a:solidFill>
+                  <a:srgbClr val="777777"/>
+                </a:solidFill>
+                <a:latin typeface="Meiryo" pitchFamily="34" charset="0"/>
+                <a:ea typeface="Meiryo" pitchFamily="34" charset="-122"/>
+                <a:cs typeface="Meiryo" pitchFamily="34" charset="-120"/>
+              </a:rPr>
+              <a:t>OPERATION</a:t>
+            </a:r>
+            <a:pPr indent="0" marL="0">
+              <a:buNone/>
+            </a:pPr>
+            <a:r>
+              <a:rPr lang="en-US" sz="750" b="1" dirty="0">
+                <a:solidFill>
+                  <a:srgbClr val="E24A50"/>
+                </a:solidFill>
+                <a:latin typeface="Meiryo" pitchFamily="34" charset="0"/>
+                <a:ea typeface="Meiryo" pitchFamily="34" charset="-122"/>
+                <a:cs typeface="Meiryo" pitchFamily="34" charset="-120"/>
+              </a:rPr>
+              <a:t>  必須</a:t>
+            </a:r>
+            <a:endParaRPr lang="en-US" sz="800" dirty="0"/>
+          </a:p>
+        </p:txBody>
+      </p:sp>
+      <p:sp>
+        <p:nvSpPr>
+          <p:cNvPr id="17" name="Text 15"/>
+          <p:cNvSpPr/>
+          <p:nvPr/>
+        </p:nvSpPr>
+        <p:spPr>
+          <a:xfrm>
+            <a:off x="484632" y="3749040"/>
+            <a:ext cx="1170432" cy="274320"/>
+          </a:xfrm>
+          <a:prstGeom prst="rect">
+            <a:avLst/>
+          </a:prstGeom>
+          <a:noFill/>
+          <a:ln/>
+        </p:spPr>
+        <p:txBody>
+          <a:bodyPr wrap="square" lIns="0" tIns="0" rIns="0" bIns="0" rtlCol="0" anchor="ctr"/>
+          <a:lstStyle/>
+          <a:p>
+            <a:pPr indent="0" marL="0">
+              <a:buNone/>
+            </a:pPr>
+            <a:r>
+              <a:rPr lang="en-US" sz="900" dirty="0">
+                <a:solidFill>
+                  <a:srgbClr val="2B2B2B"/>
+                </a:solidFill>
+                <a:latin typeface="Meiryo" pitchFamily="34" charset="0"/>
+                <a:ea typeface="Meiryo" pitchFamily="34" charset="-122"/>
+                <a:cs typeface="Meiryo" pitchFamily="34" charset="-120"/>
+              </a:rPr>
+              <a:t>RDH-MLF  ▾</a:t>
+            </a:r>
+            <a:endParaRPr lang="en-US" sz="900" dirty="0"/>
+          </a:p>
+        </p:txBody>
+      </p:sp>
+      <p:sp>
+        <p:nvSpPr>
+          <p:cNvPr id="18" name="Shape 16"/>
+          <p:cNvSpPr/>
+          <p:nvPr/>
+        </p:nvSpPr>
+        <p:spPr>
+          <a:xfrm>
+            <a:off x="429768" y="4206240"/>
+            <a:ext cx="1261872" cy="658368"/>
+          </a:xfrm>
+          <a:prstGeom prst="roundRect">
+            <a:avLst>
+              <a:gd name="adj" fmla="val 5556"/>
+            </a:avLst>
+          </a:prstGeom>
+          <a:solidFill>
+            <a:srgbClr val="FFFFFF"/>
+          </a:solidFill>
+          <a:ln w="9525">
+            <a:solidFill>
+              <a:srgbClr val="D5DAE5"/>
+            </a:solidFill>
+            <a:prstDash val="solid"/>
+          </a:ln>
+        </p:spPr>
+      </p:sp>
+      <p:sp>
+        <p:nvSpPr>
+          <p:cNvPr id="19" name="Text 17"/>
+          <p:cNvSpPr/>
+          <p:nvPr/>
+        </p:nvSpPr>
+        <p:spPr>
+          <a:xfrm>
+            <a:off x="484632" y="4251960"/>
+            <a:ext cx="1170432" cy="219456"/>
+          </a:xfrm>
+          <a:prstGeom prst="rect">
+            <a:avLst/>
+          </a:prstGeom>
+          <a:noFill/>
+          <a:ln/>
+        </p:spPr>
+        <p:txBody>
+          <a:bodyPr wrap="square" lIns="0" tIns="0" rIns="0" bIns="0" rtlCol="0" anchor="ctr"/>
+          <a:lstStyle/>
+          <a:p>
+            <a:pPr indent="0" marL="0">
+              <a:buNone/>
+            </a:pPr>
+            <a:r>
+              <a:rPr lang="en-US" sz="800" dirty="0">
+                <a:solidFill>
+                  <a:srgbClr val="777777"/>
+                </a:solidFill>
+                <a:latin typeface="Meiryo" pitchFamily="34" charset="0"/>
+                <a:ea typeface="Meiryo" pitchFamily="34" charset="-122"/>
+                <a:cs typeface="Meiryo" pitchFamily="34" charset="-120"/>
+              </a:rPr>
+              <a:t>LOT_ID</a:t>
+            </a:r>
+            <a:pPr indent="0" marL="0">
+              <a:buNone/>
+            </a:pPr>
+            <a:r>
+              <a:rPr lang="en-US" sz="750" dirty="0">
+                <a:solidFill>
+                  <a:srgbClr val="9AA3B5"/>
+                </a:solidFill>
+                <a:latin typeface="Meiryo" pitchFamily="34" charset="0"/>
+                <a:ea typeface="Meiryo" pitchFamily="34" charset="-122"/>
+                <a:cs typeface="Meiryo" pitchFamily="34" charset="-120"/>
+              </a:rPr>
+              <a:t>  任意</a:t>
+            </a:r>
+            <a:endParaRPr lang="en-US" sz="800" dirty="0"/>
+          </a:p>
+        </p:txBody>
+      </p:sp>
+      <p:sp>
+        <p:nvSpPr>
+          <p:cNvPr id="20" name="Text 18"/>
+          <p:cNvSpPr/>
+          <p:nvPr/>
+        </p:nvSpPr>
+        <p:spPr>
+          <a:xfrm>
+            <a:off x="484632" y="4498848"/>
+            <a:ext cx="1170432" cy="274320"/>
+          </a:xfrm>
+          <a:prstGeom prst="rect">
+            <a:avLst/>
+          </a:prstGeom>
+          <a:noFill/>
+          <a:ln/>
+        </p:spPr>
+        <p:txBody>
+          <a:bodyPr wrap="square" lIns="0" tIns="0" rIns="0" bIns="0" rtlCol="0" anchor="ctr"/>
+          <a:lstStyle/>
+          <a:p>
+            <a:pPr indent="0" marL="0">
+              <a:buNone/>
+            </a:pPr>
+            <a:r>
+              <a:rPr lang="en-US" sz="900" dirty="0">
+                <a:solidFill>
+                  <a:srgbClr val="2B2B2B"/>
+                </a:solidFill>
+                <a:latin typeface="Meiryo" pitchFamily="34" charset="0"/>
+                <a:ea typeface="Meiryo" pitchFamily="34" charset="-122"/>
+                <a:cs typeface="Meiryo" pitchFamily="34" charset="-120"/>
+              </a:rPr>
+              <a:t>すべて  ▾</a:t>
+            </a:r>
+            <a:endParaRPr lang="en-US" sz="900" dirty="0"/>
+          </a:p>
+        </p:txBody>
+      </p:sp>
+      <p:sp>
+        <p:nvSpPr>
+          <p:cNvPr id="21" name="Shape 19"/>
+          <p:cNvSpPr/>
+          <p:nvPr/>
+        </p:nvSpPr>
+        <p:spPr>
+          <a:xfrm>
+            <a:off x="429768" y="4956048"/>
+            <a:ext cx="1261872" cy="658368"/>
+          </a:xfrm>
+          <a:prstGeom prst="roundRect">
+            <a:avLst>
+              <a:gd name="adj" fmla="val 5556"/>
+            </a:avLst>
+          </a:prstGeom>
+          <a:solidFill>
+            <a:srgbClr val="FFFFFF"/>
+          </a:solidFill>
+          <a:ln w="9525">
+            <a:solidFill>
+              <a:srgbClr val="D5DAE5"/>
+            </a:solidFill>
+            <a:prstDash val="solid"/>
+          </a:ln>
+        </p:spPr>
+      </p:sp>
+      <p:sp>
+        <p:nvSpPr>
+          <p:cNvPr id="22" name="Text 20"/>
+          <p:cNvSpPr/>
+          <p:nvPr/>
+        </p:nvSpPr>
+        <p:spPr>
+          <a:xfrm>
+            <a:off x="484632" y="5001768"/>
+            <a:ext cx="1170432" cy="219456"/>
+          </a:xfrm>
+          <a:prstGeom prst="rect">
+            <a:avLst/>
+          </a:prstGeom>
+          <a:noFill/>
+          <a:ln/>
+        </p:spPr>
+        <p:txBody>
+          <a:bodyPr wrap="square" lIns="0" tIns="0" rIns="0" bIns="0" rtlCol="0" anchor="ctr"/>
+          <a:lstStyle/>
+          <a:p>
+            <a:pPr indent="0" marL="0">
+              <a:buNone/>
+            </a:pPr>
+            <a:r>
+              <a:rPr lang="en-US" sz="800" dirty="0">
+                <a:solidFill>
+                  <a:srgbClr val="777777"/>
+                </a:solidFill>
+                <a:latin typeface="Meiryo" pitchFamily="34" charset="0"/>
+                <a:ea typeface="Meiryo" pitchFamily="34" charset="-122"/>
+                <a:cs typeface="Meiryo" pitchFamily="34" charset="-120"/>
+              </a:rPr>
+              <a:t>WAFER_ID</a:t>
+            </a:r>
+            <a:pPr indent="0" marL="0">
+              <a:buNone/>
+            </a:pPr>
+            <a:r>
+              <a:rPr lang="en-US" sz="750" dirty="0">
+                <a:solidFill>
+                  <a:srgbClr val="9AA3B5"/>
+                </a:solidFill>
+                <a:latin typeface="Meiryo" pitchFamily="34" charset="0"/>
+                <a:ea typeface="Meiryo" pitchFamily="34" charset="-122"/>
+                <a:cs typeface="Meiryo" pitchFamily="34" charset="-120"/>
+              </a:rPr>
+              <a:t>  任意</a:t>
+            </a:r>
+            <a:endParaRPr lang="en-US" sz="800" dirty="0"/>
+          </a:p>
+        </p:txBody>
+      </p:sp>
+      <p:sp>
+        <p:nvSpPr>
+          <p:cNvPr id="23" name="Text 21"/>
+          <p:cNvSpPr/>
+          <p:nvPr/>
+        </p:nvSpPr>
+        <p:spPr>
+          <a:xfrm>
+            <a:off x="484632" y="5248656"/>
+            <a:ext cx="1170432" cy="274320"/>
+          </a:xfrm>
+          <a:prstGeom prst="rect">
+            <a:avLst/>
+          </a:prstGeom>
+          <a:noFill/>
+          <a:ln/>
+        </p:spPr>
+        <p:txBody>
+          <a:bodyPr wrap="square" lIns="0" tIns="0" rIns="0" bIns="0" rtlCol="0" anchor="ctr"/>
+          <a:lstStyle/>
+          <a:p>
+            <a:pPr indent="0" marL="0">
+              <a:buNone/>
+            </a:pPr>
+            <a:r>
+              <a:rPr lang="en-US" sz="900" dirty="0">
+                <a:solidFill>
+                  <a:srgbClr val="2B2B2B"/>
+                </a:solidFill>
+                <a:latin typeface="Meiryo" pitchFamily="34" charset="0"/>
+                <a:ea typeface="Meiryo" pitchFamily="34" charset="-122"/>
+                <a:cs typeface="Meiryo" pitchFamily="34" charset="-120"/>
+              </a:rPr>
+              <a:t>すべて  ▾</a:t>
+            </a:r>
+            <a:endParaRPr lang="en-US" sz="900" dirty="0"/>
+          </a:p>
+        </p:txBody>
+      </p:sp>
+      <p:sp>
+        <p:nvSpPr>
+          <p:cNvPr id="24" name="Shape 22"/>
+          <p:cNvSpPr/>
+          <p:nvPr/>
+        </p:nvSpPr>
+        <p:spPr>
+          <a:xfrm>
+            <a:off x="1920240" y="914400"/>
+            <a:ext cx="3200400" cy="3657600"/>
+          </a:xfrm>
+          <a:prstGeom prst="rect">
+            <a:avLst/>
+          </a:prstGeom>
+          <a:solidFill>
+            <a:srgbClr val="FFFFFF"/>
+          </a:solidFill>
+          <a:ln w="12700">
+            <a:solidFill>
+              <a:srgbClr val="D5DAE5"/>
+            </a:solidFill>
+            <a:prstDash val="solid"/>
+          </a:ln>
+        </p:spPr>
+      </p:sp>
+      <p:sp>
+        <p:nvSpPr>
+          <p:cNvPr id="25" name="Text 23"/>
+          <p:cNvSpPr/>
+          <p:nvPr/>
+        </p:nvSpPr>
+        <p:spPr>
+          <a:xfrm>
+            <a:off x="1993392" y="950976"/>
+            <a:ext cx="3054096" cy="237744"/>
+          </a:xfrm>
+          <a:prstGeom prst="rect">
+            <a:avLst/>
+          </a:prstGeom>
+          <a:noFill/>
+          <a:ln/>
+        </p:spPr>
+        <p:txBody>
+          <a:bodyPr wrap="square" lIns="0" tIns="0" rIns="0" bIns="0" rtlCol="0" anchor="ctr"/>
+          <a:lstStyle/>
+          <a:p>
+            <a:pPr indent="0" marL="0">
+              <a:buNone/>
+            </a:pPr>
+            <a:r>
+              <a:rPr lang="en-US" sz="900" b="1" dirty="0">
+                <a:solidFill>
+                  <a:srgbClr val="1E2761"/>
+                </a:solidFill>
+                <a:latin typeface="Meiryo" pitchFamily="34" charset="0"/>
+                <a:ea typeface="Meiryo" pitchFamily="34" charset="-122"/>
+                <a:cs typeface="Meiryo" pitchFamily="34" charset="-120"/>
+              </a:rPr>
+              <a:t>V-19｜スタック平均ベクトル（Shot内の指紋）</a:t>
+            </a:r>
+            <a:endParaRPr lang="en-US" sz="900" dirty="0"/>
+          </a:p>
+        </p:txBody>
+      </p:sp>
+      <p:pic>
+        <p:nvPicPr>
+          <p:cNvPr id="26" name="Image 0" descr="/private/tmp/claude-501/-Users-sakamoto-04---------ClaudeCode-GitHub-PowerBI-LithoBooster-DashBoard/1d2ed9c0-fbf9-4130-80df-0e37d1e3ada0/scratchpad/charts/p6_stack.png">    </p:cNvPr>
+          <p:cNvPicPr>
+            <a:picLocks noChangeAspect="1"/>
+          </p:cNvPicPr>
+          <p:nvPr/>
+        </p:nvPicPr>
+        <p:blipFill>
+          <a:blip r:embed="rId1"/>
+          <a:srcRect l="0" r="0" t="0" b="0"/>
+          <a:stretch/>
+        </p:blipFill>
+        <p:spPr>
+          <a:xfrm>
+            <a:off x="1993392" y="1207008"/>
+            <a:ext cx="3054096" cy="3273552"/>
+          </a:xfrm>
+          <a:prstGeom prst="rect">
+            <a:avLst/>
+          </a:prstGeom>
+        </p:spPr>
+      </p:pic>
+      <p:sp>
+        <p:nvSpPr>
+          <p:cNvPr id="27" name="Shape 24"/>
+          <p:cNvSpPr/>
+          <p:nvPr/>
+        </p:nvSpPr>
+        <p:spPr>
+          <a:xfrm>
+            <a:off x="5212080" y="914400"/>
+            <a:ext cx="3520440" cy="3657600"/>
+          </a:xfrm>
+          <a:prstGeom prst="rect">
+            <a:avLst/>
+          </a:prstGeom>
+          <a:solidFill>
+            <a:srgbClr val="FFFFFF"/>
+          </a:solidFill>
+          <a:ln w="12700">
+            <a:solidFill>
+              <a:srgbClr val="D5DAE5"/>
+            </a:solidFill>
+            <a:prstDash val="solid"/>
+          </a:ln>
+        </p:spPr>
+      </p:sp>
+      <p:sp>
+        <p:nvSpPr>
+          <p:cNvPr id="28" name="Text 25"/>
+          <p:cNvSpPr/>
+          <p:nvPr/>
+        </p:nvSpPr>
+        <p:spPr>
+          <a:xfrm>
+            <a:off x="5285232" y="950976"/>
+            <a:ext cx="3374136" cy="237744"/>
+          </a:xfrm>
+          <a:prstGeom prst="rect">
+            <a:avLst/>
+          </a:prstGeom>
+          <a:noFill/>
+          <a:ln/>
+        </p:spPr>
+        <p:txBody>
+          <a:bodyPr wrap="square" lIns="0" tIns="0" rIns="0" bIns="0" rtlCol="0" anchor="ctr"/>
+          <a:lstStyle/>
+          <a:p>
+            <a:pPr indent="0" marL="0">
+              <a:buNone/>
+            </a:pPr>
+            <a:r>
+              <a:rPr lang="en-US" sz="900" b="1" dirty="0">
+                <a:solidFill>
+                  <a:srgbClr val="1E2761"/>
+                </a:solidFill>
+                <a:latin typeface="Meiryo" pitchFamily="34" charset="0"/>
+                <a:ea typeface="Meiryo" pitchFamily="34" charset="-122"/>
+                <a:cs typeface="Meiryo" pitchFamily="34" charset="-120"/>
+              </a:rPr>
+              <a:t>V-23｜Mark位置ごとの共分散楕円</a:t>
+            </a:r>
+            <a:endParaRPr lang="en-US" sz="900" dirty="0"/>
+          </a:p>
+        </p:txBody>
+      </p:sp>
+      <p:pic>
+        <p:nvPicPr>
+          <p:cNvPr id="29" name="Image 1" descr="/private/tmp/claude-501/-Users-sakamoto-04---------ClaudeCode-GitHub-PowerBI-LithoBooster-DashBoard/1d2ed9c0-fbf9-4130-80df-0e37d1e3ada0/scratchpad/charts/p6_ellipse.png">    </p:cNvPr>
+          <p:cNvPicPr>
+            <a:picLocks noChangeAspect="1"/>
+          </p:cNvPicPr>
+          <p:nvPr/>
+        </p:nvPicPr>
+        <p:blipFill>
+          <a:blip r:embed="rId2"/>
+          <a:srcRect l="0" r="0" t="0" b="0"/>
+          <a:stretch/>
+        </p:blipFill>
+        <p:spPr>
+          <a:xfrm>
+            <a:off x="5285232" y="1207008"/>
+            <a:ext cx="3374136" cy="3273552"/>
+          </a:xfrm>
+          <a:prstGeom prst="rect">
+            <a:avLst/>
+          </a:prstGeom>
+        </p:spPr>
+      </p:pic>
+      <p:sp>
+        <p:nvSpPr>
+          <p:cNvPr id="30" name="Shape 26"/>
+          <p:cNvSpPr/>
+          <p:nvPr/>
+        </p:nvSpPr>
+        <p:spPr>
+          <a:xfrm>
+            <a:off x="8823960" y="914400"/>
+            <a:ext cx="3017520" cy="3657600"/>
+          </a:xfrm>
+          <a:prstGeom prst="rect">
+            <a:avLst/>
+          </a:prstGeom>
+          <a:solidFill>
+            <a:srgbClr val="FFFFFF"/>
+          </a:solidFill>
+          <a:ln w="12700">
+            <a:solidFill>
+              <a:srgbClr val="D5DAE5"/>
+            </a:solidFill>
+            <a:prstDash val="solid"/>
+          </a:ln>
+        </p:spPr>
+      </p:sp>
+      <p:sp>
+        <p:nvSpPr>
+          <p:cNvPr id="31" name="Text 27"/>
+          <p:cNvSpPr/>
+          <p:nvPr/>
+        </p:nvSpPr>
+        <p:spPr>
+          <a:xfrm>
+            <a:off x="8897112" y="950976"/>
+            <a:ext cx="2871216" cy="237744"/>
+          </a:xfrm>
+          <a:prstGeom prst="rect">
+            <a:avLst/>
+          </a:prstGeom>
+          <a:noFill/>
+          <a:ln/>
+        </p:spPr>
+        <p:txBody>
+          <a:bodyPr wrap="square" lIns="0" tIns="0" rIns="0" bIns="0" rtlCol="0" anchor="ctr"/>
+          <a:lstStyle/>
+          <a:p>
+            <a:pPr indent="0" marL="0">
+              <a:buNone/>
+            </a:pPr>
+            <a:r>
+              <a:rPr lang="en-US" sz="900" b="1" dirty="0">
+                <a:solidFill>
+                  <a:srgbClr val="1E2761"/>
+                </a:solidFill>
+                <a:latin typeface="Meiryo" pitchFamily="34" charset="0"/>
+                <a:ea typeface="Meiryo" pitchFamily="34" charset="-122"/>
+                <a:cs typeface="Meiryo" pitchFamily="34" charset="-120"/>
+              </a:rPr>
+              <a:t>V-21｜Shot成分の再構成（倍率+回転）</a:t>
+            </a:r>
+            <a:endParaRPr lang="en-US" sz="900" dirty="0"/>
+          </a:p>
+        </p:txBody>
+      </p:sp>
+      <p:pic>
+        <p:nvPicPr>
+          <p:cNvPr id="32" name="Image 2" descr="/private/tmp/claude-501/-Users-sakamoto-04---------ClaudeCode-GitHub-PowerBI-LithoBooster-DashBoard/1d2ed9c0-fbf9-4130-80df-0e37d1e3ada0/scratchpad/charts/p6_shotcomp.png">    </p:cNvPr>
+          <p:cNvPicPr>
+            <a:picLocks noChangeAspect="1"/>
+          </p:cNvPicPr>
+          <p:nvPr/>
+        </p:nvPicPr>
+        <p:blipFill>
+          <a:blip r:embed="rId3"/>
+          <a:srcRect l="0" r="0" t="0" b="0"/>
+          <a:stretch/>
+        </p:blipFill>
+        <p:spPr>
+          <a:xfrm>
+            <a:off x="8897112" y="1207008"/>
+            <a:ext cx="2871216" cy="3273552"/>
+          </a:xfrm>
+          <a:prstGeom prst="rect">
+            <a:avLst/>
+          </a:prstGeom>
+        </p:spPr>
+      </p:pic>
+      <p:sp>
+        <p:nvSpPr>
+          <p:cNvPr id="33" name="Shape 28"/>
+          <p:cNvSpPr/>
+          <p:nvPr/>
+        </p:nvSpPr>
+        <p:spPr>
+          <a:xfrm>
+            <a:off x="1920240" y="4709160"/>
+            <a:ext cx="9921240" cy="1737360"/>
+          </a:xfrm>
+          <a:prstGeom prst="rect">
+            <a:avLst/>
+          </a:prstGeom>
+          <a:solidFill>
+            <a:srgbClr val="F7F9FC"/>
+          </a:solidFill>
+          <a:ln w="12700">
+            <a:solidFill>
+              <a:srgbClr val="D5DAE5"/>
+            </a:solidFill>
+            <a:prstDash val="solid"/>
+          </a:ln>
+        </p:spPr>
+      </p:sp>
+      <p:sp>
+        <p:nvSpPr>
+          <p:cNvPr id="34" name="Text 29"/>
+          <p:cNvSpPr/>
+          <p:nvPr/>
+        </p:nvSpPr>
+        <p:spPr>
+          <a:xfrm>
+            <a:off x="2011680" y="4754880"/>
+            <a:ext cx="9738360" cy="237744"/>
+          </a:xfrm>
+          <a:prstGeom prst="rect">
+            <a:avLst/>
+          </a:prstGeom>
+          <a:noFill/>
+          <a:ln/>
+        </p:spPr>
+        <p:txBody>
+          <a:bodyPr wrap="square" lIns="0" tIns="0" rIns="0" bIns="0" rtlCol="0" anchor="ctr"/>
+          <a:lstStyle/>
+          <a:p>
+            <a:pPr indent="0" marL="0">
+              <a:buNone/>
+            </a:pPr>
+            <a:r>
+              <a:rPr lang="en-US" sz="950" b="1" dirty="0">
+                <a:solidFill>
+                  <a:srgbClr val="1E2761"/>
+                </a:solidFill>
+                <a:latin typeface="Meiryo" pitchFamily="34" charset="0"/>
+                <a:ea typeface="Meiryo" pitchFamily="34" charset="-122"/>
+                <a:cs typeface="Meiryo" pitchFamily="34" charset="-120"/>
+              </a:rPr>
+              <a:t>スタックの定義と楕円の見方</a:t>
+            </a:r>
+            <a:endParaRPr lang="en-US" sz="950" dirty="0"/>
+          </a:p>
+        </p:txBody>
+      </p:sp>
+      <p:sp>
+        <p:nvSpPr>
+          <p:cNvPr id="35" name="Text 30"/>
+          <p:cNvSpPr/>
+          <p:nvPr/>
+        </p:nvSpPr>
+        <p:spPr>
+          <a:xfrm>
+            <a:off x="2057400" y="5020056"/>
+            <a:ext cx="9646920" cy="1353312"/>
+          </a:xfrm>
+          <a:prstGeom prst="rect">
+            <a:avLst/>
+          </a:prstGeom>
+          <a:noFill/>
+          <a:ln/>
+        </p:spPr>
+        <p:txBody>
+          <a:bodyPr wrap="square" lIns="0" tIns="0" rIns="0" bIns="0" rtlCol="0" anchor="t"/>
+          <a:lstStyle/>
+          <a:p>
+            <a:pPr marL="101600" indent="-101600">
+              <a:lnSpc>
+                <a:spcPct val="145000"/>
+              </a:lnSpc>
+              <a:buSzPct val="100000"/>
+              <a:buChar char="•"/>
+            </a:pPr>
+            <a:r>
+              <a:rPr lang="en-US" sz="950" dirty="0">
+                <a:solidFill>
+                  <a:srgbClr val="2B2B2B"/>
+                </a:solidFill>
+                <a:latin typeface="Meiryo" pitchFamily="34" charset="0"/>
+                <a:ea typeface="Meiryo" pitchFamily="34" charset="-122"/>
+                <a:cs typeface="Meiryo" pitchFamily="34" charset="-120"/>
+              </a:rPr>
+              <a:t>スタック: 全Shot・全WaferのMark残差をShot中心原点の座標系に重ね、Mark位置ごとに集計（Wafer平均を差し引き）</a:t>
+            </a:r>
+            <a:endParaRPr lang="en-US" sz="950" dirty="0"/>
+          </a:p>
+          <a:p>
+            <a:pPr marL="101600" indent="-101600">
+              <a:lnSpc>
+                <a:spcPct val="145000"/>
+              </a:lnSpc>
+              <a:buSzPct val="100000"/>
+              <a:buChar char="•"/>
+            </a:pPr>
+            <a:r>
+              <a:rPr lang="en-US" sz="950" dirty="0">
+                <a:solidFill>
+                  <a:srgbClr val="2B2B2B"/>
+                </a:solidFill>
+                <a:latin typeface="Meiryo" pitchFamily="34" charset="0"/>
+                <a:ea typeface="Meiryo" pitchFamily="34" charset="-122"/>
+                <a:cs typeface="Meiryo" pitchFamily="34" charset="-120"/>
+              </a:rPr>
+              <a:t>V-23の楕円: サイズ=分散（固有値√×k）、傾き=X/Y相関の向き、色=|相関係数|。V-22と同じ規則</a:t>
+            </a:r>
+            <a:endParaRPr lang="en-US" sz="950" dirty="0"/>
+          </a:p>
+          <a:p>
+            <a:pPr marL="101600" indent="-101600">
+              <a:lnSpc>
+                <a:spcPct val="145000"/>
+              </a:lnSpc>
+              <a:buSzPct val="100000"/>
+              <a:buChar char="•"/>
+            </a:pPr>
+            <a:r>
+              <a:rPr lang="en-US" sz="950" dirty="0">
+                <a:solidFill>
+                  <a:srgbClr val="2B2B2B"/>
+                </a:solidFill>
+                <a:latin typeface="Meiryo" pitchFamily="34" charset="0"/>
+                <a:ea typeface="Meiryo" pitchFamily="34" charset="-122"/>
+                <a:cs typeface="Meiryo" pitchFamily="34" charset="-120"/>
+              </a:rPr>
+              <a:t>OPERATIONによりShotサイズ・Mark数（RDH: 4点 / MSR: 6点）が異なるため、OPERATION絞り込みは必須</a:t>
+            </a:r>
+            <a:endParaRPr lang="en-US" sz="950" dirty="0"/>
+          </a:p>
+        </p:txBody>
+      </p:sp>
+      <p:sp>
+        <p:nvSpPr>
+          <p:cNvPr id="36" name="Text 31"/>
+          <p:cNvSpPr/>
+          <p:nvPr/>
+        </p:nvSpPr>
+        <p:spPr>
+          <a:xfrm>
+            <a:off x="7863840" y="6528816"/>
+            <a:ext cx="4114800" cy="274320"/>
+          </a:xfrm>
+          <a:prstGeom prst="rect">
+            <a:avLst/>
+          </a:prstGeom>
+          <a:noFill/>
+          <a:ln/>
+        </p:spPr>
+        <p:txBody>
+          <a:bodyPr wrap="square" rtlCol="0" anchor="ctr"/>
+          <a:lstStyle/>
+          <a:p>
+            <a:pPr algn="r" indent="0" marL="0">
+              <a:buNone/>
+            </a:pPr>
+            <a:r>
+              <a:rPr lang="en-US" sz="800" dirty="0">
+                <a:solidFill>
+                  <a:srgbClr val="777777"/>
+                </a:solidFill>
+                <a:latin typeface="Meiryo" pitchFamily="34" charset="0"/>
+                <a:ea typeface="Meiryo" pitchFamily="34" charset="-122"/>
+                <a:cs typeface="Meiryo" pitchFamily="34" charset="-120"/>
+              </a:rPr>
+              <a:t>画面イメージ（ダミーデータによるモックアップ）</a:t>
+            </a:r>
+            <a:endParaRPr lang="en-US" sz="800" dirty="0"/>
+          </a:p>
+        </p:txBody>
+      </p:sp>
+    </p:spTree>
+  </p:cSld>
+  <p:clrMapOvr>
+    <a:masterClrMapping/>
+  </p:clrMapOvr>
+</p:sld>
+</file>
+
+<file path=ppt/slides/slide9.xml><?xml version="1.0" encoding="utf-8"?>
+<p:sld xmlns:a="http://schemas.openxmlformats.org/drawingml/2006/main" xmlns:r="http://schemas.openxmlformats.org/officeDocument/2006/relationships" xmlns:p="http://schemas.openxmlformats.org/presentationml/2006/main">
+  <p:cSld name="Slide 9">
     <p:spTree>
       <p:nvGrpSpPr>
         <p:cNvPr id="1" name=""/>

--- a/dashboard_mockup.pptx
+++ b/dashboard_mockup.pptx
@@ -2133,7 +2133,7 @@
                 <a:ea typeface="Meiryo" pitchFamily="34" charset="-122"/>
                 <a:cs typeface="Meiryo" pitchFamily="34" charset="-120"/>
               </a:rPr>
-              <a:t>平均ベクトル場 俯瞰（Nikon）</a:t>
+              <a:t>補正前Shot配列 俯瞰（Nikon）</a:t>
             </a:r>
             <a:endParaRPr lang="en-US" sz="1200" dirty="0"/>
           </a:p>
@@ -3837,7 +3837,7 @@
                 <a:ea typeface="Meiryo" pitchFamily="34" charset="-122"/>
                 <a:cs typeface="Meiryo" pitchFamily="34" charset="-120"/>
               </a:rPr>
-              <a:t>V-01｜残差RMSの号機別分布（比較軸切替）</a:t>
+              <a:t>V-01｜計測値X/Yの箱ひげ（OPERATION別）</a:t>
             </a:r>
             <a:endParaRPr lang="en-US" sz="900" dirty="0"/>
           </a:p>
@@ -5034,7 +5034,7 @@
                 <a:ea typeface="Meiryo" pitchFamily="34" charset="-122"/>
                 <a:cs typeface="Meiryo" pitchFamily="34" charset="-120"/>
               </a:rPr>
-              <a:t>V-12｜平均ベクトル場（装置別 × OPERATION別の小マルチ、Shot枠つき）</a:t>
+              <a:t>V-12｜平均ベクトル場（装置×OPERATION小マルチ、色=ベクトル長、Shot枠つき）</a:t>
             </a:r>
             <a:endParaRPr lang="en-US" sz="900" dirty="0"/>
           </a:p>
@@ -5313,7 +5313,7 @@
                 <a:ea typeface="Meiryo" pitchFamily="34" charset="-122"/>
                 <a:cs typeface="Meiryo" pitchFamily="34" charset="-120"/>
               </a:rPr>
-              <a:t>Shot枠とWafer外周円（150mm）を描画</a:t>
+              <a:t>矢印の色はベクトルの長さ（カラースケール）</a:t>
             </a:r>
             <a:endParaRPr lang="en-US" sz="950" dirty="0"/>
           </a:p>
@@ -5334,7 +5334,7 @@
                 <a:ea typeface="Meiryo" pitchFamily="34" charset="-122"/>
                 <a:cs typeface="Meiryo" pitchFamily="34" charset="-120"/>
               </a:rPr>
-              <a:t>矢印の倍率スケールは調整可能</a:t>
+              <a:t>Shot枠とWafer外周円（150mm）を描画</a:t>
             </a:r>
             <a:endParaRPr lang="en-US" sz="950" dirty="0"/>
           </a:p>
@@ -5355,7 +5355,7 @@
                 <a:ea typeface="Meiryo" pitchFamily="34" charset="-122"/>
                 <a:cs typeface="Meiryo" pitchFamily="34" charset="-120"/>
               </a:rPr>
-              <a:t>装置は任意フィルター（絞れば単独表示）</a:t>
+              <a:t>矢印の倍率スケールは調整可能</a:t>
             </a:r>
             <a:endParaRPr lang="en-US" sz="950" dirty="0"/>
           </a:p>
@@ -5511,7 +5511,7 @@
                 <a:ea typeface="Meiryo" pitchFamily="34" charset="-122"/>
                 <a:cs typeface="Meiryo" pitchFamily="34" charset="-120"/>
               </a:rPr>
-              <a:t>特定Lot・Waferに絞って詳細確認（V-11/13/22/16/03/17）</a:t>
+              <a:t>特定Lot・Waferに絞って詳細確認（V-11/25/22/26/03）</a:t>
             </a:r>
             <a:endParaRPr lang="en-US" sz="950" dirty="0"/>
           </a:p>
@@ -6425,7 +6425,7 @@
         <p:spPr>
           <a:xfrm>
             <a:off x="1920240" y="914400"/>
-            <a:ext cx="3246120" cy="2834640"/>
+            <a:ext cx="3017520" cy="2834640"/>
           </a:xfrm>
           <a:prstGeom prst="rect">
             <a:avLst/>
@@ -6450,7 +6450,7 @@
         <p:spPr>
           <a:xfrm>
             <a:off x="1993392" y="950976"/>
-            <a:ext cx="3099816" cy="237744"/>
+            <a:ext cx="2871216" cy="237744"/>
           </a:xfrm>
           <a:prstGeom prst="rect">
             <a:avLst/>
@@ -6474,7 +6474,7 @@
                 <a:ea typeface="Meiryo" pitchFamily="34" charset="-122"/>
                 <a:cs typeface="Meiryo" pitchFamily="34" charset="-120"/>
               </a:rPr>
-              <a:t>V-11｜残差ベクトルマップ（1Wafer）</a:t>
+              <a:t>V-11｜計測値ベクトルマップ</a:t>
             </a:r>
             <a:endParaRPr lang="en-US" sz="900" dirty="0"/>
           </a:p>
@@ -6496,7 +6496,7 @@
         <p:spPr>
           <a:xfrm>
             <a:off x="1993392" y="1207008"/>
-            <a:ext cx="3099816" cy="2450592"/>
+            <a:ext cx="2871216" cy="2450592"/>
           </a:xfrm>
           <a:prstGeom prst="rect">
             <a:avLst/>
@@ -6511,8 +6511,8 @@
         </p:nvSpPr>
         <p:spPr>
           <a:xfrm>
-            <a:off x="5257800" y="914400"/>
-            <a:ext cx="3246120" cy="2834640"/>
+            <a:off x="5029200" y="914400"/>
+            <a:ext cx="3886200" cy="2834640"/>
           </a:xfrm>
           <a:prstGeom prst="rect">
             <a:avLst/>
@@ -6536,8 +6536,8 @@
         </p:nvSpPr>
         <p:spPr>
           <a:xfrm>
-            <a:off x="5330952" y="950976"/>
-            <a:ext cx="3099816" cy="237744"/>
+            <a:off x="5102352" y="950976"/>
+            <a:ext cx="3739896" cy="237744"/>
           </a:xfrm>
           <a:prstGeom prst="rect">
             <a:avLst/>
@@ -6561,7 +6561,7 @@
                 <a:ea typeface="Meiryo" pitchFamily="34" charset="-122"/>
                 <a:cs typeface="Meiryo" pitchFamily="34" charset="-120"/>
               </a:rPr>
-              <a:t>V-13｜Shot単位 残差RMSヒートマップ</a:t>
+              <a:t>V-25｜計測値X/Yヒートマップ（Shot平均）</a:t>
             </a:r>
             <a:endParaRPr lang="en-US" sz="900" dirty="0"/>
           </a:p>
@@ -6569,7 +6569,7 @@
       </p:sp>
       <p:pic>
         <p:nvPicPr>
-          <p:cNvPr id="32" name="Image 1" descr="/private/tmp/claude-501/-Users-sakamoto-04---------ClaudeCode-GitHub-PowerBI-LithoBooster-DashBoard/1d2ed9c0-fbf9-4130-80df-0e37d1e3ada0/scratchpad/charts/p2_rms.png">    </p:cNvPr>
+          <p:cNvPr id="32" name="Image 1" descr="/private/tmp/claude-501/-Users-sakamoto-04---------ClaudeCode-GitHub-PowerBI-LithoBooster-DashBoard/1d2ed9c0-fbf9-4130-80df-0e37d1e3ada0/scratchpad/charts/p3_heatxy.png">    </p:cNvPr>
           <p:cNvPicPr>
             <a:picLocks noChangeAspect="1"/>
           </p:cNvPicPr>
@@ -6582,8 +6582,8 @@
         </p:blipFill>
         <p:spPr>
           <a:xfrm>
-            <a:off x="5330952" y="1207008"/>
-            <a:ext cx="3099816" cy="2450592"/>
+            <a:off x="5102352" y="1207008"/>
+            <a:ext cx="3739896" cy="2450592"/>
           </a:xfrm>
           <a:prstGeom prst="rect">
             <a:avLst/>
@@ -6598,8 +6598,8 @@
         </p:nvSpPr>
         <p:spPr>
           <a:xfrm>
-            <a:off x="8595360" y="914400"/>
-            <a:ext cx="3246120" cy="2834640"/>
+            <a:off x="9006840" y="914400"/>
+            <a:ext cx="2834640" cy="2834640"/>
           </a:xfrm>
           <a:prstGeom prst="rect">
             <a:avLst/>
@@ -6623,8 +6623,8 @@
         </p:nvSpPr>
         <p:spPr>
           <a:xfrm>
-            <a:off x="8668512" y="950976"/>
-            <a:ext cx="3099816" cy="237744"/>
+            <a:off x="9079992" y="950976"/>
+            <a:ext cx="2688336" cy="237744"/>
           </a:xfrm>
           <a:prstGeom prst="rect">
             <a:avLst/>
@@ -6648,7 +6648,7 @@
                 <a:ea typeface="Meiryo" pitchFamily="34" charset="-122"/>
                 <a:cs typeface="Meiryo" pitchFamily="34" charset="-120"/>
               </a:rPr>
-              <a:t>V-22｜面内共分散楕円マップ（Wafer間ばらつき）</a:t>
+              <a:t>V-22｜面内共分散楕円マップ</a:t>
             </a:r>
             <a:endParaRPr lang="en-US" sz="900" dirty="0"/>
           </a:p>
@@ -6669,8 +6669,8 @@
         </p:blipFill>
         <p:spPr>
           <a:xfrm>
-            <a:off x="8668512" y="1207008"/>
-            <a:ext cx="3099816" cy="2450592"/>
+            <a:off x="9079992" y="1207008"/>
+            <a:ext cx="2688336" cy="2450592"/>
           </a:xfrm>
           <a:prstGeom prst="rect">
             <a:avLst/>
@@ -6686,7 +6686,7 @@
         <p:spPr>
           <a:xfrm>
             <a:off x="1920240" y="3840480"/>
-            <a:ext cx="4297680" cy="2606040"/>
+            <a:ext cx="3017520" cy="2606040"/>
           </a:xfrm>
           <a:prstGeom prst="rect">
             <a:avLst/>
@@ -6711,7 +6711,7 @@
         <p:spPr>
           <a:xfrm>
             <a:off x="1993392" y="3877056"/>
-            <a:ext cx="4151376" cy="237744"/>
+            <a:ext cx="2871216" cy="237744"/>
           </a:xfrm>
           <a:prstGeom prst="rect">
             <a:avLst/>
@@ -6735,7 +6735,7 @@
                 <a:ea typeface="Meiryo" pitchFamily="34" charset="-122"/>
                 <a:cs typeface="Meiryo" pitchFamily="34" charset="-120"/>
               </a:rPr>
-              <a:t>V-16｜補正前（想定）/ 補正後（実測）の切替</a:t>
+              <a:t>V-26｜補正前Shot配列（SEPA+SAMEから逆算）</a:t>
             </a:r>
             <a:endParaRPr lang="en-US" sz="900" dirty="0"/>
           </a:p>
@@ -6743,7 +6743,7 @@
       </p:sp>
       <p:pic>
         <p:nvPicPr>
-          <p:cNvPr id="38" name="Image 3" descr="/private/tmp/claude-501/-Users-sakamoto-04---------ClaudeCode-GitHub-PowerBI-LithoBooster-DashBoard/1d2ed9c0-fbf9-4130-80df-0e37d1e3ada0/scratchpad/charts/p3_prepost.png">    </p:cNvPr>
+          <p:cNvPr id="38" name="Image 3" descr="/private/tmp/claude-501/-Users-sakamoto-04---------ClaudeCode-GitHub-PowerBI-LithoBooster-DashBoard/1d2ed9c0-fbf9-4130-80df-0e37d1e3ada0/scratchpad/charts/p3_shotarray.png">    </p:cNvPr>
           <p:cNvPicPr>
             <a:picLocks noChangeAspect="1"/>
           </p:cNvPicPr>
@@ -6757,7 +6757,7 @@
         <p:spPr>
           <a:xfrm>
             <a:off x="1993392" y="4133088"/>
-            <a:ext cx="4151376" cy="2221992"/>
+            <a:ext cx="2871216" cy="2221992"/>
           </a:xfrm>
           <a:prstGeom prst="rect">
             <a:avLst/>
@@ -6772,8 +6772,8 @@
         </p:nvSpPr>
         <p:spPr>
           <a:xfrm>
-            <a:off x="6309360" y="3840480"/>
-            <a:ext cx="2926080" cy="2606040"/>
+            <a:off x="5029200" y="3840480"/>
+            <a:ext cx="6812280" cy="2606040"/>
           </a:xfrm>
           <a:prstGeom prst="rect">
             <a:avLst/>
@@ -6797,8 +6797,8 @@
         </p:nvSpPr>
         <p:spPr>
           <a:xfrm>
-            <a:off x="6382512" y="3877056"/>
-            <a:ext cx="2779776" cy="237744"/>
+            <a:off x="5102352" y="3877056"/>
+            <a:ext cx="6665976" cy="237744"/>
           </a:xfrm>
           <a:prstGeom prst="rect">
             <a:avLst/>
@@ -6822,7 +6822,7 @@
                 <a:ea typeface="Meiryo" pitchFamily="34" charset="-122"/>
                 <a:cs typeface="Meiryo" pitchFamily="34" charset="-120"/>
               </a:rPr>
-              <a:t>V-03｜Shot補正量（SEPA / SAME）</a:t>
+              <a:t>V-03｜Shotごとの補正値6種（SEPA / SAME別）</a:t>
             </a:r>
             <a:endParaRPr lang="en-US" sz="900" dirty="0"/>
           </a:p>
@@ -6830,7 +6830,7 @@
       </p:sp>
       <p:pic>
         <p:nvPicPr>
-          <p:cNvPr id="41" name="Image 4" descr="/private/tmp/claude-501/-Users-sakamoto-04---------ClaudeCode-GitHub-PowerBI-LithoBooster-DashBoard/1d2ed9c0-fbf9-4130-80df-0e37d1e3ada0/scratchpad/charts/p3_bar.png">    </p:cNvPr>
+          <p:cNvPr id="41" name="Image 4" descr="/private/tmp/claude-501/-Users-sakamoto-04---------ClaudeCode-GitHub-PowerBI-LithoBooster-DashBoard/1d2ed9c0-fbf9-4130-80df-0e37d1e3ada0/scratchpad/charts/p3_corr6.png">    </p:cNvPr>
           <p:cNvPicPr>
             <a:picLocks noChangeAspect="1"/>
           </p:cNvPicPr>
@@ -6843,8 +6843,8 @@
         </p:blipFill>
         <p:spPr>
           <a:xfrm>
-            <a:off x="6382512" y="4133088"/>
-            <a:ext cx="2779776" cy="2221992"/>
+            <a:off x="5102352" y="4133088"/>
+            <a:ext cx="6665976" cy="2221992"/>
           </a:xfrm>
           <a:prstGeom prst="rect">
             <a:avLst/>
@@ -6853,94 +6853,7 @@
       </p:pic>
       <p:sp>
         <p:nvSpPr>
-          <p:cNvPr id="42" name="Shape 35"/>
-          <p:cNvSpPr/>
-          <p:nvPr/>
-        </p:nvSpPr>
-        <p:spPr>
-          <a:xfrm>
-            <a:off x="9326880" y="3840480"/>
-            <a:ext cx="2514600" cy="2606040"/>
-          </a:xfrm>
-          <a:prstGeom prst="rect">
-            <a:avLst/>
-          </a:prstGeom>
-          <a:solidFill>
-            <a:srgbClr val="FFFFFF"/>
-          </a:solidFill>
-          <a:ln w="12700">
-            <a:solidFill>
-              <a:srgbClr val="D5DAE5"/>
-            </a:solidFill>
-            <a:prstDash val="solid"/>
-          </a:ln>
-        </p:spPr>
-      </p:sp>
-      <p:sp>
-        <p:nvSpPr>
-          <p:cNvPr id="43" name="Text 36"/>
-          <p:cNvSpPr/>
-          <p:nvPr/>
-        </p:nvSpPr>
-        <p:spPr>
-          <a:xfrm>
-            <a:off x="9400032" y="3877056"/>
-            <a:ext cx="2368296" cy="237744"/>
-          </a:xfrm>
-          <a:prstGeom prst="rect">
-            <a:avLst/>
-          </a:prstGeom>
-          <a:noFill/>
-          <a:ln/>
-        </p:spPr>
-        <p:txBody>
-          <a:bodyPr wrap="square" lIns="0" tIns="0" rIns="0" bIns="0" rtlCol="0" anchor="ctr"/>
-          <a:lstStyle/>
-          <a:p>
-            <a:pPr indent="0" marL="0">
-              <a:buNone/>
-            </a:pPr>
-            <a:r>
-              <a:rPr lang="en-US" sz="900" b="1" dirty="0">
-                <a:solidFill>
-                  <a:srgbClr val="1E2761"/>
-                </a:solidFill>
-                <a:latin typeface="Meiryo" pitchFamily="34" charset="0"/>
-                <a:ea typeface="Meiryo" pitchFamily="34" charset="-122"/>
-                <a:cs typeface="Meiryo" pitchFamily="34" charset="-120"/>
-              </a:rPr>
-              <a:t>V-17｜補正効果（前後RMS）</a:t>
-            </a:r>
-            <a:endParaRPr lang="en-US" sz="900" dirty="0"/>
-          </a:p>
-        </p:txBody>
-      </p:sp>
-      <p:pic>
-        <p:nvPicPr>
-          <p:cNvPr id="44" name="Image 5" descr="/private/tmp/claude-501/-Users-sakamoto-04---------ClaudeCode-GitHub-PowerBI-LithoBooster-DashBoard/1d2ed9c0-fbf9-4130-80df-0e37d1e3ada0/scratchpad/charts/p3_effect.png">    </p:cNvPr>
-          <p:cNvPicPr>
-            <a:picLocks noChangeAspect="1"/>
-          </p:cNvPicPr>
-          <p:nvPr/>
-        </p:nvPicPr>
-        <p:blipFill>
-          <a:blip r:embed="rId6"/>
-          <a:srcRect l="0" r="0" t="0" b="0"/>
-          <a:stretch/>
-        </p:blipFill>
-        <p:spPr>
-          <a:xfrm>
-            <a:off x="9400032" y="4133088"/>
-            <a:ext cx="2368296" cy="2221992"/>
-          </a:xfrm>
-          <a:prstGeom prst="rect">
-            <a:avLst/>
-          </a:prstGeom>
-        </p:spPr>
-      </p:pic>
-      <p:sp>
-        <p:nvSpPr>
-          <p:cNvPr id="45" name="Text 37"/>
+          <p:cNvPr id="42" name="Text 35"/>
           <p:cNvSpPr/>
           <p:nvPr/>
         </p:nvSpPr>
@@ -8649,7 +8562,7 @@
                 <a:ea typeface="Meiryo" pitchFamily="34" charset="-122"/>
                 <a:cs typeface="Meiryo" pitchFamily="34" charset="-120"/>
               </a:rPr>
-              <a:t>V-02｜線形成分の号機別分布（比較軸切替）</a:t>
+              <a:t>V-02｜補正量X/Yの箱ひげ（OPERATION別）</a:t>
             </a:r>
             <a:endParaRPr lang="en-US" sz="900" dirty="0"/>
           </a:p>
@@ -9025,7 +8938,7 @@
                 <a:ea typeface="Meiryo" pitchFamily="34" charset="-122"/>
                 <a:cs typeface="Meiryo" pitchFamily="34" charset="-120"/>
               </a:rPr>
-              <a:t>平均ベクトル場 俯瞰（Nikon）</a:t>
+              <a:t>補正前Shot配列 俯瞰（Nikon）</a:t>
             </a:r>
             <a:endParaRPr lang="en-US" sz="2200" dirty="0"/>
           </a:p>
@@ -9064,7 +8977,7 @@
                 <a:ea typeface="Meiryo" pitchFamily="34" charset="-122"/>
                 <a:cs typeface="Meiryo" pitchFamily="34" charset="-120"/>
               </a:rPr>
-              <a:t>補正点の平均ベクトルを装置×OPERATIONで比較（V-24）</a:t>
+              <a:t>Shotごとの補正量から補正前の配列を逆算（V-18）</a:t>
             </a:r>
             <a:endParaRPr lang="en-US" sz="950" dirty="0"/>
           </a:p>
@@ -9908,7 +9821,7 @@
                 <a:ea typeface="Meiryo" pitchFamily="34" charset="-122"/>
                 <a:cs typeface="Meiryo" pitchFamily="34" charset="-120"/>
               </a:rPr>
-              <a:t>V-24｜平均補正ベクトル場（装置別 × OPERATION別の小マルチ、Shot枠つき）</a:t>
+              <a:t>V-18｜補正前Shot配列（CORRDATAから逆算、誇張表示）</a:t>
             </a:r>
             <a:endParaRPr lang="en-US" sz="900" dirty="0"/>
           </a:p>
@@ -9916,7 +9829,7 @@
       </p:sp>
       <p:pic>
         <p:nvPicPr>
-          <p:cNvPr id="26" name="Image 0" descr="/private/tmp/claude-501/-Users-sakamoto-04---------ClaudeCode-GitHub-PowerBI-LithoBooster-DashBoard/1d2ed9c0-fbf9-4130-80df-0e37d1e3ada0/scratchpad/charts/p5_meanfield.png">    </p:cNvPr>
+          <p:cNvPr id="26" name="Image 0" descr="/private/tmp/claude-501/-Users-sakamoto-04---------ClaudeCode-GitHub-PowerBI-LithoBooster-DashBoard/1d2ed9c0-fbf9-4130-80df-0e37d1e3ada0/scratchpad/charts/p5_shotarray.png">    </p:cNvPr>
           <p:cNvPicPr>
             <a:picLocks noChangeAspect="1"/>
           </p:cNvPicPr>
@@ -10038,7 +9951,7 @@
                 <a:ea typeface="Meiryo" pitchFamily="34" charset="-122"/>
                 <a:cs typeface="Meiryo" pitchFamily="34" charset="-120"/>
               </a:rPr>
-              <a:t>CORRDATA_OFSETX/Yの平均ベクトルを補正点位置ごとに表示</a:t>
+              <a:t>Shotごとの補正量（CORRDATA）から補正前のShot配列を逆算</a:t>
             </a:r>
             <a:endParaRPr lang="en-US" sz="950" dirty="0"/>
           </a:p>
@@ -10059,7 +9972,7 @@
                 <a:ea typeface="Meiryo" pitchFamily="34" charset="-122"/>
                 <a:cs typeface="Meiryo" pitchFamily="34" charset="-120"/>
               </a:rPr>
-              <a:t>装置×OPERATIONごとの補正傾向を俯瞰比較</a:t>
+              <a:t>取得データ全体の平均から再構成（灰=公称格子 / 赤=補正前）</a:t>
             </a:r>
             <a:endParaRPr lang="en-US" sz="950" dirty="0"/>
           </a:p>
@@ -10080,7 +9993,7 @@
                 <a:ea typeface="Meiryo" pitchFamily="34" charset="-122"/>
                 <a:cs typeface="Meiryo" pitchFamily="34" charset="-120"/>
               </a:rPr>
-              <a:t>気になるマスを右クリック → P6 詳細分析へドリルスルー</a:t>
+              <a:t>気になる装置・Lotを選択 → P6 詳細分析へドリルスルー</a:t>
             </a:r>
             <a:endParaRPr lang="en-US" sz="950" dirty="0"/>
           </a:p>
@@ -10187,7 +10100,7 @@
                 <a:ea typeface="Meiryo" pitchFamily="34" charset="-122"/>
                 <a:cs typeface="Meiryo" pitchFamily="34" charset="-120"/>
               </a:rPr>
-              <a:t>Shot枠とWafer外周円（150mm）を描画</a:t>
+              <a:t>歪みは誇張表示（倍率は調整可能）</a:t>
             </a:r>
             <a:endParaRPr lang="en-US" sz="950" dirty="0"/>
           </a:p>
@@ -10208,7 +10121,28 @@
                 <a:ea typeface="Meiryo" pitchFamily="34" charset="-122"/>
                 <a:cs typeface="Meiryo" pitchFamily="34" charset="-120"/>
               </a:rPr>
-              <a:t>表示成分（OFSET / SCAL / ROT）は切替可能</a:t>
+              <a:t>Shot枠とWafer外周円（150mm）を描画</a:t>
+            </a:r>
+            <a:endParaRPr lang="en-US" sz="950" dirty="0"/>
+          </a:p>
+          <a:p>
+            <a:pPr marL="101600" indent="-101600">
+              <a:lnSpc>
+                <a:spcPct val="145000"/>
+              </a:lnSpc>
+              <a:buSzPct val="100000"/>
+              <a:buChar char="•"/>
+            </a:pPr>
+            <a:r>
+              <a:rPr lang="en-US" sz="950" dirty="0">
+                <a:solidFill>
+                  <a:srgbClr val="2B2B2B"/>
+                </a:solidFill>
+                <a:latin typeface="Meiryo" pitchFamily="34" charset="0"/>
+                <a:ea typeface="Meiryo" pitchFamily="34" charset="-122"/>
+                <a:cs typeface="Meiryo" pitchFamily="34" charset="-120"/>
+              </a:rPr>
+              <a:t>逆算式の符号規約は要確認 → I-009</a:t>
             </a:r>
             <a:endParaRPr lang="en-US" sz="950" dirty="0"/>
           </a:p>
@@ -11414,7 +11348,7 @@
                 <a:ea typeface="Meiryo" pitchFamily="34" charset="-122"/>
                 <a:cs typeface="Meiryo" pitchFamily="34" charset="-120"/>
               </a:rPr>
-              <a:t>V-18｜補正前想定マップ（線形+CORRDATA再構成）</a:t>
+              <a:t>V-18｜補正前Shot配列（Wafer単位、誇張表示）</a:t>
             </a:r>
             <a:endParaRPr lang="en-US" sz="900" dirty="0"/>
           </a:p>
@@ -11422,7 +11356,7 @@
       </p:sp>
       <p:pic>
         <p:nvPicPr>
-          <p:cNvPr id="32" name="Image 1" descr="/private/tmp/claude-501/-Users-sakamoto-04---------ClaudeCode-GitHub-PowerBI-LithoBooster-DashBoard/1d2ed9c0-fbf9-4130-80df-0e37d1e3ada0/scratchpad/charts/p5_pre.png">    </p:cNvPr>
+          <p:cNvPr id="32" name="Image 1" descr="/private/tmp/claude-501/-Users-sakamoto-04---------ClaudeCode-GitHub-PowerBI-LithoBooster-DashBoard/1d2ed9c0-fbf9-4130-80df-0e37d1e3ada0/scratchpad/charts/p6_shotarray.png">    </p:cNvPr>
           <p:cNvPicPr>
             <a:picLocks noChangeAspect="1"/>
           </p:cNvPicPr>
@@ -11759,7 +11693,7 @@
                 <a:ea typeface="Meiryo" pitchFamily="34" charset="-122"/>
                 <a:cs typeface="Meiryo" pitchFamily="34" charset="-120"/>
               </a:rPr>
-              <a:t>V-18の再構成式（CORRDATA適用の符号）は装置エンジニアに確認 → I-009</a:t>
+              <a:t>補正前Shot配列の逆算式（符号規約）は装置エンジニアに確認 → I-009</a:t>
             </a:r>
             <a:endParaRPr lang="en-US" sz="950" dirty="0"/>
           </a:p>
@@ -11897,7 +11831,7 @@
                 <a:ea typeface="Meiryo" pitchFamily="34" charset="-122"/>
                 <a:cs typeface="Meiryo" pitchFamily="34" charset="-120"/>
               </a:rPr>
-              <a:t>Shotスタック分析</a:t>
+              <a:t>Shotスタック分析（Canon計測値X/Y）</a:t>
             </a:r>
             <a:endParaRPr lang="en-US" sz="2200" dirty="0"/>
           </a:p>
@@ -11936,7 +11870,7 @@
                 <a:ea typeface="Meiryo" pitchFamily="34" charset="-122"/>
                 <a:cs typeface="Meiryo" pitchFamily="34" charset="-120"/>
               </a:rPr>
-              <a:t>全ShotをShot座標系に重ねてShot内の系統傾向を把握（V-19/21/23）</a:t>
+              <a:t>全ShotをShot座標系に重ねてShot内の系統傾向を把握（V-19/23/21）</a:t>
             </a:r>
             <a:endParaRPr lang="en-US" sz="950" dirty="0"/>
           </a:p>
@@ -12954,7 +12888,7 @@
                 <a:ea typeface="Meiryo" pitchFamily="34" charset="-122"/>
                 <a:cs typeface="Meiryo" pitchFamily="34" charset="-120"/>
               </a:rPr>
-              <a:t>V-21｜Shot成分の再構成（倍率+回転）</a:t>
+              <a:t>V-21｜計測値X/YのMark位置別分布</a:t>
             </a:r>
             <a:endParaRPr lang="en-US" sz="900" dirty="0"/>
           </a:p>
@@ -12962,7 +12896,7 @@
       </p:sp>
       <p:pic>
         <p:nvPicPr>
-          <p:cNvPr id="32" name="Image 2" descr="/private/tmp/claude-501/-Users-sakamoto-04---------ClaudeCode-GitHub-PowerBI-LithoBooster-DashBoard/1d2ed9c0-fbf9-4130-80df-0e37d1e3ada0/scratchpad/charts/p6_shotcomp.png">    </p:cNvPr>
+          <p:cNvPr id="32" name="Image 2" descr="/private/tmp/claude-501/-Users-sakamoto-04---------ClaudeCode-GitHub-PowerBI-LithoBooster-DashBoard/1d2ed9c0-fbf9-4130-80df-0e37d1e3ada0/scratchpad/charts/p7_box.png">    </p:cNvPr>
           <p:cNvPicPr>
             <a:picLocks noChangeAspect="1"/>
           </p:cNvPicPr>
@@ -13084,7 +13018,7 @@
                 <a:ea typeface="Meiryo" pitchFamily="34" charset="-122"/>
                 <a:cs typeface="Meiryo" pitchFamily="34" charset="-120"/>
               </a:rPr>
-              <a:t>スタック: 全Shot・全WaferのMark残差をShot中心原点の座標系に重ね、Mark位置ごとに集計（Wafer平均を差し引き）</a:t>
+              <a:t>対象はCanonビューの計測値X/Y。全Shot・全WaferのMark計測値をShot中心原点の座標系に重ね、Mark位置ごとに集計（Wafer平均を差し引き）</a:t>
             </a:r>
             <a:endParaRPr lang="en-US" sz="950" dirty="0"/>
           </a:p>

--- a/dashboard_mockup.pptx
+++ b/dashboard_mockup.pptx
@@ -5511,7 +5511,7 @@
                 <a:ea typeface="Meiryo" pitchFamily="34" charset="-122"/>
                 <a:cs typeface="Meiryo" pitchFamily="34" charset="-120"/>
               </a:rPr>
-              <a:t>特定Lot・Waferに絞って詳細確認（V-11/25/22/26/03）</a:t>
+              <a:t>特定Lot・Waferに絞って詳細確認（V-11/25/27/22/26/03）</a:t>
             </a:r>
             <a:endParaRPr lang="en-US" sz="950" dirty="0"/>
           </a:p>
@@ -6425,7 +6425,7 @@
         <p:spPr>
           <a:xfrm>
             <a:off x="1920240" y="914400"/>
-            <a:ext cx="3017520" cy="2834640"/>
+            <a:ext cx="2834640" cy="2834640"/>
           </a:xfrm>
           <a:prstGeom prst="rect">
             <a:avLst/>
@@ -6450,7 +6450,7 @@
         <p:spPr>
           <a:xfrm>
             <a:off x="1993392" y="950976"/>
-            <a:ext cx="2871216" cy="237744"/>
+            <a:ext cx="2688336" cy="237744"/>
           </a:xfrm>
           <a:prstGeom prst="rect">
             <a:avLst/>
@@ -6496,7 +6496,7 @@
         <p:spPr>
           <a:xfrm>
             <a:off x="1993392" y="1207008"/>
-            <a:ext cx="2871216" cy="2450592"/>
+            <a:ext cx="2688336" cy="2450592"/>
           </a:xfrm>
           <a:prstGeom prst="rect">
             <a:avLst/>
@@ -6511,8 +6511,8 @@
         </p:nvSpPr>
         <p:spPr>
           <a:xfrm>
-            <a:off x="5029200" y="914400"/>
-            <a:ext cx="3886200" cy="2834640"/>
+            <a:off x="4846320" y="914400"/>
+            <a:ext cx="3794760" cy="2834640"/>
           </a:xfrm>
           <a:prstGeom prst="rect">
             <a:avLst/>
@@ -6536,8 +6536,8 @@
         </p:nvSpPr>
         <p:spPr>
           <a:xfrm>
-            <a:off x="5102352" y="950976"/>
-            <a:ext cx="3739896" cy="237744"/>
+            <a:off x="4919472" y="950976"/>
+            <a:ext cx="3648456" cy="237744"/>
           </a:xfrm>
           <a:prstGeom prst="rect">
             <a:avLst/>
@@ -6582,8 +6582,8 @@
         </p:blipFill>
         <p:spPr>
           <a:xfrm>
-            <a:off x="5102352" y="1207008"/>
-            <a:ext cx="3739896" cy="2450592"/>
+            <a:off x="4919472" y="1207008"/>
+            <a:ext cx="3648456" cy="2450592"/>
           </a:xfrm>
           <a:prstGeom prst="rect">
             <a:avLst/>
@@ -6598,8 +6598,8 @@
         </p:nvSpPr>
         <p:spPr>
           <a:xfrm>
-            <a:off x="9006840" y="914400"/>
-            <a:ext cx="2834640" cy="2834640"/>
+            <a:off x="8732520" y="914400"/>
+            <a:ext cx="3108960" cy="2834640"/>
           </a:xfrm>
           <a:prstGeom prst="rect">
             <a:avLst/>
@@ -6623,8 +6623,8 @@
         </p:nvSpPr>
         <p:spPr>
           <a:xfrm>
-            <a:off x="9079992" y="950976"/>
-            <a:ext cx="2688336" cy="237744"/>
+            <a:off x="8805672" y="950976"/>
+            <a:ext cx="2962656" cy="237744"/>
           </a:xfrm>
           <a:prstGeom prst="rect">
             <a:avLst/>
@@ -6648,7 +6648,7 @@
                 <a:ea typeface="Meiryo" pitchFamily="34" charset="-122"/>
                 <a:cs typeface="Meiryo" pitchFamily="34" charset="-120"/>
               </a:rPr>
-              <a:t>V-22｜面内共分散楕円マップ</a:t>
+              <a:t>V-27｜計測値ベクトル長ヒートマップ</a:t>
             </a:r>
             <a:endParaRPr lang="en-US" sz="900" dirty="0"/>
           </a:p>
@@ -6656,7 +6656,7 @@
       </p:sp>
       <p:pic>
         <p:nvPicPr>
-          <p:cNvPr id="35" name="Image 2" descr="/private/tmp/claude-501/-Users-sakamoto-04---------ClaudeCode-GitHub-PowerBI-LithoBooster-DashBoard/1d2ed9c0-fbf9-4130-80df-0e37d1e3ada0/scratchpad/charts/p2_ellipse.png">    </p:cNvPr>
+          <p:cNvPr id="35" name="Image 2" descr="/private/tmp/claude-501/-Users-sakamoto-04---------ClaudeCode-GitHub-PowerBI-LithoBooster-DashBoard/1d2ed9c0-fbf9-4130-80df-0e37d1e3ada0/scratchpad/charts/p3_heatmag.png">    </p:cNvPr>
           <p:cNvPicPr>
             <a:picLocks noChangeAspect="1"/>
           </p:cNvPicPr>
@@ -6669,8 +6669,8 @@
         </p:blipFill>
         <p:spPr>
           <a:xfrm>
-            <a:off x="9079992" y="1207008"/>
-            <a:ext cx="2688336" cy="2450592"/>
+            <a:off x="8805672" y="1207008"/>
+            <a:ext cx="2962656" cy="2450592"/>
           </a:xfrm>
           <a:prstGeom prst="rect">
             <a:avLst/>
@@ -6686,7 +6686,7 @@
         <p:spPr>
           <a:xfrm>
             <a:off x="1920240" y="3840480"/>
-            <a:ext cx="3017520" cy="2606040"/>
+            <a:ext cx="2651760" cy="2606040"/>
           </a:xfrm>
           <a:prstGeom prst="rect">
             <a:avLst/>
@@ -6711,7 +6711,7 @@
         <p:spPr>
           <a:xfrm>
             <a:off x="1993392" y="3877056"/>
-            <a:ext cx="2871216" cy="237744"/>
+            <a:ext cx="2505456" cy="237744"/>
           </a:xfrm>
           <a:prstGeom prst="rect">
             <a:avLst/>
@@ -6735,7 +6735,7 @@
                 <a:ea typeface="Meiryo" pitchFamily="34" charset="-122"/>
                 <a:cs typeface="Meiryo" pitchFamily="34" charset="-120"/>
               </a:rPr>
-              <a:t>V-26｜補正前Shot配列（SEPA+SAMEから逆算）</a:t>
+              <a:t>V-22｜面内共分散楕円マップ</a:t>
             </a:r>
             <a:endParaRPr lang="en-US" sz="900" dirty="0"/>
           </a:p>
@@ -6743,7 +6743,7 @@
       </p:sp>
       <p:pic>
         <p:nvPicPr>
-          <p:cNvPr id="38" name="Image 3" descr="/private/tmp/claude-501/-Users-sakamoto-04---------ClaudeCode-GitHub-PowerBI-LithoBooster-DashBoard/1d2ed9c0-fbf9-4130-80df-0e37d1e3ada0/scratchpad/charts/p3_shotarray.png">    </p:cNvPr>
+          <p:cNvPr id="38" name="Image 3" descr="/private/tmp/claude-501/-Users-sakamoto-04---------ClaudeCode-GitHub-PowerBI-LithoBooster-DashBoard/1d2ed9c0-fbf9-4130-80df-0e37d1e3ada0/scratchpad/charts/p2_ellipse.png">    </p:cNvPr>
           <p:cNvPicPr>
             <a:picLocks noChangeAspect="1"/>
           </p:cNvPicPr>
@@ -6757,7 +6757,7 @@
         <p:spPr>
           <a:xfrm>
             <a:off x="1993392" y="4133088"/>
-            <a:ext cx="2871216" cy="2221992"/>
+            <a:ext cx="2505456" cy="2221992"/>
           </a:xfrm>
           <a:prstGeom prst="rect">
             <a:avLst/>
@@ -6772,8 +6772,8 @@
         </p:nvSpPr>
         <p:spPr>
           <a:xfrm>
-            <a:off x="5029200" y="3840480"/>
-            <a:ext cx="6812280" cy="2606040"/>
+            <a:off x="4663440" y="3840480"/>
+            <a:ext cx="2651760" cy="2606040"/>
           </a:xfrm>
           <a:prstGeom prst="rect">
             <a:avLst/>
@@ -6797,8 +6797,8 @@
         </p:nvSpPr>
         <p:spPr>
           <a:xfrm>
-            <a:off x="5102352" y="3877056"/>
-            <a:ext cx="6665976" cy="237744"/>
+            <a:off x="4736592" y="3877056"/>
+            <a:ext cx="2505456" cy="237744"/>
           </a:xfrm>
           <a:prstGeom prst="rect">
             <a:avLst/>
@@ -6822,7 +6822,7 @@
                 <a:ea typeface="Meiryo" pitchFamily="34" charset="-122"/>
                 <a:cs typeface="Meiryo" pitchFamily="34" charset="-120"/>
               </a:rPr>
-              <a:t>V-03｜Shotごとの補正値6種（SEPA / SAME別）</a:t>
+              <a:t>V-26｜補正前Shot配列（SEPA+SAME逆算）</a:t>
             </a:r>
             <a:endParaRPr lang="en-US" sz="900" dirty="0"/>
           </a:p>
@@ -6830,7 +6830,7 @@
       </p:sp>
       <p:pic>
         <p:nvPicPr>
-          <p:cNvPr id="41" name="Image 4" descr="/private/tmp/claude-501/-Users-sakamoto-04---------ClaudeCode-GitHub-PowerBI-LithoBooster-DashBoard/1d2ed9c0-fbf9-4130-80df-0e37d1e3ada0/scratchpad/charts/p3_corr6.png">    </p:cNvPr>
+          <p:cNvPr id="41" name="Image 4" descr="/private/tmp/claude-501/-Users-sakamoto-04---------ClaudeCode-GitHub-PowerBI-LithoBooster-DashBoard/1d2ed9c0-fbf9-4130-80df-0e37d1e3ada0/scratchpad/charts/p3_shotarray.png">    </p:cNvPr>
           <p:cNvPicPr>
             <a:picLocks noChangeAspect="1"/>
           </p:cNvPicPr>
@@ -6843,8 +6843,8 @@
         </p:blipFill>
         <p:spPr>
           <a:xfrm>
-            <a:off x="5102352" y="4133088"/>
-            <a:ext cx="6665976" cy="2221992"/>
+            <a:off x="4736592" y="4133088"/>
+            <a:ext cx="2505456" cy="2221992"/>
           </a:xfrm>
           <a:prstGeom prst="rect">
             <a:avLst/>
@@ -6853,7 +6853,94 @@
       </p:pic>
       <p:sp>
         <p:nvSpPr>
-          <p:cNvPr id="42" name="Text 35"/>
+          <p:cNvPr id="42" name="Shape 35"/>
+          <p:cNvSpPr/>
+          <p:nvPr/>
+        </p:nvSpPr>
+        <p:spPr>
+          <a:xfrm>
+            <a:off x="7406640" y="3840480"/>
+            <a:ext cx="4434840" cy="2606040"/>
+          </a:xfrm>
+          <a:prstGeom prst="rect">
+            <a:avLst/>
+          </a:prstGeom>
+          <a:solidFill>
+            <a:srgbClr val="FFFFFF"/>
+          </a:solidFill>
+          <a:ln w="12700">
+            <a:solidFill>
+              <a:srgbClr val="D5DAE5"/>
+            </a:solidFill>
+            <a:prstDash val="solid"/>
+          </a:ln>
+        </p:spPr>
+      </p:sp>
+      <p:sp>
+        <p:nvSpPr>
+          <p:cNvPr id="43" name="Text 36"/>
+          <p:cNvSpPr/>
+          <p:nvPr/>
+        </p:nvSpPr>
+        <p:spPr>
+          <a:xfrm>
+            <a:off x="7479792" y="3877056"/>
+            <a:ext cx="4288536" cy="237744"/>
+          </a:xfrm>
+          <a:prstGeom prst="rect">
+            <a:avLst/>
+          </a:prstGeom>
+          <a:noFill/>
+          <a:ln/>
+        </p:spPr>
+        <p:txBody>
+          <a:bodyPr wrap="square" lIns="0" tIns="0" rIns="0" bIns="0" rtlCol="0" anchor="ctr"/>
+          <a:lstStyle/>
+          <a:p>
+            <a:pPr indent="0" marL="0">
+              <a:buNone/>
+            </a:pPr>
+            <a:r>
+              <a:rPr lang="en-US" sz="900" b="1" dirty="0">
+                <a:solidFill>
+                  <a:srgbClr val="1E2761"/>
+                </a:solidFill>
+                <a:latin typeface="Meiryo" pitchFamily="34" charset="0"/>
+                <a:ea typeface="Meiryo" pitchFamily="34" charset="-122"/>
+                <a:cs typeface="Meiryo" pitchFamily="34" charset="-120"/>
+              </a:rPr>
+              <a:t>V-03｜Shotごとの補正値6種（SEPA / SAME別）</a:t>
+            </a:r>
+            <a:endParaRPr lang="en-US" sz="900" dirty="0"/>
+          </a:p>
+        </p:txBody>
+      </p:sp>
+      <p:pic>
+        <p:nvPicPr>
+          <p:cNvPr id="44" name="Image 5" descr="/private/tmp/claude-501/-Users-sakamoto-04---------ClaudeCode-GitHub-PowerBI-LithoBooster-DashBoard/1d2ed9c0-fbf9-4130-80df-0e37d1e3ada0/scratchpad/charts/p3_corr6.png">    </p:cNvPr>
+          <p:cNvPicPr>
+            <a:picLocks noChangeAspect="1"/>
+          </p:cNvPicPr>
+          <p:nvPr/>
+        </p:nvPicPr>
+        <p:blipFill>
+          <a:blip r:embed="rId6"/>
+          <a:srcRect l="0" r="0" t="0" b="0"/>
+          <a:stretch/>
+        </p:blipFill>
+        <p:spPr>
+          <a:xfrm>
+            <a:off x="7479792" y="4133088"/>
+            <a:ext cx="4288536" cy="2221992"/>
+          </a:xfrm>
+          <a:prstGeom prst="rect">
+            <a:avLst/>
+          </a:prstGeom>
+        </p:spPr>
+      </p:pic>
+      <p:sp>
+        <p:nvSpPr>
+          <p:cNvPr id="45" name="Text 37"/>
           <p:cNvSpPr/>
           <p:nvPr/>
         </p:nvSpPr>
@@ -9821,7 +9908,7 @@
                 <a:ea typeface="Meiryo" pitchFamily="34" charset="-122"/>
                 <a:cs typeface="Meiryo" pitchFamily="34" charset="-120"/>
               </a:rPr>
-              <a:t>V-18｜補正前Shot配列（CORRDATAから逆算、誇張表示）</a:t>
+              <a:t>V-18｜補正前Shot配列（装置別 × OPERATION別の小マルチ、誇張表示）</a:t>
             </a:r>
             <a:endParaRPr lang="en-US" sz="900" dirty="0"/>
           </a:p>
@@ -9972,7 +10059,7 @@
                 <a:ea typeface="Meiryo" pitchFamily="34" charset="-122"/>
                 <a:cs typeface="Meiryo" pitchFamily="34" charset="-120"/>
               </a:rPr>
-              <a:t>取得データ全体の平均から再構成（灰=公称格子 / 赤=補正前）</a:t>
+              <a:t>装置×OPERATIONごとに平均から再構成（灰=公称 / 赤=補正前）</a:t>
             </a:r>
             <a:endParaRPr lang="en-US" sz="950" dirty="0"/>
           </a:p>
@@ -10298,7 +10385,7 @@
                 <a:ea typeface="Meiryo" pitchFamily="34" charset="-122"/>
                 <a:cs typeface="Meiryo" pitchFamily="34" charset="-120"/>
               </a:rPr>
-              <a:t>特定Lot・Waferに絞って詳細確認（V-14/18/21）</a:t>
+              <a:t>特定Lot・Waferに絞って詳細確認（V-14/18/28）</a:t>
             </a:r>
             <a:endParaRPr lang="en-US" sz="950" dirty="0"/>
           </a:p>
@@ -11435,7 +11522,7 @@
                 <a:ea typeface="Meiryo" pitchFamily="34" charset="-122"/>
                 <a:cs typeface="Meiryo" pitchFamily="34" charset="-120"/>
               </a:rPr>
-              <a:t>V-21｜SHOTFAC係数の大きさ比較</a:t>
+              <a:t>V-28｜Shot補正成分（線形 + 高次SHOTFAC）</a:t>
             </a:r>
             <a:endParaRPr lang="en-US" sz="900" dirty="0"/>
           </a:p>
@@ -11443,7 +11530,7 @@
       </p:sp>
       <p:pic>
         <p:nvPicPr>
-          <p:cNvPr id="35" name="Image 2" descr="/private/tmp/claude-501/-Users-sakamoto-04---------ClaudeCode-GitHub-PowerBI-LithoBooster-DashBoard/1d2ed9c0-fbf9-4130-80df-0e37d1e3ada0/scratchpad/charts/p5_fac.png">    </p:cNvPr>
+          <p:cNvPr id="35" name="Image 2" descr="/private/tmp/claude-501/-Users-sakamoto-04---------ClaudeCode-GitHub-PowerBI-LithoBooster-DashBoard/1d2ed9c0-fbf9-4130-80df-0e37d1e3ada0/scratchpad/charts/p6_linfac.png">    </p:cNvPr>
           <p:cNvPicPr>
             <a:picLocks noChangeAspect="1"/>
           </p:cNvPicPr>
@@ -11870,7 +11957,7 @@
                 <a:ea typeface="Meiryo" pitchFamily="34" charset="-122"/>
                 <a:cs typeface="Meiryo" pitchFamily="34" charset="-120"/>
               </a:rPr>
-              <a:t>全ShotをShot座標系に重ねてShot内の系統傾向を把握（V-19/23/21）</a:t>
+              <a:t>全ShotをShot座標系に重ねてShot内の系統傾向を把握（V-19/23/21/29）</a:t>
             </a:r>
             <a:endParaRPr lang="en-US" sz="950" dirty="0"/>
           </a:p>
@@ -12665,7 +12752,7 @@
         <p:spPr>
           <a:xfrm>
             <a:off x="1920240" y="914400"/>
-            <a:ext cx="3200400" cy="3657600"/>
+            <a:ext cx="3017520" cy="3657600"/>
           </a:xfrm>
           <a:prstGeom prst="rect">
             <a:avLst/>
@@ -12690,7 +12777,7 @@
         <p:spPr>
           <a:xfrm>
             <a:off x="1993392" y="950976"/>
-            <a:ext cx="3054096" cy="237744"/>
+            <a:ext cx="2871216" cy="237744"/>
           </a:xfrm>
           <a:prstGeom prst="rect">
             <a:avLst/>
@@ -12736,7 +12823,7 @@
         <p:spPr>
           <a:xfrm>
             <a:off x="1993392" y="1207008"/>
-            <a:ext cx="3054096" cy="3273552"/>
+            <a:ext cx="2871216" cy="3273552"/>
           </a:xfrm>
           <a:prstGeom prst="rect">
             <a:avLst/>
@@ -12751,8 +12838,8 @@
         </p:nvSpPr>
         <p:spPr>
           <a:xfrm>
-            <a:off x="5212080" y="914400"/>
-            <a:ext cx="3520440" cy="3657600"/>
+            <a:off x="5029200" y="914400"/>
+            <a:ext cx="3291840" cy="3657600"/>
           </a:xfrm>
           <a:prstGeom prst="rect">
             <a:avLst/>
@@ -12776,8 +12863,8 @@
         </p:nvSpPr>
         <p:spPr>
           <a:xfrm>
-            <a:off x="5285232" y="950976"/>
-            <a:ext cx="3374136" cy="237744"/>
+            <a:off x="5102352" y="950976"/>
+            <a:ext cx="3145536" cy="237744"/>
           </a:xfrm>
           <a:prstGeom prst="rect">
             <a:avLst/>
@@ -12822,8 +12909,8 @@
         </p:blipFill>
         <p:spPr>
           <a:xfrm>
-            <a:off x="5285232" y="1207008"/>
-            <a:ext cx="3374136" cy="3273552"/>
+            <a:off x="5102352" y="1207008"/>
+            <a:ext cx="3145536" cy="3273552"/>
           </a:xfrm>
           <a:prstGeom prst="rect">
             <a:avLst/>
@@ -12838,8 +12925,8 @@
         </p:nvSpPr>
         <p:spPr>
           <a:xfrm>
-            <a:off x="8823960" y="914400"/>
-            <a:ext cx="3017520" cy="3657600"/>
+            <a:off x="8412480" y="914400"/>
+            <a:ext cx="3429000" cy="3657600"/>
           </a:xfrm>
           <a:prstGeom prst="rect">
             <a:avLst/>
@@ -12863,8 +12950,8 @@
         </p:nvSpPr>
         <p:spPr>
           <a:xfrm>
-            <a:off x="8897112" y="950976"/>
-            <a:ext cx="2871216" cy="237744"/>
+            <a:off x="8485632" y="950976"/>
+            <a:ext cx="3282696" cy="237744"/>
           </a:xfrm>
           <a:prstGeom prst="rect">
             <a:avLst/>
@@ -12909,8 +12996,8 @@
         </p:blipFill>
         <p:spPr>
           <a:xfrm>
-            <a:off x="8897112" y="1207008"/>
-            <a:ext cx="2871216" cy="3273552"/>
+            <a:off x="8485632" y="1207008"/>
+            <a:ext cx="3282696" cy="3273552"/>
           </a:xfrm>
           <a:prstGeom prst="rect">
             <a:avLst/>
@@ -12926,7 +13013,94 @@
         <p:spPr>
           <a:xfrm>
             <a:off x="1920240" y="4709160"/>
-            <a:ext cx="9921240" cy="1737360"/>
+            <a:ext cx="3749040" cy="1737360"/>
+          </a:xfrm>
+          <a:prstGeom prst="rect">
+            <a:avLst/>
+          </a:prstGeom>
+          <a:solidFill>
+            <a:srgbClr val="FFFFFF"/>
+          </a:solidFill>
+          <a:ln w="12700">
+            <a:solidFill>
+              <a:srgbClr val="D5DAE5"/>
+            </a:solidFill>
+            <a:prstDash val="solid"/>
+          </a:ln>
+        </p:spPr>
+      </p:sp>
+      <p:sp>
+        <p:nvSpPr>
+          <p:cNvPr id="34" name="Text 29"/>
+          <p:cNvSpPr/>
+          <p:nvPr/>
+        </p:nvSpPr>
+        <p:spPr>
+          <a:xfrm>
+            <a:off x="1993392" y="4745736"/>
+            <a:ext cx="3602736" cy="237744"/>
+          </a:xfrm>
+          <a:prstGeom prst="rect">
+            <a:avLst/>
+          </a:prstGeom>
+          <a:noFill/>
+          <a:ln/>
+        </p:spPr>
+        <p:txBody>
+          <a:bodyPr wrap="square" lIns="0" tIns="0" rIns="0" bIns="0" rtlCol="0" anchor="ctr"/>
+          <a:lstStyle/>
+          <a:p>
+            <a:pPr indent="0" marL="0">
+              <a:buNone/>
+            </a:pPr>
+            <a:r>
+              <a:rPr lang="en-US" sz="900" b="1" dirty="0">
+                <a:solidFill>
+                  <a:srgbClr val="1E2761"/>
+                </a:solidFill>
+                <a:latin typeface="Meiryo" pitchFamily="34" charset="0"/>
+                <a:ea typeface="Meiryo" pitchFamily="34" charset="-122"/>
+                <a:cs typeface="Meiryo" pitchFamily="34" charset="-120"/>
+              </a:rPr>
+              <a:t>V-29｜Scan方向ごとの計測値X/Y分布</a:t>
+            </a:r>
+            <a:endParaRPr lang="en-US" sz="900" dirty="0"/>
+          </a:p>
+        </p:txBody>
+      </p:sp>
+      <p:pic>
+        <p:nvPicPr>
+          <p:cNvPr id="35" name="Image 3" descr="/private/tmp/claude-501/-Users-sakamoto-04---------ClaudeCode-GitHub-PowerBI-LithoBooster-DashBoard/1d2ed9c0-fbf9-4130-80df-0e37d1e3ada0/scratchpad/charts/p7_dirbox.png">    </p:cNvPr>
+          <p:cNvPicPr>
+            <a:picLocks noChangeAspect="1"/>
+          </p:cNvPicPr>
+          <p:nvPr/>
+        </p:nvPicPr>
+        <p:blipFill>
+          <a:blip r:embed="rId4"/>
+          <a:srcRect l="0" r="0" t="0" b="0"/>
+          <a:stretch/>
+        </p:blipFill>
+        <p:spPr>
+          <a:xfrm>
+            <a:off x="1993392" y="5001768"/>
+            <a:ext cx="3602736" cy="1353312"/>
+          </a:xfrm>
+          <a:prstGeom prst="rect">
+            <a:avLst/>
+          </a:prstGeom>
+        </p:spPr>
+      </p:pic>
+      <p:sp>
+        <p:nvSpPr>
+          <p:cNvPr id="36" name="Shape 30"/>
+          <p:cNvSpPr/>
+          <p:nvPr/>
+        </p:nvSpPr>
+        <p:spPr>
+          <a:xfrm>
+            <a:off x="5760720" y="4709160"/>
+            <a:ext cx="6080760" cy="1737360"/>
           </a:xfrm>
           <a:prstGeom prst="rect">
             <a:avLst/>
@@ -12944,14 +13118,14 @@
       </p:sp>
       <p:sp>
         <p:nvSpPr>
-          <p:cNvPr id="34" name="Text 29"/>
-          <p:cNvSpPr/>
-          <p:nvPr/>
-        </p:nvSpPr>
-        <p:spPr>
-          <a:xfrm>
-            <a:off x="2011680" y="4754880"/>
-            <a:ext cx="9738360" cy="237744"/>
+          <p:cNvPr id="37" name="Text 31"/>
+          <p:cNvSpPr/>
+          <p:nvPr/>
+        </p:nvSpPr>
+        <p:spPr>
+          <a:xfrm>
+            <a:off x="5852160" y="4754880"/>
+            <a:ext cx="5897880" cy="237744"/>
           </a:xfrm>
           <a:prstGeom prst="rect">
             <a:avLst/>
@@ -12983,14 +13157,14 @@
       </p:sp>
       <p:sp>
         <p:nvSpPr>
-          <p:cNvPr id="35" name="Text 30"/>
-          <p:cNvSpPr/>
-          <p:nvPr/>
-        </p:nvSpPr>
-        <p:spPr>
-          <a:xfrm>
-            <a:off x="2057400" y="5020056"/>
-            <a:ext cx="9646920" cy="1353312"/>
+          <p:cNvPr id="38" name="Text 32"/>
+          <p:cNvSpPr/>
+          <p:nvPr/>
+        </p:nvSpPr>
+        <p:spPr>
+          <a:xfrm>
+            <a:off x="5897880" y="5020056"/>
+            <a:ext cx="5806440" cy="1353312"/>
           </a:xfrm>
           <a:prstGeom prst="rect">
             <a:avLst/>
@@ -13068,7 +13242,7 @@
       </p:sp>
       <p:sp>
         <p:nvSpPr>
-          <p:cNvPr id="36" name="Text 31"/>
+          <p:cNvPr id="39" name="Text 33"/>
           <p:cNvSpPr/>
           <p:nvPr/>
         </p:nvSpPr>

--- a/dashboard_mockup.pptx
+++ b/dashboard_mockup.pptx
@@ -3301,7 +3301,7 @@
               <a:buNone/>
             </a:pPr>
             <a:r>
-              <a:rPr lang="en-US" sz="2100" b="1" dirty="0">
+              <a:rPr lang="en-US" sz="1600" b="1" dirty="0">
                 <a:solidFill>
                   <a:srgbClr val="1E2761"/>
                 </a:solidFill>
@@ -3309,9 +3309,9 @@
                 <a:ea typeface="Meiryo" pitchFamily="34" charset="-122"/>
                 <a:cs typeface="Meiryo" pitchFamily="34" charset="-120"/>
               </a:rPr>
-              <a:t>16.8 nm</a:t>
-            </a:r>
-            <a:endParaRPr lang="en-US" sz="2100" dirty="0"/>
+              <a:t>1.2 ± 145.3 nm</a:t>
+            </a:r>
+            <a:endParaRPr lang="en-US" sz="1600" dirty="0"/>
           </a:p>
         </p:txBody>
       </p:sp>
@@ -3348,7 +3348,7 @@
                 <a:ea typeface="Meiryo" pitchFamily="34" charset="-122"/>
                 <a:cs typeface="Meiryo" pitchFamily="34" charset="-120"/>
               </a:rPr>
-              <a:t>残差RMS X（期間内）</a:t>
+              <a:t>計測値X 平均±3σ</a:t>
             </a:r>
             <a:pPr indent="0" marL="0">
               <a:buNone/>
@@ -3409,7 +3409,7 @@
               <a:buNone/>
             </a:pPr>
             <a:r>
-              <a:rPr lang="en-US" sz="2100" b="1" dirty="0">
+              <a:rPr lang="en-US" sz="1600" b="1" dirty="0">
                 <a:solidFill>
                   <a:srgbClr val="1E2761"/>
                 </a:solidFill>
@@ -3417,9 +3417,9 @@
                 <a:ea typeface="Meiryo" pitchFamily="34" charset="-122"/>
                 <a:cs typeface="Meiryo" pitchFamily="34" charset="-120"/>
               </a:rPr>
-              <a:t>15.2 nm</a:t>
-            </a:r>
-            <a:endParaRPr lang="en-US" sz="2100" dirty="0"/>
+              <a:t>0.8 ± 139.4 nm</a:t>
+            </a:r>
+            <a:endParaRPr lang="en-US" sz="1600" dirty="0"/>
           </a:p>
         </p:txBody>
       </p:sp>
@@ -3456,7 +3456,7 @@
                 <a:ea typeface="Meiryo" pitchFamily="34" charset="-122"/>
                 <a:cs typeface="Meiryo" pitchFamily="34" charset="-120"/>
               </a:rPr>
-              <a:t>残差RMS Y（期間内）</a:t>
+              <a:t>計測値Y 平均±3σ</a:t>
             </a:r>
             <a:pPr indent="0" marL="0">
               <a:buNone/>
@@ -3517,7 +3517,7 @@
               <a:buNone/>
             </a:pPr>
             <a:r>
-              <a:rPr lang="en-US" sz="2100" b="1" dirty="0">
+              <a:rPr lang="en-US" sz="1600" b="1" dirty="0">
                 <a:solidFill>
                   <a:srgbClr val="1E2761"/>
                 </a:solidFill>
@@ -3527,7 +3527,7 @@
               </a:rPr>
               <a:t>26.3 %</a:t>
             </a:r>
-            <a:endParaRPr lang="en-US" sz="2100" dirty="0"/>
+            <a:endParaRPr lang="en-US" sz="1600" dirty="0"/>
           </a:p>
         </p:txBody>
       </p:sp>
@@ -3636,7 +3636,7 @@
               <a:buNone/>
             </a:pPr>
             <a:r>
-              <a:rPr lang="en-US" sz="2100" b="1" dirty="0">
+              <a:rPr lang="en-US" sz="1600" b="1" dirty="0">
                 <a:solidFill>
                   <a:srgbClr val="1E2761"/>
                 </a:solidFill>
@@ -3646,7 +3646,7 @@
               </a:rPr>
               <a:t>94 枚</a:t>
             </a:r>
-            <a:endParaRPr lang="en-US" sz="2100" dirty="0"/>
+            <a:endParaRPr lang="en-US" sz="1600" dirty="0"/>
           </a:p>
         </p:txBody>
       </p:sp>
@@ -6425,7 +6425,7 @@
         <p:spPr>
           <a:xfrm>
             <a:off x="1920240" y="914400"/>
-            <a:ext cx="2834640" cy="2834640"/>
+            <a:ext cx="2331720" cy="2834640"/>
           </a:xfrm>
           <a:prstGeom prst="rect">
             <a:avLst/>
@@ -6450,7 +6450,7 @@
         <p:spPr>
           <a:xfrm>
             <a:off x="1993392" y="950976"/>
-            <a:ext cx="2688336" cy="237744"/>
+            <a:ext cx="2185416" cy="237744"/>
           </a:xfrm>
           <a:prstGeom prst="rect">
             <a:avLst/>
@@ -6496,7 +6496,7 @@
         <p:spPr>
           <a:xfrm>
             <a:off x="1993392" y="1207008"/>
-            <a:ext cx="2688336" cy="2450592"/>
+            <a:ext cx="2185416" cy="2450592"/>
           </a:xfrm>
           <a:prstGeom prst="rect">
             <a:avLst/>
@@ -6511,8 +6511,8 @@
         </p:nvSpPr>
         <p:spPr>
           <a:xfrm>
-            <a:off x="4846320" y="914400"/>
-            <a:ext cx="3794760" cy="2834640"/>
+            <a:off x="4343400" y="914400"/>
+            <a:ext cx="3200400" cy="2834640"/>
           </a:xfrm>
           <a:prstGeom prst="rect">
             <a:avLst/>
@@ -6536,8 +6536,8 @@
         </p:nvSpPr>
         <p:spPr>
           <a:xfrm>
-            <a:off x="4919472" y="950976"/>
-            <a:ext cx="3648456" cy="237744"/>
+            <a:off x="4416552" y="950976"/>
+            <a:ext cx="3054096" cy="237744"/>
           </a:xfrm>
           <a:prstGeom prst="rect">
             <a:avLst/>
@@ -6582,8 +6582,8 @@
         </p:blipFill>
         <p:spPr>
           <a:xfrm>
-            <a:off x="4919472" y="1207008"/>
-            <a:ext cx="3648456" cy="2450592"/>
+            <a:off x="4416552" y="1207008"/>
+            <a:ext cx="3054096" cy="2450592"/>
           </a:xfrm>
           <a:prstGeom prst="rect">
             <a:avLst/>
@@ -6598,8 +6598,8 @@
         </p:nvSpPr>
         <p:spPr>
           <a:xfrm>
-            <a:off x="8732520" y="914400"/>
-            <a:ext cx="3108960" cy="2834640"/>
+            <a:off x="7635240" y="914400"/>
+            <a:ext cx="2194560" cy="2834640"/>
           </a:xfrm>
           <a:prstGeom prst="rect">
             <a:avLst/>
@@ -6623,8 +6623,8 @@
         </p:nvSpPr>
         <p:spPr>
           <a:xfrm>
-            <a:off x="8805672" y="950976"/>
-            <a:ext cx="2962656" cy="237744"/>
+            <a:off x="7708392" y="950976"/>
+            <a:ext cx="2048256" cy="237744"/>
           </a:xfrm>
           <a:prstGeom prst="rect">
             <a:avLst/>
@@ -6669,8 +6669,8 @@
         </p:blipFill>
         <p:spPr>
           <a:xfrm>
-            <a:off x="8805672" y="1207008"/>
-            <a:ext cx="2962656" cy="2450592"/>
+            <a:off x="7708392" y="1207008"/>
+            <a:ext cx="2048256" cy="2450592"/>
           </a:xfrm>
           <a:prstGeom prst="rect">
             <a:avLst/>
@@ -6685,8 +6685,8 @@
         </p:nvSpPr>
         <p:spPr>
           <a:xfrm>
-            <a:off x="1920240" y="3840480"/>
-            <a:ext cx="2651760" cy="2606040"/>
+            <a:off x="9921240" y="914400"/>
+            <a:ext cx="1920240" cy="2834640"/>
           </a:xfrm>
           <a:prstGeom prst="rect">
             <a:avLst/>
@@ -6710,8 +6710,8 @@
         </p:nvSpPr>
         <p:spPr>
           <a:xfrm>
-            <a:off x="1993392" y="3877056"/>
-            <a:ext cx="2505456" cy="237744"/>
+            <a:off x="9994392" y="950976"/>
+            <a:ext cx="1773936" cy="237744"/>
           </a:xfrm>
           <a:prstGeom prst="rect">
             <a:avLst/>
@@ -6756,8 +6756,8 @@
         </p:blipFill>
         <p:spPr>
           <a:xfrm>
-            <a:off x="1993392" y="4133088"/>
-            <a:ext cx="2505456" cy="2221992"/>
+            <a:off x="9994392" y="1207008"/>
+            <a:ext cx="1773936" cy="2450592"/>
           </a:xfrm>
           <a:prstGeom prst="rect">
             <a:avLst/>
@@ -6772,8 +6772,8 @@
         </p:nvSpPr>
         <p:spPr>
           <a:xfrm>
-            <a:off x="4663440" y="3840480"/>
-            <a:ext cx="2651760" cy="2606040"/>
+            <a:off x="1920240" y="3840480"/>
+            <a:ext cx="2743200" cy="2606040"/>
           </a:xfrm>
           <a:prstGeom prst="rect">
             <a:avLst/>
@@ -6797,8 +6797,8 @@
         </p:nvSpPr>
         <p:spPr>
           <a:xfrm>
-            <a:off x="4736592" y="3877056"/>
-            <a:ext cx="2505456" cy="237744"/>
+            <a:off x="1993392" y="3877056"/>
+            <a:ext cx="2596896" cy="237744"/>
           </a:xfrm>
           <a:prstGeom prst="rect">
             <a:avLst/>
@@ -6843,8 +6843,8 @@
         </p:blipFill>
         <p:spPr>
           <a:xfrm>
-            <a:off x="4736592" y="4133088"/>
-            <a:ext cx="2505456" cy="2221992"/>
+            <a:off x="1993392" y="4133088"/>
+            <a:ext cx="2596896" cy="2221992"/>
           </a:xfrm>
           <a:prstGeom prst="rect">
             <a:avLst/>
@@ -6859,8 +6859,8 @@
         </p:nvSpPr>
         <p:spPr>
           <a:xfrm>
-            <a:off x="7406640" y="3840480"/>
-            <a:ext cx="4434840" cy="2606040"/>
+            <a:off x="4754880" y="3840480"/>
+            <a:ext cx="7086600" cy="2606040"/>
           </a:xfrm>
           <a:prstGeom prst="rect">
             <a:avLst/>
@@ -6884,8 +6884,8 @@
         </p:nvSpPr>
         <p:spPr>
           <a:xfrm>
-            <a:off x="7479792" y="3877056"/>
-            <a:ext cx="4288536" cy="237744"/>
+            <a:off x="4828032" y="3877056"/>
+            <a:ext cx="6940296" cy="237744"/>
           </a:xfrm>
           <a:prstGeom prst="rect">
             <a:avLst/>
@@ -6930,8 +6930,8 @@
         </p:blipFill>
         <p:spPr>
           <a:xfrm>
-            <a:off x="7479792" y="4133088"/>
-            <a:ext cx="4288536" cy="2221992"/>
+            <a:off x="4828032" y="4133088"/>
+            <a:ext cx="6940296" cy="2221992"/>
           </a:xfrm>
           <a:prstGeom prst="rect">
             <a:avLst/>
@@ -7926,7 +7926,7 @@
               <a:buNone/>
             </a:pPr>
             <a:r>
-              <a:rPr lang="en-US" sz="1600" b="1" dirty="0">
+              <a:rPr lang="en-US" sz="1150" b="1" dirty="0">
                 <a:solidFill>
                   <a:srgbClr val="1E2761"/>
                 </a:solidFill>
@@ -7934,9 +7934,9 @@
                 <a:ea typeface="Meiryo" pitchFamily="34" charset="-122"/>
                 <a:cs typeface="Meiryo" pitchFamily="34" charset="-120"/>
               </a:rPr>
-              <a:t>14.9 nm</a:t>
-            </a:r>
-            <a:endParaRPr lang="en-US" sz="1600" dirty="0"/>
+              <a:t>2.1 ± 44.6 nm</a:t>
+            </a:r>
+            <a:endParaRPr lang="en-US" sz="1150" dirty="0"/>
           </a:p>
         </p:txBody>
       </p:sp>
@@ -7973,7 +7973,7 @@
                 <a:ea typeface="Meiryo" pitchFamily="34" charset="-122"/>
                 <a:cs typeface="Meiryo" pitchFamily="34" charset="-120"/>
               </a:rPr>
-              <a:t>OFSETX RMS</a:t>
+              <a:t>OFSETX 平均±3σ</a:t>
             </a:r>
             <a:endParaRPr lang="en-US" sz="800" dirty="0"/>
           </a:p>
@@ -8031,7 +8031,7 @@
               <a:buNone/>
             </a:pPr>
             <a:r>
-              <a:rPr lang="en-US" sz="1600" b="1" dirty="0">
+              <a:rPr lang="en-US" sz="1150" b="1" dirty="0">
                 <a:solidFill>
                   <a:srgbClr val="1E2761"/>
                 </a:solidFill>
@@ -8039,9 +8039,9 @@
                 <a:ea typeface="Meiryo" pitchFamily="34" charset="-122"/>
                 <a:cs typeface="Meiryo" pitchFamily="34" charset="-120"/>
               </a:rPr>
-              <a:t>13.6 nm</a:t>
-            </a:r>
-            <a:endParaRPr lang="en-US" sz="1600" dirty="0"/>
+              <a:t>-1.4 ± 41.2 nm</a:t>
+            </a:r>
+            <a:endParaRPr lang="en-US" sz="1150" dirty="0"/>
           </a:p>
         </p:txBody>
       </p:sp>
@@ -8078,7 +8078,7 @@
                 <a:ea typeface="Meiryo" pitchFamily="34" charset="-122"/>
                 <a:cs typeface="Meiryo" pitchFamily="34" charset="-120"/>
               </a:rPr>
-              <a:t>OFSETY RMS</a:t>
+              <a:t>OFSETY 平均±3σ</a:t>
             </a:r>
             <a:endParaRPr lang="en-US" sz="800" dirty="0"/>
           </a:p>
@@ -8136,7 +8136,7 @@
               <a:buNone/>
             </a:pPr>
             <a:r>
-              <a:rPr lang="en-US" sz="1600" b="1" dirty="0">
+              <a:rPr lang="en-US" sz="1150" b="1" dirty="0">
                 <a:solidFill>
                   <a:srgbClr val="1E2761"/>
                 </a:solidFill>
@@ -8144,9 +8144,9 @@
                 <a:ea typeface="Meiryo" pitchFamily="34" charset="-122"/>
                 <a:cs typeface="Meiryo" pitchFamily="34" charset="-120"/>
               </a:rPr>
-              <a:t>0.48 ppm</a:t>
-            </a:r>
-            <a:endParaRPr lang="en-US" sz="1600" dirty="0"/>
+              <a:t>0.05 ± 1.52 ppm</a:t>
+            </a:r>
+            <a:endParaRPr lang="en-US" sz="1150" dirty="0"/>
           </a:p>
         </p:txBody>
       </p:sp>
@@ -8183,7 +8183,7 @@
                 <a:ea typeface="Meiryo" pitchFamily="34" charset="-122"/>
                 <a:cs typeface="Meiryo" pitchFamily="34" charset="-120"/>
               </a:rPr>
-              <a:t>SCALX 平均</a:t>
+              <a:t>SCALX 平均±3σ</a:t>
             </a:r>
             <a:endParaRPr lang="en-US" sz="800" dirty="0"/>
           </a:p>
@@ -8241,7 +8241,7 @@
               <a:buNone/>
             </a:pPr>
             <a:r>
-              <a:rPr lang="en-US" sz="1600" b="1" dirty="0">
+              <a:rPr lang="en-US" sz="1150" b="1" dirty="0">
                 <a:solidFill>
                   <a:srgbClr val="1E2761"/>
                 </a:solidFill>
@@ -8249,9 +8249,9 @@
                 <a:ea typeface="Meiryo" pitchFamily="34" charset="-122"/>
                 <a:cs typeface="Meiryo" pitchFamily="34" charset="-120"/>
               </a:rPr>
-              <a:t>0.41 ppm</a:t>
-            </a:r>
-            <a:endParaRPr lang="en-US" sz="1600" dirty="0"/>
+              <a:t>0.02 ± 1.48 ppm</a:t>
+            </a:r>
+            <a:endParaRPr lang="en-US" sz="1150" dirty="0"/>
           </a:p>
         </p:txBody>
       </p:sp>
@@ -8288,7 +8288,7 @@
                 <a:ea typeface="Meiryo" pitchFamily="34" charset="-122"/>
                 <a:cs typeface="Meiryo" pitchFamily="34" charset="-120"/>
               </a:rPr>
-              <a:t>SCALY 平均</a:t>
+              <a:t>SCALY 平均±3σ</a:t>
             </a:r>
             <a:endParaRPr lang="en-US" sz="800" dirty="0"/>
           </a:p>
@@ -8346,7 +8346,7 @@
               <a:buNone/>
             </a:pPr>
             <a:r>
-              <a:rPr lang="en-US" sz="1600" b="1" dirty="0">
+              <a:rPr lang="en-US" sz="1150" b="1" dirty="0">
                 <a:solidFill>
                   <a:srgbClr val="1E2761"/>
                 </a:solidFill>
@@ -8354,9 +8354,9 @@
                 <a:ea typeface="Meiryo" pitchFamily="34" charset="-122"/>
                 <a:cs typeface="Meiryo" pitchFamily="34" charset="-120"/>
               </a:rPr>
-              <a:t>0.52 µrad</a:t>
-            </a:r>
-            <a:endParaRPr lang="en-US" sz="1600" dirty="0"/>
+              <a:t>0.03 ± 1.61 µrad</a:t>
+            </a:r>
+            <a:endParaRPr lang="en-US" sz="1150" dirty="0"/>
           </a:p>
         </p:txBody>
       </p:sp>
@@ -8393,7 +8393,7 @@
                 <a:ea typeface="Meiryo" pitchFamily="34" charset="-122"/>
                 <a:cs typeface="Meiryo" pitchFamily="34" charset="-120"/>
               </a:rPr>
-              <a:t>ROTX 平均</a:t>
+              <a:t>ROTX 平均±3σ</a:t>
             </a:r>
             <a:endParaRPr lang="en-US" sz="800" dirty="0"/>
           </a:p>
@@ -8451,7 +8451,7 @@
               <a:buNone/>
             </a:pPr>
             <a:r>
-              <a:rPr lang="en-US" sz="1600" b="1" dirty="0">
+              <a:rPr lang="en-US" sz="1150" b="1" dirty="0">
                 <a:solidFill>
                   <a:srgbClr val="1E2761"/>
                 </a:solidFill>
@@ -8459,9 +8459,9 @@
                 <a:ea typeface="Meiryo" pitchFamily="34" charset="-122"/>
                 <a:cs typeface="Meiryo" pitchFamily="34" charset="-120"/>
               </a:rPr>
-              <a:t>0.47 µrad</a:t>
-            </a:r>
-            <a:endParaRPr lang="en-US" sz="1600" dirty="0"/>
+              <a:t>-0.01 ± 1.55 µrad</a:t>
+            </a:r>
+            <a:endParaRPr lang="en-US" sz="1150" dirty="0"/>
           </a:p>
         </p:txBody>
       </p:sp>
@@ -8498,7 +8498,7 @@
                 <a:ea typeface="Meiryo" pitchFamily="34" charset="-122"/>
                 <a:cs typeface="Meiryo" pitchFamily="34" charset="-120"/>
               </a:rPr>
-              <a:t>ROTY 平均</a:t>
+              <a:t>ROTY 平均±3σ</a:t>
             </a:r>
             <a:endParaRPr lang="en-US" sz="800" dirty="0"/>
           </a:p>
@@ -11522,7 +11522,7 @@
                 <a:ea typeface="Meiryo" pitchFamily="34" charset="-122"/>
                 <a:cs typeface="Meiryo" pitchFamily="34" charset="-120"/>
               </a:rPr>
-              <a:t>V-28｜Shot補正成分（線形 + 高次SHOTFAC）</a:t>
+              <a:t>V-28｜Shot補正成分（線形 + 高次SHOTFACを1つに統合）</a:t>
             </a:r>
             <a:endParaRPr lang="en-US" sz="900" dirty="0"/>
           </a:p>
@@ -12752,7 +12752,7 @@
         <p:spPr>
           <a:xfrm>
             <a:off x="1920240" y="914400"/>
-            <a:ext cx="3017520" cy="3657600"/>
+            <a:ext cx="6583680" cy="2697480"/>
           </a:xfrm>
           <a:prstGeom prst="rect">
             <a:avLst/>
@@ -12777,7 +12777,7 @@
         <p:spPr>
           <a:xfrm>
             <a:off x="1993392" y="950976"/>
-            <a:ext cx="2871216" cy="237744"/>
+            <a:ext cx="6437376" cy="237744"/>
           </a:xfrm>
           <a:prstGeom prst="rect">
             <a:avLst/>
@@ -12801,7 +12801,7 @@
                 <a:ea typeface="Meiryo" pitchFamily="34" charset="-122"/>
                 <a:cs typeface="Meiryo" pitchFamily="34" charset="-120"/>
               </a:rPr>
-              <a:t>V-19｜スタック平均ベクトル（Shot内の指紋）</a:t>
+              <a:t>V-19｜スタック平均ベクトル（Scan方向ごと）</a:t>
             </a:r>
             <a:endParaRPr lang="en-US" sz="900" dirty="0"/>
           </a:p>
@@ -12809,7 +12809,7 @@
       </p:sp>
       <p:pic>
         <p:nvPicPr>
-          <p:cNvPr id="26" name="Image 0" descr="/private/tmp/claude-501/-Users-sakamoto-04---------ClaudeCode-GitHub-PowerBI-LithoBooster-DashBoard/1d2ed9c0-fbf9-4130-80df-0e37d1e3ada0/scratchpad/charts/p6_stack.png">    </p:cNvPr>
+          <p:cNvPr id="26" name="Image 0" descr="/private/tmp/claude-501/-Users-sakamoto-04---------ClaudeCode-GitHub-PowerBI-LithoBooster-DashBoard/1d2ed9c0-fbf9-4130-80df-0e37d1e3ada0/scratchpad/charts/p7_stack_dir.png">    </p:cNvPr>
           <p:cNvPicPr>
             <a:picLocks noChangeAspect="1"/>
           </p:cNvPicPr>
@@ -12823,7 +12823,7 @@
         <p:spPr>
           <a:xfrm>
             <a:off x="1993392" y="1207008"/>
-            <a:ext cx="2871216" cy="3273552"/>
+            <a:ext cx="6437376" cy="2313432"/>
           </a:xfrm>
           <a:prstGeom prst="rect">
             <a:avLst/>
@@ -12838,8 +12838,8 @@
         </p:nvSpPr>
         <p:spPr>
           <a:xfrm>
-            <a:off x="5029200" y="914400"/>
-            <a:ext cx="3291840" cy="3657600"/>
+            <a:off x="1920240" y="3703320"/>
+            <a:ext cx="6583680" cy="2697480"/>
           </a:xfrm>
           <a:prstGeom prst="rect">
             <a:avLst/>
@@ -12863,8 +12863,8 @@
         </p:nvSpPr>
         <p:spPr>
           <a:xfrm>
-            <a:off x="5102352" y="950976"/>
-            <a:ext cx="3145536" cy="237744"/>
+            <a:off x="1993392" y="3739896"/>
+            <a:ext cx="6437376" cy="237744"/>
           </a:xfrm>
           <a:prstGeom prst="rect">
             <a:avLst/>
@@ -12888,7 +12888,7 @@
                 <a:ea typeface="Meiryo" pitchFamily="34" charset="-122"/>
                 <a:cs typeface="Meiryo" pitchFamily="34" charset="-120"/>
               </a:rPr>
-              <a:t>V-23｜Mark位置ごとの共分散楕円</a:t>
+              <a:t>V-23｜Mark位置ごとの共分散楕円（Scan方向ごと）</a:t>
             </a:r>
             <a:endParaRPr lang="en-US" sz="900" dirty="0"/>
           </a:p>
@@ -12896,7 +12896,7 @@
       </p:sp>
       <p:pic>
         <p:nvPicPr>
-          <p:cNvPr id="29" name="Image 1" descr="/private/tmp/claude-501/-Users-sakamoto-04---------ClaudeCode-GitHub-PowerBI-LithoBooster-DashBoard/1d2ed9c0-fbf9-4130-80df-0e37d1e3ada0/scratchpad/charts/p6_ellipse.png">    </p:cNvPr>
+          <p:cNvPr id="29" name="Image 1" descr="/private/tmp/claude-501/-Users-sakamoto-04---------ClaudeCode-GitHub-PowerBI-LithoBooster-DashBoard/1d2ed9c0-fbf9-4130-80df-0e37d1e3ada0/scratchpad/charts/p7_ellipse_dir.png">    </p:cNvPr>
           <p:cNvPicPr>
             <a:picLocks noChangeAspect="1"/>
           </p:cNvPicPr>
@@ -12909,8 +12909,8 @@
         </p:blipFill>
         <p:spPr>
           <a:xfrm>
-            <a:off x="5102352" y="1207008"/>
-            <a:ext cx="3145536" cy="3273552"/>
+            <a:off x="1993392" y="3995928"/>
+            <a:ext cx="6437376" cy="2313432"/>
           </a:xfrm>
           <a:prstGeom prst="rect">
             <a:avLst/>
@@ -12925,8 +12925,8 @@
         </p:nvSpPr>
         <p:spPr>
           <a:xfrm>
-            <a:off x="8412480" y="914400"/>
-            <a:ext cx="3429000" cy="3657600"/>
+            <a:off x="8595360" y="914400"/>
+            <a:ext cx="3246120" cy="2697480"/>
           </a:xfrm>
           <a:prstGeom prst="rect">
             <a:avLst/>
@@ -12950,8 +12950,8 @@
         </p:nvSpPr>
         <p:spPr>
           <a:xfrm>
-            <a:off x="8485632" y="950976"/>
-            <a:ext cx="3282696" cy="237744"/>
+            <a:off x="8668512" y="950976"/>
+            <a:ext cx="3099816" cy="237744"/>
           </a:xfrm>
           <a:prstGeom prst="rect">
             <a:avLst/>
@@ -12996,8 +12996,8 @@
         </p:blipFill>
         <p:spPr>
           <a:xfrm>
-            <a:off x="8485632" y="1207008"/>
-            <a:ext cx="3282696" cy="3273552"/>
+            <a:off x="8668512" y="1207008"/>
+            <a:ext cx="3099816" cy="2313432"/>
           </a:xfrm>
           <a:prstGeom prst="rect">
             <a:avLst/>
@@ -13012,8 +13012,8 @@
         </p:nvSpPr>
         <p:spPr>
           <a:xfrm>
-            <a:off x="1920240" y="4709160"/>
-            <a:ext cx="3749040" cy="1737360"/>
+            <a:off x="8595360" y="3703320"/>
+            <a:ext cx="3246120" cy="2697480"/>
           </a:xfrm>
           <a:prstGeom prst="rect">
             <a:avLst/>
@@ -13037,8 +13037,8 @@
         </p:nvSpPr>
         <p:spPr>
           <a:xfrm>
-            <a:off x="1993392" y="4745736"/>
-            <a:ext cx="3602736" cy="237744"/>
+            <a:off x="8668512" y="3739896"/>
+            <a:ext cx="3099816" cy="237744"/>
           </a:xfrm>
           <a:prstGeom prst="rect">
             <a:avLst/>
@@ -13083,8 +13083,8 @@
         </p:blipFill>
         <p:spPr>
           <a:xfrm>
-            <a:off x="1993392" y="5001768"/>
-            <a:ext cx="3602736" cy="1353312"/>
+            <a:off x="8668512" y="3995928"/>
+            <a:ext cx="3099816" cy="2313432"/>
           </a:xfrm>
           <a:prstGeom prst="rect">
             <a:avLst/>
@@ -13093,156 +13093,7 @@
       </p:pic>
       <p:sp>
         <p:nvSpPr>
-          <p:cNvPr id="36" name="Shape 30"/>
-          <p:cNvSpPr/>
-          <p:nvPr/>
-        </p:nvSpPr>
-        <p:spPr>
-          <a:xfrm>
-            <a:off x="5760720" y="4709160"/>
-            <a:ext cx="6080760" cy="1737360"/>
-          </a:xfrm>
-          <a:prstGeom prst="rect">
-            <a:avLst/>
-          </a:prstGeom>
-          <a:solidFill>
-            <a:srgbClr val="F7F9FC"/>
-          </a:solidFill>
-          <a:ln w="12700">
-            <a:solidFill>
-              <a:srgbClr val="D5DAE5"/>
-            </a:solidFill>
-            <a:prstDash val="solid"/>
-          </a:ln>
-        </p:spPr>
-      </p:sp>
-      <p:sp>
-        <p:nvSpPr>
-          <p:cNvPr id="37" name="Text 31"/>
-          <p:cNvSpPr/>
-          <p:nvPr/>
-        </p:nvSpPr>
-        <p:spPr>
-          <a:xfrm>
-            <a:off x="5852160" y="4754880"/>
-            <a:ext cx="5897880" cy="237744"/>
-          </a:xfrm>
-          <a:prstGeom prst="rect">
-            <a:avLst/>
-          </a:prstGeom>
-          <a:noFill/>
-          <a:ln/>
-        </p:spPr>
-        <p:txBody>
-          <a:bodyPr wrap="square" lIns="0" tIns="0" rIns="0" bIns="0" rtlCol="0" anchor="ctr"/>
-          <a:lstStyle/>
-          <a:p>
-            <a:pPr indent="0" marL="0">
-              <a:buNone/>
-            </a:pPr>
-            <a:r>
-              <a:rPr lang="en-US" sz="950" b="1" dirty="0">
-                <a:solidFill>
-                  <a:srgbClr val="1E2761"/>
-                </a:solidFill>
-                <a:latin typeface="Meiryo" pitchFamily="34" charset="0"/>
-                <a:ea typeface="Meiryo" pitchFamily="34" charset="-122"/>
-                <a:cs typeface="Meiryo" pitchFamily="34" charset="-120"/>
-              </a:rPr>
-              <a:t>スタックの定義と楕円の見方</a:t>
-            </a:r>
-            <a:endParaRPr lang="en-US" sz="950" dirty="0"/>
-          </a:p>
-        </p:txBody>
-      </p:sp>
-      <p:sp>
-        <p:nvSpPr>
-          <p:cNvPr id="38" name="Text 32"/>
-          <p:cNvSpPr/>
-          <p:nvPr/>
-        </p:nvSpPr>
-        <p:spPr>
-          <a:xfrm>
-            <a:off x="5897880" y="5020056"/>
-            <a:ext cx="5806440" cy="1353312"/>
-          </a:xfrm>
-          <a:prstGeom prst="rect">
-            <a:avLst/>
-          </a:prstGeom>
-          <a:noFill/>
-          <a:ln/>
-        </p:spPr>
-        <p:txBody>
-          <a:bodyPr wrap="square" lIns="0" tIns="0" rIns="0" bIns="0" rtlCol="0" anchor="t"/>
-          <a:lstStyle/>
-          <a:p>
-            <a:pPr marL="101600" indent="-101600">
-              <a:lnSpc>
-                <a:spcPct val="145000"/>
-              </a:lnSpc>
-              <a:buSzPct val="100000"/>
-              <a:buChar char="•"/>
-            </a:pPr>
-            <a:r>
-              <a:rPr lang="en-US" sz="950" dirty="0">
-                <a:solidFill>
-                  <a:srgbClr val="2B2B2B"/>
-                </a:solidFill>
-                <a:latin typeface="Meiryo" pitchFamily="34" charset="0"/>
-                <a:ea typeface="Meiryo" pitchFamily="34" charset="-122"/>
-                <a:cs typeface="Meiryo" pitchFamily="34" charset="-120"/>
-              </a:rPr>
-              <a:t>対象はCanonビューの計測値X/Y。全Shot・全WaferのMark計測値をShot中心原点の座標系に重ね、Mark位置ごとに集計（Wafer平均を差し引き）</a:t>
-            </a:r>
-            <a:endParaRPr lang="en-US" sz="950" dirty="0"/>
-          </a:p>
-          <a:p>
-            <a:pPr marL="101600" indent="-101600">
-              <a:lnSpc>
-                <a:spcPct val="145000"/>
-              </a:lnSpc>
-              <a:buSzPct val="100000"/>
-              <a:buChar char="•"/>
-            </a:pPr>
-            <a:r>
-              <a:rPr lang="en-US" sz="950" dirty="0">
-                <a:solidFill>
-                  <a:srgbClr val="2B2B2B"/>
-                </a:solidFill>
-                <a:latin typeface="Meiryo" pitchFamily="34" charset="0"/>
-                <a:ea typeface="Meiryo" pitchFamily="34" charset="-122"/>
-                <a:cs typeface="Meiryo" pitchFamily="34" charset="-120"/>
-              </a:rPr>
-              <a:t>V-23の楕円: サイズ=分散（固有値√×k）、傾き=X/Y相関の向き、色=|相関係数|。V-22と同じ規則</a:t>
-            </a:r>
-            <a:endParaRPr lang="en-US" sz="950" dirty="0"/>
-          </a:p>
-          <a:p>
-            <a:pPr marL="101600" indent="-101600">
-              <a:lnSpc>
-                <a:spcPct val="145000"/>
-              </a:lnSpc>
-              <a:buSzPct val="100000"/>
-              <a:buChar char="•"/>
-            </a:pPr>
-            <a:r>
-              <a:rPr lang="en-US" sz="950" dirty="0">
-                <a:solidFill>
-                  <a:srgbClr val="2B2B2B"/>
-                </a:solidFill>
-                <a:latin typeface="Meiryo" pitchFamily="34" charset="0"/>
-                <a:ea typeface="Meiryo" pitchFamily="34" charset="-122"/>
-                <a:cs typeface="Meiryo" pitchFamily="34" charset="-120"/>
-              </a:rPr>
-              <a:t>OPERATIONによりShotサイズ・Mark数（RDH: 4点 / MSR: 6点）が異なるため、OPERATION絞り込みは必須</a:t>
-            </a:r>
-            <a:endParaRPr lang="en-US" sz="950" dirty="0"/>
-          </a:p>
-        </p:txBody>
-      </p:sp>
-      <p:sp>
-        <p:nvSpPr>
-          <p:cNvPr id="39" name="Text 33"/>
+          <p:cNvPr id="36" name="Text 30"/>
           <p:cNvSpPr/>
           <p:nvPr/>
         </p:nvSpPr>

--- a/dashboard_mockup.pptx
+++ b/dashboard_mockup.pptx
@@ -2463,7 +2463,7 @@
                 <a:ea typeface="Meiryo" pitchFamily="34" charset="-122"/>
                 <a:cs typeface="Meiryo" pitchFamily="34" charset="-120"/>
               </a:rPr>
-              <a:t>カテゴリ別傾向と時系列の早期検知（V-01/04/05/06/07/08/09/10）</a:t>
+              <a:t>カテゴリ別傾向と時系列の早期検知（V-01/04/06/09/10/30）</a:t>
             </a:r>
             <a:endParaRPr lang="en-US" sz="950" dirty="0"/>
           </a:p>
@@ -3701,7 +3701,7 @@
         <p:spPr>
           <a:xfrm>
             <a:off x="1920240" y="1901952"/>
-            <a:ext cx="5852160" cy="2286000"/>
+            <a:ext cx="6263640" cy="2487168"/>
           </a:xfrm>
           <a:prstGeom prst="rect">
             <a:avLst/>
@@ -3726,7 +3726,7 @@
         <p:spPr>
           <a:xfrm>
             <a:off x="1993392" y="1938528"/>
-            <a:ext cx="5705856" cy="237744"/>
+            <a:ext cx="6117336" cy="237744"/>
           </a:xfrm>
           <a:prstGeom prst="rect">
             <a:avLst/>
@@ -3750,7 +3750,7 @@
                 <a:ea typeface="Meiryo" pitchFamily="34" charset="-122"/>
                 <a:cs typeface="Meiryo" pitchFamily="34" charset="-120"/>
               </a:rPr>
-              <a:t>V-06｜線形成分トレンド（号機別・管理限界線つき）</a:t>
+              <a:t>V-06｜Wafer低次補正成分（6成分）のトレンド（号機別）</a:t>
             </a:r>
             <a:endParaRPr lang="en-US" sz="900" dirty="0"/>
           </a:p>
@@ -3758,7 +3758,7 @@
       </p:sp>
       <p:pic>
         <p:nvPicPr>
-          <p:cNvPr id="38" name="Image 0" descr="/private/tmp/claude-501/-Users-sakamoto-04---------ClaudeCode-GitHub-PowerBI-LithoBooster-DashBoard/1d2ed9c0-fbf9-4130-80df-0e37d1e3ada0/scratchpad/charts/p1_trend.png">    </p:cNvPr>
+          <p:cNvPr id="38" name="Image 0" descr="/private/tmp/claude-501/-Users-sakamoto-04---------ClaudeCode-GitHub-PowerBI-LithoBooster-DashBoard/1d2ed9c0-fbf9-4130-80df-0e37d1e3ada0/scratchpad/charts/p1_trend6.png">    </p:cNvPr>
           <p:cNvPicPr>
             <a:picLocks noChangeAspect="1"/>
           </p:cNvPicPr>
@@ -3772,7 +3772,7 @@
         <p:spPr>
           <a:xfrm>
             <a:off x="1993392" y="2194560"/>
-            <a:ext cx="5705856" cy="1901952"/>
+            <a:ext cx="6117336" cy="2103120"/>
           </a:xfrm>
           <a:prstGeom prst="rect">
             <a:avLst/>
@@ -3787,8 +3787,8 @@
         </p:nvSpPr>
         <p:spPr>
           <a:xfrm>
-            <a:off x="7882128" y="1901952"/>
-            <a:ext cx="3959352" cy="2286000"/>
+            <a:off x="8275320" y="1901952"/>
+            <a:ext cx="3566160" cy="2487168"/>
           </a:xfrm>
           <a:prstGeom prst="rect">
             <a:avLst/>
@@ -3812,8 +3812,8 @@
         </p:nvSpPr>
         <p:spPr>
           <a:xfrm>
-            <a:off x="7955280" y="1938528"/>
-            <a:ext cx="3813048" cy="237744"/>
+            <a:off x="8348472" y="1938528"/>
+            <a:ext cx="3419856" cy="237744"/>
           </a:xfrm>
           <a:prstGeom prst="rect">
             <a:avLst/>
@@ -3837,7 +3837,7 @@
                 <a:ea typeface="Meiryo" pitchFamily="34" charset="-122"/>
                 <a:cs typeface="Meiryo" pitchFamily="34" charset="-120"/>
               </a:rPr>
-              <a:t>V-01｜計測値X/Yの箱ひげ（OPERATION別）</a:t>
+              <a:t>V-30｜計測値X/Yのトレンド（Wafer平均）</a:t>
             </a:r>
             <a:endParaRPr lang="en-US" sz="900" dirty="0"/>
           </a:p>
@@ -3845,7 +3845,7 @@
       </p:sp>
       <p:pic>
         <p:nvPicPr>
-          <p:cNvPr id="41" name="Image 1" descr="/private/tmp/claude-501/-Users-sakamoto-04---------ClaudeCode-GitHub-PowerBI-LithoBooster-DashBoard/1d2ed9c0-fbf9-4130-80df-0e37d1e3ada0/scratchpad/charts/p1_box.png">    </p:cNvPr>
+          <p:cNvPr id="41" name="Image 1" descr="/private/tmp/claude-501/-Users-sakamoto-04---------ClaudeCode-GitHub-PowerBI-LithoBooster-DashBoard/1d2ed9c0-fbf9-4130-80df-0e37d1e3ada0/scratchpad/charts/p1_meastrend.png">    </p:cNvPr>
           <p:cNvPicPr>
             <a:picLocks noChangeAspect="1"/>
           </p:cNvPicPr>
@@ -3858,8 +3858,8 @@
         </p:blipFill>
         <p:spPr>
           <a:xfrm>
-            <a:off x="7955280" y="2194560"/>
-            <a:ext cx="3813048" cy="1901952"/>
+            <a:off x="8348472" y="2194560"/>
+            <a:ext cx="3419856" cy="2103120"/>
           </a:xfrm>
           <a:prstGeom prst="rect">
             <a:avLst/>
@@ -3874,8 +3874,8 @@
         </p:nvSpPr>
         <p:spPr>
           <a:xfrm>
-            <a:off x="1920240" y="4279392"/>
-            <a:ext cx="5852160" cy="2176272"/>
+            <a:off x="1920240" y="4480560"/>
+            <a:ext cx="3977640" cy="1975104"/>
           </a:xfrm>
           <a:prstGeom prst="rect">
             <a:avLst/>
@@ -3899,8 +3899,8 @@
         </p:nvSpPr>
         <p:spPr>
           <a:xfrm>
-            <a:off x="1993392" y="4315968"/>
-            <a:ext cx="5705856" cy="237744"/>
+            <a:off x="1993392" y="4517136"/>
+            <a:ext cx="3831336" cy="237744"/>
           </a:xfrm>
           <a:prstGeom prst="rect">
             <a:avLst/>
@@ -3924,7 +3924,7 @@
                 <a:ea typeface="Meiryo" pitchFamily="34" charset="-122"/>
                 <a:cs typeface="Meiryo" pitchFamily="34" charset="-120"/>
               </a:rPr>
-              <a:t>V-09｜装置×日付ヒートマップ（異常の早期発見）</a:t>
+              <a:t>V-01｜計測値X/Yの箱ひげ（OPERATION別）</a:t>
             </a:r>
             <a:endParaRPr lang="en-US" sz="900" dirty="0"/>
           </a:p>
@@ -3932,7 +3932,7 @@
       </p:sp>
       <p:pic>
         <p:nvPicPr>
-          <p:cNvPr id="44" name="Image 2" descr="/private/tmp/claude-501/-Users-sakamoto-04---------ClaudeCode-GitHub-PowerBI-LithoBooster-DashBoard/1d2ed9c0-fbf9-4130-80df-0e37d1e3ada0/scratchpad/charts/p1_heat.png">    </p:cNvPr>
+          <p:cNvPr id="44" name="Image 2" descr="/private/tmp/claude-501/-Users-sakamoto-04---------ClaudeCode-GitHub-PowerBI-LithoBooster-DashBoard/1d2ed9c0-fbf9-4130-80df-0e37d1e3ada0/scratchpad/charts/p1_box.png">    </p:cNvPr>
           <p:cNvPicPr>
             <a:picLocks noChangeAspect="1"/>
           </p:cNvPicPr>
@@ -3945,8 +3945,8 @@
         </p:blipFill>
         <p:spPr>
           <a:xfrm>
-            <a:off x="1993392" y="4572000"/>
-            <a:ext cx="5705856" cy="1792224"/>
+            <a:off x="1993392" y="4773168"/>
+            <a:ext cx="3831336" cy="1591056"/>
           </a:xfrm>
           <a:prstGeom prst="rect">
             <a:avLst/>
@@ -3961,8 +3961,8 @@
         </p:nvSpPr>
         <p:spPr>
           <a:xfrm>
-            <a:off x="7882128" y="4279392"/>
-            <a:ext cx="3959352" cy="2176272"/>
+            <a:off x="5989320" y="4480560"/>
+            <a:ext cx="3383280" cy="1975104"/>
           </a:xfrm>
           <a:prstGeom prst="rect">
             <a:avLst/>
@@ -3986,8 +3986,8 @@
         </p:nvSpPr>
         <p:spPr>
           <a:xfrm>
-            <a:off x="7955280" y="4315968"/>
-            <a:ext cx="3813048" cy="237744"/>
+            <a:off x="6062472" y="4517136"/>
+            <a:ext cx="3236976" cy="237744"/>
           </a:xfrm>
           <a:prstGeom prst="rect">
             <a:avLst/>
@@ -4011,7 +4011,7 @@
                 <a:ea typeface="Meiryo" pitchFamily="34" charset="-122"/>
                 <a:cs typeface="Meiryo" pitchFamily="34" charset="-120"/>
               </a:rPr>
-              <a:t>V-04｜計測判定のOPERATION別比率</a:t>
+              <a:t>V-09｜装置×日付ヒートマップ</a:t>
             </a:r>
             <a:endParaRPr lang="en-US" sz="900" dirty="0"/>
           </a:p>
@@ -4019,7 +4019,7 @@
       </p:sp>
       <p:pic>
         <p:nvPicPr>
-          <p:cNvPr id="47" name="Image 3" descr="/private/tmp/claude-501/-Users-sakamoto-04---------ClaudeCode-GitHub-PowerBI-LithoBooster-DashBoard/1d2ed9c0-fbf9-4130-80df-0e37d1e3ada0/scratchpad/charts/p1_ng.png">    </p:cNvPr>
+          <p:cNvPr id="47" name="Image 3" descr="/private/tmp/claude-501/-Users-sakamoto-04---------ClaudeCode-GitHub-PowerBI-LithoBooster-DashBoard/1d2ed9c0-fbf9-4130-80df-0e37d1e3ada0/scratchpad/charts/p1_heat.png">    </p:cNvPr>
           <p:cNvPicPr>
             <a:picLocks noChangeAspect="1"/>
           </p:cNvPicPr>
@@ -4032,8 +4032,8 @@
         </p:blipFill>
         <p:spPr>
           <a:xfrm>
-            <a:off x="7955280" y="4572000"/>
-            <a:ext cx="3813048" cy="1792224"/>
+            <a:off x="6062472" y="4773168"/>
+            <a:ext cx="3236976" cy="1591056"/>
           </a:xfrm>
           <a:prstGeom prst="rect">
             <a:avLst/>
@@ -4042,7 +4042,94 @@
       </p:pic>
       <p:sp>
         <p:nvSpPr>
-          <p:cNvPr id="48" name="Text 42"/>
+          <p:cNvPr id="48" name="Shape 42"/>
+          <p:cNvSpPr/>
+          <p:nvPr/>
+        </p:nvSpPr>
+        <p:spPr>
+          <a:xfrm>
+            <a:off x="9464040" y="4480560"/>
+            <a:ext cx="2377440" cy="1975104"/>
+          </a:xfrm>
+          <a:prstGeom prst="rect">
+            <a:avLst/>
+          </a:prstGeom>
+          <a:solidFill>
+            <a:srgbClr val="FFFFFF"/>
+          </a:solidFill>
+          <a:ln w="12700">
+            <a:solidFill>
+              <a:srgbClr val="D5DAE5"/>
+            </a:solidFill>
+            <a:prstDash val="solid"/>
+          </a:ln>
+        </p:spPr>
+      </p:sp>
+      <p:sp>
+        <p:nvSpPr>
+          <p:cNvPr id="49" name="Text 43"/>
+          <p:cNvSpPr/>
+          <p:nvPr/>
+        </p:nvSpPr>
+        <p:spPr>
+          <a:xfrm>
+            <a:off x="9537192" y="4517136"/>
+            <a:ext cx="2231136" cy="237744"/>
+          </a:xfrm>
+          <a:prstGeom prst="rect">
+            <a:avLst/>
+          </a:prstGeom>
+          <a:noFill/>
+          <a:ln/>
+        </p:spPr>
+        <p:txBody>
+          <a:bodyPr wrap="square" lIns="0" tIns="0" rIns="0" bIns="0" rtlCol="0" anchor="ctr"/>
+          <a:lstStyle/>
+          <a:p>
+            <a:pPr indent="0" marL="0">
+              <a:buNone/>
+            </a:pPr>
+            <a:r>
+              <a:rPr lang="en-US" sz="900" b="1" dirty="0">
+                <a:solidFill>
+                  <a:srgbClr val="1E2761"/>
+                </a:solidFill>
+                <a:latin typeface="Meiryo" pitchFamily="34" charset="0"/>
+                <a:ea typeface="Meiryo" pitchFamily="34" charset="-122"/>
+                <a:cs typeface="Meiryo" pitchFamily="34" charset="-120"/>
+              </a:rPr>
+              <a:t>V-04｜計測判定の比率</a:t>
+            </a:r>
+            <a:endParaRPr lang="en-US" sz="900" dirty="0"/>
+          </a:p>
+        </p:txBody>
+      </p:sp>
+      <p:pic>
+        <p:nvPicPr>
+          <p:cNvPr id="50" name="Image 4" descr="/private/tmp/claude-501/-Users-sakamoto-04---------ClaudeCode-GitHub-PowerBI-LithoBooster-DashBoard/1d2ed9c0-fbf9-4130-80df-0e37d1e3ada0/scratchpad/charts/p1_ng.png">    </p:cNvPr>
+          <p:cNvPicPr>
+            <a:picLocks noChangeAspect="1"/>
+          </p:cNvPicPr>
+          <p:nvPr/>
+        </p:nvPicPr>
+        <p:blipFill>
+          <a:blip r:embed="rId5"/>
+          <a:srcRect l="0" r="0" t="0" b="0"/>
+          <a:stretch/>
+        </p:blipFill>
+        <p:spPr>
+          <a:xfrm>
+            <a:off x="9537192" y="4773168"/>
+            <a:ext cx="2231136" cy="1591056"/>
+          </a:xfrm>
+          <a:prstGeom prst="rect">
+            <a:avLst/>
+          </a:prstGeom>
+        </p:spPr>
+      </p:pic>
+      <p:sp>
+        <p:nvSpPr>
+          <p:cNvPr id="51" name="Text 44"/>
           <p:cNvSpPr/>
           <p:nvPr/>
         </p:nvSpPr>
@@ -5072,7 +5159,7 @@
         <p:spPr>
           <a:xfrm>
             <a:off x="9006840" y="914400"/>
-            <a:ext cx="2834640" cy="2743200"/>
+            <a:ext cx="2834640" cy="2331720"/>
           </a:xfrm>
           <a:prstGeom prst="rect">
             <a:avLst/>
@@ -5136,7 +5223,7 @@
         <p:spPr>
           <a:xfrm>
             <a:off x="9144000" y="1225296"/>
-            <a:ext cx="2560320" cy="2359152"/>
+            <a:ext cx="2560320" cy="1947672"/>
           </a:xfrm>
           <a:prstGeom prst="rect">
             <a:avLst/>
@@ -5220,8 +5307,8 @@
         </p:nvSpPr>
         <p:spPr>
           <a:xfrm>
-            <a:off x="9006840" y="3794760"/>
-            <a:ext cx="2834640" cy="2651760"/>
+            <a:off x="9006840" y="3383280"/>
+            <a:ext cx="2834640" cy="2331720"/>
           </a:xfrm>
           <a:prstGeom prst="rect">
             <a:avLst/>
@@ -5245,7 +5332,7 @@
         </p:nvSpPr>
         <p:spPr>
           <a:xfrm>
-            <a:off x="9098280" y="3840480"/>
+            <a:off x="9098280" y="3429000"/>
             <a:ext cx="2651760" cy="237744"/>
           </a:xfrm>
           <a:prstGeom prst="rect">
@@ -5284,8 +5371,8 @@
         </p:nvSpPr>
         <p:spPr>
           <a:xfrm>
-            <a:off x="9144000" y="4105656"/>
-            <a:ext cx="2560320" cy="2267712"/>
+            <a:off x="9144000" y="3694176"/>
+            <a:ext cx="2560320" cy="1947672"/>
           </a:xfrm>
           <a:prstGeom prst="rect">
             <a:avLst/>
@@ -8513,7 +8600,7 @@
         <p:spPr>
           <a:xfrm>
             <a:off x="1920240" y="1901952"/>
-            <a:ext cx="5852160" cy="2286000"/>
+            <a:ext cx="6263640" cy="2487168"/>
           </a:xfrm>
           <a:prstGeom prst="rect">
             <a:avLst/>
@@ -8538,7 +8625,7 @@
         <p:spPr>
           <a:xfrm>
             <a:off x="1993392" y="1938528"/>
-            <a:ext cx="5705856" cy="237744"/>
+            <a:ext cx="6117336" cy="237744"/>
           </a:xfrm>
           <a:prstGeom prst="rect">
             <a:avLst/>
@@ -8562,7 +8649,7 @@
                 <a:ea typeface="Meiryo" pitchFamily="34" charset="-122"/>
                 <a:cs typeface="Meiryo" pitchFamily="34" charset="-120"/>
               </a:rPr>
-              <a:t>V-06｜Wafer線形成分トレンド（号機別・管理限界線つき）</a:t>
+              <a:t>V-06｜Wafer低次補正成分（6成分）のトレンド（号機別）</a:t>
             </a:r>
             <a:endParaRPr lang="en-US" sz="900" dirty="0"/>
           </a:p>
@@ -8570,7 +8657,7 @@
       </p:sp>
       <p:pic>
         <p:nvPicPr>
-          <p:cNvPr id="44" name="Image 0" descr="/private/tmp/claude-501/-Users-sakamoto-04---------ClaudeCode-GitHub-PowerBI-LithoBooster-DashBoard/1d2ed9c0-fbf9-4130-80df-0e37d1e3ada0/scratchpad/charts/p4_trend.png">    </p:cNvPr>
+          <p:cNvPr id="44" name="Image 0" descr="/private/tmp/claude-501/-Users-sakamoto-04---------ClaudeCode-GitHub-PowerBI-LithoBooster-DashBoard/1d2ed9c0-fbf9-4130-80df-0e37d1e3ada0/scratchpad/charts/p4_trend6.png">    </p:cNvPr>
           <p:cNvPicPr>
             <a:picLocks noChangeAspect="1"/>
           </p:cNvPicPr>
@@ -8584,7 +8671,7 @@
         <p:spPr>
           <a:xfrm>
             <a:off x="1993392" y="2194560"/>
-            <a:ext cx="5705856" cy="1901952"/>
+            <a:ext cx="6117336" cy="2103120"/>
           </a:xfrm>
           <a:prstGeom prst="rect">
             <a:avLst/>
@@ -8599,8 +8686,8 @@
         </p:nvSpPr>
         <p:spPr>
           <a:xfrm>
-            <a:off x="7882128" y="1901952"/>
-            <a:ext cx="3959352" cy="2286000"/>
+            <a:off x="8275320" y="1901952"/>
+            <a:ext cx="3566160" cy="2487168"/>
           </a:xfrm>
           <a:prstGeom prst="rect">
             <a:avLst/>
@@ -8624,8 +8711,8 @@
         </p:nvSpPr>
         <p:spPr>
           <a:xfrm>
-            <a:off x="7955280" y="1938528"/>
-            <a:ext cx="3813048" cy="237744"/>
+            <a:off x="8348472" y="1938528"/>
+            <a:ext cx="3419856" cy="237744"/>
           </a:xfrm>
           <a:prstGeom prst="rect">
             <a:avLst/>
@@ -8670,8 +8757,8 @@
         </p:blipFill>
         <p:spPr>
           <a:xfrm>
-            <a:off x="7955280" y="2194560"/>
-            <a:ext cx="3813048" cy="1901952"/>
+            <a:off x="8348472" y="2194560"/>
+            <a:ext cx="3419856" cy="2103120"/>
           </a:xfrm>
           <a:prstGeom prst="rect">
             <a:avLst/>
@@ -8686,8 +8773,8 @@
         </p:nvSpPr>
         <p:spPr>
           <a:xfrm>
-            <a:off x="1920240" y="4279392"/>
-            <a:ext cx="5852160" cy="2176272"/>
+            <a:off x="1920240" y="4480560"/>
+            <a:ext cx="6263640" cy="1975104"/>
           </a:xfrm>
           <a:prstGeom prst="rect">
             <a:avLst/>
@@ -8711,8 +8798,8 @@
         </p:nvSpPr>
         <p:spPr>
           <a:xfrm>
-            <a:off x="1993392" y="4315968"/>
-            <a:ext cx="5705856" cy="237744"/>
+            <a:off x="1993392" y="4517136"/>
+            <a:ext cx="6117336" cy="237744"/>
           </a:xfrm>
           <a:prstGeom prst="rect">
             <a:avLst/>
@@ -8757,8 +8844,8 @@
         </p:blipFill>
         <p:spPr>
           <a:xfrm>
-            <a:off x="1993392" y="4572000"/>
-            <a:ext cx="5705856" cy="1792224"/>
+            <a:off x="1993392" y="4773168"/>
+            <a:ext cx="6117336" cy="1591056"/>
           </a:xfrm>
           <a:prstGeom prst="rect">
             <a:avLst/>
@@ -8773,8 +8860,8 @@
         </p:nvSpPr>
         <p:spPr>
           <a:xfrm>
-            <a:off x="7882128" y="4279392"/>
-            <a:ext cx="3959352" cy="2176272"/>
+            <a:off x="8275320" y="4480560"/>
+            <a:ext cx="3566160" cy="1975104"/>
           </a:xfrm>
           <a:prstGeom prst="rect">
             <a:avLst/>
@@ -8798,8 +8885,8 @@
         </p:nvSpPr>
         <p:spPr>
           <a:xfrm>
-            <a:off x="7973568" y="4325112"/>
-            <a:ext cx="3776472" cy="237744"/>
+            <a:off x="8366760" y="4526280"/>
+            <a:ext cx="3383280" cy="237744"/>
           </a:xfrm>
           <a:prstGeom prst="rect">
             <a:avLst/>
@@ -8837,8 +8924,8 @@
         </p:nvSpPr>
         <p:spPr>
           <a:xfrm>
-            <a:off x="8019288" y="4590288"/>
-            <a:ext cx="3685032" cy="1792224"/>
+            <a:off x="8412480" y="4791456"/>
+            <a:ext cx="3291840" cy="1591056"/>
           </a:xfrm>
           <a:prstGeom prst="rect">
             <a:avLst/>
@@ -9946,7 +10033,7 @@
         <p:spPr>
           <a:xfrm>
             <a:off x="9006840" y="914400"/>
-            <a:ext cx="2834640" cy="2743200"/>
+            <a:ext cx="2834640" cy="2331720"/>
           </a:xfrm>
           <a:prstGeom prst="rect">
             <a:avLst/>
@@ -10010,7 +10097,7 @@
         <p:spPr>
           <a:xfrm>
             <a:off x="9144000" y="1225296"/>
-            <a:ext cx="2560320" cy="2359152"/>
+            <a:ext cx="2560320" cy="1947672"/>
           </a:xfrm>
           <a:prstGeom prst="rect">
             <a:avLst/>
@@ -10094,8 +10181,8 @@
         </p:nvSpPr>
         <p:spPr>
           <a:xfrm>
-            <a:off x="9006840" y="3794760"/>
-            <a:ext cx="2834640" cy="2651760"/>
+            <a:off x="9006840" y="3383280"/>
+            <a:ext cx="2834640" cy="2331720"/>
           </a:xfrm>
           <a:prstGeom prst="rect">
             <a:avLst/>
@@ -10119,7 +10206,7 @@
         </p:nvSpPr>
         <p:spPr>
           <a:xfrm>
-            <a:off x="9098280" y="3840480"/>
+            <a:off x="9098280" y="3429000"/>
             <a:ext cx="2651760" cy="237744"/>
           </a:xfrm>
           <a:prstGeom prst="rect">
@@ -10158,8 +10245,8 @@
         </p:nvSpPr>
         <p:spPr>
           <a:xfrm>
-            <a:off x="9144000" y="4105656"/>
-            <a:ext cx="2560320" cy="2267712"/>
+            <a:off x="9144000" y="3694176"/>
+            <a:ext cx="2560320" cy="1947672"/>
           </a:xfrm>
           <a:prstGeom prst="rect">
             <a:avLst/>
@@ -11299,7 +11386,7 @@
         <p:spPr>
           <a:xfrm>
             <a:off x="1920240" y="914400"/>
-            <a:ext cx="3246120" cy="3657600"/>
+            <a:ext cx="3246120" cy="4114800"/>
           </a:xfrm>
           <a:prstGeom prst="rect">
             <a:avLst/>
@@ -11370,7 +11457,7 @@
         <p:spPr>
           <a:xfrm>
             <a:off x="1993392" y="1207008"/>
-            <a:ext cx="3099816" cy="3273552"/>
+            <a:ext cx="3099816" cy="3730752"/>
           </a:xfrm>
           <a:prstGeom prst="rect">
             <a:avLst/>
@@ -11386,7 +11473,7 @@
         <p:spPr>
           <a:xfrm>
             <a:off x="5257800" y="914400"/>
-            <a:ext cx="3246120" cy="3657600"/>
+            <a:ext cx="3246120" cy="4114800"/>
           </a:xfrm>
           <a:prstGeom prst="rect">
             <a:avLst/>
@@ -11457,7 +11544,7 @@
         <p:spPr>
           <a:xfrm>
             <a:off x="5330952" y="1207008"/>
-            <a:ext cx="3099816" cy="3273552"/>
+            <a:ext cx="3099816" cy="3730752"/>
           </a:xfrm>
           <a:prstGeom prst="rect">
             <a:avLst/>
@@ -11560,7 +11647,7 @@
         <p:spPr>
           <a:xfrm>
             <a:off x="8595360" y="3383280"/>
-            <a:ext cx="3246120" cy="1188720"/>
+            <a:ext cx="3246120" cy="1645920"/>
           </a:xfrm>
           <a:prstGeom prst="rect">
             <a:avLst/>
@@ -11624,7 +11711,7 @@
         <p:spPr>
           <a:xfrm>
             <a:off x="8732520" y="3694176"/>
-            <a:ext cx="2971800" cy="804672"/>
+            <a:ext cx="2971800" cy="1261872"/>
           </a:xfrm>
           <a:prstGeom prst="rect">
             <a:avLst/>
@@ -11666,8 +11753,8 @@
         </p:nvSpPr>
         <p:spPr>
           <a:xfrm>
-            <a:off x="1920240" y="4709160"/>
-            <a:ext cx="9921240" cy="1737360"/>
+            <a:off x="1920240" y="5166360"/>
+            <a:ext cx="9921240" cy="1280160"/>
           </a:xfrm>
           <a:prstGeom prst="rect">
             <a:avLst/>
@@ -11691,7 +11778,7 @@
         </p:nvSpPr>
         <p:spPr>
           <a:xfrm>
-            <a:off x="2011680" y="4754880"/>
+            <a:off x="2011680" y="5212080"/>
             <a:ext cx="9738360" cy="237744"/>
           </a:xfrm>
           <a:prstGeom prst="rect">
@@ -11730,8 +11817,8 @@
         </p:nvSpPr>
         <p:spPr>
           <a:xfrm>
-            <a:off x="2057400" y="5020056"/>
-            <a:ext cx="9646920" cy="1353312"/>
+            <a:off x="2057400" y="5477256"/>
+            <a:ext cx="9646920" cy="896112"/>
           </a:xfrm>
           <a:prstGeom prst="rect">
             <a:avLst/>
@@ -12801,7 +12888,7 @@
                 <a:ea typeface="Meiryo" pitchFamily="34" charset="-122"/>
                 <a:cs typeface="Meiryo" pitchFamily="34" charset="-120"/>
               </a:rPr>
-              <a:t>V-19｜スタック平均ベクトル（Scan方向ごと）</a:t>
+              <a:t>V-19｜スタック平均ベクトル（全体 / Scan方向1 / Scan方向2）</a:t>
             </a:r>
             <a:endParaRPr lang="en-US" sz="900" dirty="0"/>
           </a:p>
@@ -12888,7 +12975,7 @@
                 <a:ea typeface="Meiryo" pitchFamily="34" charset="-122"/>
                 <a:cs typeface="Meiryo" pitchFamily="34" charset="-120"/>
               </a:rPr>
-              <a:t>V-23｜Mark位置ごとの共分散楕円（Scan方向ごと）</a:t>
+              <a:t>V-23｜Mark位置ごとの共分散楕円（全体 / Scan方向1 / Scan方向2）</a:t>
             </a:r>
             <a:endParaRPr lang="en-US" sz="900" dirty="0"/>
           </a:p>
@@ -13062,7 +13149,7 @@
                 <a:ea typeface="Meiryo" pitchFamily="34" charset="-122"/>
                 <a:cs typeface="Meiryo" pitchFamily="34" charset="-120"/>
               </a:rPr>
-              <a:t>V-29｜Scan方向ごとの計測値X/Y分布</a:t>
+              <a:t>V-29｜計測値X/Y分布（全体 / 方向1 / 方向2）</a:t>
             </a:r>
             <a:endParaRPr lang="en-US" sz="900" dirty="0"/>
           </a:p>
